--- a/media/exports/reports/2026-05/program-cost.pptx
+++ b/media/exports/reports/2026-05/program-cost.pptx
@@ -316,7 +316,9 @@
     <a:lstStyle/>
     <a:p>
       <a:pPr>
-        <a:defRPr sz="1800"/>
+        <a:defRPr sz="1800">
+          <a:latin typeface="Roboto"/>
+        </a:defRPr>
       </a:pPr>
       <a:endParaRPr lang="en-US"/>
     </a:p>
@@ -526,7 +528,9 @@
     <a:lstStyle/>
     <a:p>
       <a:pPr>
-        <a:defRPr sz="1800"/>
+        <a:defRPr sz="1800">
+          <a:latin typeface="Roboto"/>
+        </a:defRPr>
       </a:pPr>
       <a:endParaRPr lang="en-US"/>
     </a:p>
@@ -798,7 +802,9 @@
     <a:lstStyle/>
     <a:p>
       <a:pPr>
-        <a:defRPr sz="1800"/>
+        <a:defRPr sz="1800">
+          <a:latin typeface="Roboto"/>
+        </a:defRPr>
       </a:pPr>
       <a:endParaRPr/>
     </a:p>
@@ -3829,11 +3835,17 @@
           <a:bodyPr rtlCol="0" anchor="ctr"/>
           <a:lstStyle/>
           <a:p>
+            <a:pPr>
+              <a:defRPr>
+                <a:latin typeface="Roboto"/>
+              </a:defRPr>
+            </a:pPr>
             <a:r>
               <a:rPr sz="1600" b="1">
                 <a:solidFill>
                   <a:srgbClr val="FFFFFF"/>
                 </a:solidFill>
+                <a:latin typeface="Roboto"/>
               </a:rPr>
               <a:t>4th</a:t>
             </a:r>
@@ -3862,14 +3874,19 @@
           </a:bodyPr>
           <a:lstStyle/>
           <a:p>
+            <a:pPr>
+              <a:defRPr>
+                <a:latin typeface="Roboto"/>
+              </a:defRPr>
+            </a:pPr>
             <a:r>
               <a:rPr sz="1800" b="1">
                 <a:solidFill>
                   <a:srgbClr val="25342A"/>
                 </a:solidFill>
-                <a:latin typeface="Arial"/>
-              </a:rPr>
-              <a:t>The 4th Sheet</a:t>
+                <a:latin typeface="Roboto"/>
+              </a:rPr>
+              <a:t>The Fourth Sheet</a:t>
             </a:r>
           </a:p>
         </p:txBody>
@@ -3896,12 +3913,17 @@
           </a:bodyPr>
           <a:lstStyle/>
           <a:p>
+            <a:pPr>
+              <a:defRPr>
+                <a:latin typeface="Roboto"/>
+              </a:defRPr>
+            </a:pPr>
             <a:r>
               <a:rPr sz="1100" b="1">
                 <a:solidFill>
                   <a:srgbClr val="8A7A52"/>
                 </a:solidFill>
-                <a:latin typeface="Arial"/>
+                <a:latin typeface="Roboto"/>
               </a:rPr>
               <a:t>SAMPLE DATA · invented figures for demonstration</a:t>
             </a:r>
@@ -3930,12 +3952,17 @@
           </a:bodyPr>
           <a:lstStyle/>
           <a:p>
+            <a:pPr>
+              <a:defRPr>
+                <a:latin typeface="Roboto"/>
+              </a:defRPr>
+            </a:pPr>
             <a:r>
               <a:rPr sz="3400" b="1">
                 <a:solidFill>
                   <a:srgbClr val="25342A"/>
                 </a:solidFill>
-                <a:latin typeface="Arial"/>
+                <a:latin typeface="Roboto"/>
               </a:rPr>
               <a:t>What does each program really cost?</a:t>
             </a:r>
@@ -3964,12 +3991,17 @@
           </a:bodyPr>
           <a:lstStyle/>
           <a:p>
+            <a:pPr>
+              <a:defRPr>
+                <a:latin typeface="Roboto"/>
+              </a:defRPr>
+            </a:pPr>
             <a:r>
               <a:rPr sz="1600" b="0">
                 <a:solidFill>
                   <a:srgbClr val="5F6F63"/>
                 </a:solidFill>
-                <a:latin typeface="Arial"/>
+                <a:latin typeface="Roboto"/>
               </a:rPr>
               <a:t>Sample Community Services Ltd</a:t>
             </a:r>
@@ -3998,12 +4030,17 @@
           </a:bodyPr>
           <a:lstStyle/>
           <a:p>
+            <a:pPr>
+              <a:defRPr>
+                <a:latin typeface="Roboto"/>
+              </a:defRPr>
+            </a:pPr>
             <a:r>
               <a:rPr sz="1400" b="0">
                 <a:solidFill>
                   <a:srgbClr val="25342A"/>
                 </a:solidFill>
-                <a:latin typeface="Arial"/>
+                <a:latin typeface="Roboto"/>
               </a:rPr>
               <a:t>Period: May 2026. Each program's full cost: what its grant pays for, plus its fair share of the costs no single grant covers (untied program costs and administration, shared by grant spending). Pick a program and every chart and note follows it.</a:t>
             </a:r>
@@ -4032,45 +4069,65 @@
           </a:bodyPr>
           <a:lstStyle/>
           <a:p>
+            <a:pPr>
+              <a:defRPr>
+                <a:latin typeface="Roboto"/>
+              </a:defRPr>
+            </a:pPr>
             <a:r>
               <a:rPr sz="1100" b="0">
                 <a:solidFill>
                   <a:srgbClr val="5F6F63"/>
                 </a:solidFill>
-                <a:latin typeface="Arial"/>
+                <a:latin typeface="Roboto"/>
               </a:rPr>
               <a:t>How final is this data?</a:t>
             </a:r>
           </a:p>
           <a:p>
+            <a:pPr>
+              <a:defRPr>
+                <a:latin typeface="Roboto"/>
+              </a:defRPr>
+            </a:pPr>
             <a:r>
               <a:rPr sz="1100" b="0">
                 <a:solidFill>
                   <a:srgbClr val="5F6F63"/>
                 </a:solidFill>
-                <a:latin typeface="Arial"/>
+                <a:latin typeface="Roboto"/>
               </a:rPr>
               <a:t>April 2026: Locked. April 2026 is locked (closed 5 May 2026). These numbers won't change.</a:t>
             </a:r>
           </a:p>
           <a:p>
+            <a:pPr>
+              <a:defRPr>
+                <a:latin typeface="Roboto"/>
+              </a:defRPr>
+            </a:pPr>
             <a:r>
               <a:rPr sz="1100" b="0">
                 <a:solidFill>
                   <a:srgbClr val="5F6F63"/>
                 </a:solidFill>
-                <a:latin typeface="Arial"/>
+                <a:latin typeface="Roboto"/>
               </a:rPr>
               <a:t>May 2026: Locked. May 2026 is locked (closed 2 Jun 2026). These numbers won't change.</a:t>
             </a:r>
           </a:p>
           <a:p>
+            <a:pPr>
+              <a:defRPr>
+                <a:latin typeface="Roboto"/>
+              </a:defRPr>
+            </a:pPr>
             <a:r>
               <a:rPr sz="1100" b="0">
                 <a:solidFill>
                   <a:srgbClr val="5F6F63"/>
                 </a:solidFill>
-                <a:latin typeface="Arial"/>
+                <a:latin typeface="Roboto"/>
               </a:rPr>
               <a:t>October 2026: Incomplete. October 2026 is still in progress: figures to 6 Oct only.</a:t>
             </a:r>
@@ -4099,12 +4156,17 @@
           </a:bodyPr>
           <a:lstStyle/>
           <a:p>
+            <a:pPr>
+              <a:defRPr>
+                <a:latin typeface="Roboto"/>
+              </a:defRPr>
+            </a:pPr>
             <a:r>
               <a:rPr sz="900" b="0">
                 <a:solidFill>
                   <a:srgbClr val="5F6F63"/>
                 </a:solidFill>
-                <a:latin typeface="Arial"/>
+                <a:latin typeface="Roboto"/>
               </a:rPr>
               <a:t>program-cost.pptx</a:t>
             </a:r>
@@ -4133,13 +4195,17 @@
           </a:bodyPr>
           <a:lstStyle/>
           <a:p>
-            <a:pPr algn="ctr"/>
+            <a:pPr algn="ctr">
+              <a:defRPr>
+                <a:latin typeface="Roboto"/>
+              </a:defRPr>
+            </a:pPr>
             <a:r>
               <a:rPr sz="900" b="0">
                 <a:solidFill>
                   <a:srgbClr val="5F6F63"/>
                 </a:solidFill>
-                <a:latin typeface="Arial"/>
+                <a:latin typeface="Roboto"/>
               </a:rPr>
               <a:t>Data retrieved 2pm, Tue 6 Oct 2026 · Sample data</a:t>
             </a:r>
@@ -4168,13 +4234,17 @@
           </a:bodyPr>
           <a:lstStyle/>
           <a:p>
-            <a:pPr algn="r"/>
+            <a:pPr algn="r">
+              <a:defRPr>
+                <a:latin typeface="Roboto"/>
+              </a:defRPr>
+            </a:pPr>
             <a:r>
               <a:rPr sz="900" b="0">
                 <a:solidFill>
                   <a:srgbClr val="5F6F63"/>
                 </a:solidFill>
-                <a:latin typeface="Arial"/>
+                <a:latin typeface="Roboto"/>
               </a:rPr>
               <a:t>Slide 1 of 11</a:t>
             </a:r>
@@ -4238,7 +4308,11 @@
           <a:bodyPr rtlCol="0" anchor="ctr"/>
           <a:lstStyle/>
           <a:p>
-            <a:pPr algn="ctr"/>
+            <a:pPr algn="ctr">
+              <a:defRPr>
+                <a:latin typeface="Roboto"/>
+              </a:defRPr>
+            </a:pPr>
           </a:p>
         </p:txBody>
       </p:sp>
@@ -4264,12 +4338,17 @@
           </a:bodyPr>
           <a:lstStyle/>
           <a:p>
+            <a:pPr>
+              <a:defRPr>
+                <a:latin typeface="Roboto"/>
+              </a:defRPr>
+            </a:pPr>
             <a:r>
               <a:rPr sz="1000" b="0">
                 <a:solidFill>
                   <a:srgbClr val="5F6F63"/>
                 </a:solidFill>
-                <a:latin typeface="Arial"/>
+                <a:latin typeface="Roboto"/>
               </a:rPr>
               <a:t>Sample Community Services Ltd · What does each program really cost?</a:t>
             </a:r>
@@ -4298,12 +4377,17 @@
           </a:bodyPr>
           <a:lstStyle/>
           <a:p>
+            <a:pPr>
+              <a:defRPr>
+                <a:latin typeface="Roboto"/>
+              </a:defRPr>
+            </a:pPr>
             <a:r>
               <a:rPr sz="2400" b="1">
                 <a:solidFill>
                   <a:srgbClr val="25342A"/>
                 </a:solidFill>
-                <a:latin typeface="Arial"/>
+                <a:latin typeface="Roboto"/>
               </a:rPr>
               <a:t>What it shows · Program: Volunteer coordinator</a:t>
             </a:r>
@@ -4351,7 +4435,11 @@
           <a:bodyPr rtlCol="0" anchor="ctr"/>
           <a:lstStyle/>
           <a:p>
-            <a:pPr algn="ctr"/>
+            <a:pPr algn="ctr">
+              <a:defRPr>
+                <a:latin typeface="Roboto"/>
+              </a:defRPr>
+            </a:pPr>
           </a:p>
         </p:txBody>
       </p:sp>
@@ -4377,12 +4465,17 @@
           </a:bodyPr>
           <a:lstStyle/>
           <a:p>
+            <a:pPr>
+              <a:defRPr>
+                <a:latin typeface="Roboto"/>
+              </a:defRPr>
+            </a:pPr>
             <a:r>
               <a:rPr sz="1100" b="1">
                 <a:solidFill>
                   <a:srgbClr val="5F6F63"/>
                 </a:solidFill>
-                <a:latin typeface="Arial"/>
+                <a:latin typeface="Roboto"/>
               </a:rPr>
               <a:t>WHAT IT SHOWS</a:t>
             </a:r>
@@ -4411,12 +4504,17 @@
           </a:bodyPr>
           <a:lstStyle/>
           <a:p>
+            <a:pPr>
+              <a:defRPr>
+                <a:latin typeface="Roboto"/>
+              </a:defRPr>
+            </a:pPr>
             <a:r>
               <a:rPr sz="1600" b="0">
                 <a:solidFill>
                   <a:srgbClr val="25342A"/>
                 </a:solidFill>
-                <a:latin typeface="Arial"/>
+                <a:latin typeface="Roboto"/>
               </a:rPr>
               <a:t>Volunteer coordinator cost $4,585 in full in May: $2,649 paid by the State volunteering grant grant, and $1,936 of shared costs no grant covers. It has spent 101.5% of its budget to date, with $26,864 left and 9 months to go.</a:t>
             </a:r>
@@ -4464,7 +4562,11 @@
           <a:bodyPr rtlCol="0" anchor="ctr"/>
           <a:lstStyle/>
           <a:p>
-            <a:pPr algn="ctr"/>
+            <a:pPr algn="ctr">
+              <a:defRPr>
+                <a:latin typeface="Roboto"/>
+              </a:defRPr>
+            </a:pPr>
           </a:p>
         </p:txBody>
       </p:sp>
@@ -4490,12 +4592,17 @@
           </a:bodyPr>
           <a:lstStyle/>
           <a:p>
+            <a:pPr>
+              <a:defRPr>
+                <a:latin typeface="Roboto"/>
+              </a:defRPr>
+            </a:pPr>
             <a:r>
               <a:rPr sz="1100" b="1">
                 <a:solidFill>
                   <a:srgbClr val="5F6F63"/>
                 </a:solidFill>
-                <a:latin typeface="Arial"/>
+                <a:latin typeface="Roboto"/>
               </a:rPr>
               <a:t>WHAT YOU'D DO ABOUT IT</a:t>
             </a:r>
@@ -4524,12 +4631,17 @@
           </a:bodyPr>
           <a:lstStyle/>
           <a:p>
+            <a:pPr>
+              <a:defRPr>
+                <a:latin typeface="Roboto"/>
+              </a:defRPr>
+            </a:pPr>
             <a:r>
               <a:rPr sz="1600" b="0">
                 <a:solidFill>
                   <a:srgbClr val="25342A"/>
                 </a:solidFill>
-                <a:latin typeface="Arial"/>
+                <a:latin typeface="Roboto"/>
               </a:rPr>
               <a:t>The full cost is $4,585 a month; $1,936 of it is shared cost the grant doesn't pay for. Worth asking for as much of it as the funder allows at renewal.</a:t>
             </a:r>
@@ -4558,12 +4670,17 @@
           </a:bodyPr>
           <a:lstStyle/>
           <a:p>
+            <a:pPr>
+              <a:defRPr>
+                <a:latin typeface="Roboto"/>
+              </a:defRPr>
+            </a:pPr>
             <a:r>
               <a:rPr sz="900" b="0">
                 <a:solidFill>
                   <a:srgbClr val="5F6F63"/>
                 </a:solidFill>
-                <a:latin typeface="Arial"/>
+                <a:latin typeface="Roboto"/>
               </a:rPr>
               <a:t>program-cost.pptx</a:t>
             </a:r>
@@ -4592,13 +4709,17 @@
           </a:bodyPr>
           <a:lstStyle/>
           <a:p>
-            <a:pPr algn="ctr"/>
+            <a:pPr algn="ctr">
+              <a:defRPr>
+                <a:latin typeface="Roboto"/>
+              </a:defRPr>
+            </a:pPr>
             <a:r>
               <a:rPr sz="900" b="0">
                 <a:solidFill>
                   <a:srgbClr val="5F6F63"/>
                 </a:solidFill>
-                <a:latin typeface="Arial"/>
+                <a:latin typeface="Roboto"/>
               </a:rPr>
               <a:t>Data retrieved 2pm, Tue 6 Oct 2026 · Sample data</a:t>
             </a:r>
@@ -4627,13 +4748,17 @@
           </a:bodyPr>
           <a:lstStyle/>
           <a:p>
-            <a:pPr algn="r"/>
+            <a:pPr algn="r">
+              <a:defRPr>
+                <a:latin typeface="Roboto"/>
+              </a:defRPr>
+            </a:pPr>
             <a:r>
               <a:rPr sz="900" b="0">
                 <a:solidFill>
                   <a:srgbClr val="5F6F63"/>
                 </a:solidFill>
-                <a:latin typeface="Arial"/>
+                <a:latin typeface="Roboto"/>
               </a:rPr>
               <a:t>Slide 10 of 11</a:t>
             </a:r>
@@ -4697,7 +4822,11 @@
           <a:bodyPr rtlCol="0" anchor="ctr"/>
           <a:lstStyle/>
           <a:p>
-            <a:pPr algn="ctr"/>
+            <a:pPr algn="ctr">
+              <a:defRPr>
+                <a:latin typeface="Roboto"/>
+              </a:defRPr>
+            </a:pPr>
           </a:p>
         </p:txBody>
       </p:sp>
@@ -4723,12 +4852,17 @@
           </a:bodyPr>
           <a:lstStyle/>
           <a:p>
+            <a:pPr>
+              <a:defRPr>
+                <a:latin typeface="Roboto"/>
+              </a:defRPr>
+            </a:pPr>
             <a:r>
               <a:rPr sz="1000" b="0">
                 <a:solidFill>
                   <a:srgbClr val="5F6F63"/>
                 </a:solidFill>
-                <a:latin typeface="Arial"/>
+                <a:latin typeface="Roboto"/>
               </a:rPr>
               <a:t>Sample Community Services Ltd · What does each program really cost?</a:t>
             </a:r>
@@ -4757,12 +4891,17 @@
           </a:bodyPr>
           <a:lstStyle/>
           <a:p>
+            <a:pPr>
+              <a:defRPr>
+                <a:latin typeface="Roboto"/>
+              </a:defRPr>
+            </a:pPr>
             <a:r>
               <a:rPr sz="2400" b="1">
                 <a:solidFill>
                   <a:srgbClr val="25342A"/>
                 </a:solidFill>
-                <a:latin typeface="Arial"/>
+                <a:latin typeface="Roboto"/>
               </a:rPr>
               <a:t>Grant spending, by month · Spend $ · Every program at once</a:t>
             </a:r>
@@ -4791,12 +4930,17 @@
           </a:bodyPr>
           <a:lstStyle/>
           <a:p>
+            <a:pPr>
+              <a:defRPr>
+                <a:latin typeface="Roboto"/>
+              </a:defRPr>
+            </a:pPr>
             <a:r>
               <a:rPr sz="1200" b="0">
                 <a:solidFill>
                   <a:srgbClr val="5F6F63"/>
                 </a:solidFill>
-                <a:latin typeface="Arial"/>
+                <a:latin typeface="Roboto"/>
               </a:rPr>
               <a:t>Grant spending only (the program's direct cost). All programs includes grants that have finished.</a:t>
             </a:r>
@@ -4843,12 +4987,17 @@
           </a:bodyPr>
           <a:lstStyle/>
           <a:p>
+            <a:pPr>
+              <a:defRPr>
+                <a:latin typeface="Roboto"/>
+              </a:defRPr>
+            </a:pPr>
             <a:r>
               <a:rPr sz="900" b="0">
                 <a:solidFill>
                   <a:srgbClr val="5F6F63"/>
                 </a:solidFill>
-                <a:latin typeface="Arial"/>
+                <a:latin typeface="Roboto"/>
               </a:rPr>
               <a:t>program-cost.pptx</a:t>
             </a:r>
@@ -4877,13 +5026,17 @@
           </a:bodyPr>
           <a:lstStyle/>
           <a:p>
-            <a:pPr algn="ctr"/>
+            <a:pPr algn="ctr">
+              <a:defRPr>
+                <a:latin typeface="Roboto"/>
+              </a:defRPr>
+            </a:pPr>
             <a:r>
               <a:rPr sz="900" b="0">
                 <a:solidFill>
                   <a:srgbClr val="5F6F63"/>
                 </a:solidFill>
-                <a:latin typeface="Arial"/>
+                <a:latin typeface="Roboto"/>
               </a:rPr>
               <a:t>Data retrieved 2pm, Tue 6 Oct 2026 · Sample data</a:t>
             </a:r>
@@ -4912,13 +5065,17 @@
           </a:bodyPr>
           <a:lstStyle/>
           <a:p>
-            <a:pPr algn="r"/>
+            <a:pPr algn="r">
+              <a:defRPr>
+                <a:latin typeface="Roboto"/>
+              </a:defRPr>
+            </a:pPr>
             <a:r>
               <a:rPr sz="900" b="0">
                 <a:solidFill>
                   <a:srgbClr val="5F6F63"/>
                 </a:solidFill>
-                <a:latin typeface="Arial"/>
+                <a:latin typeface="Roboto"/>
               </a:rPr>
               <a:t>Slide 11 of 11</a:t>
             </a:r>
@@ -4982,7 +5139,11 @@
           <a:bodyPr rtlCol="0" anchor="ctr"/>
           <a:lstStyle/>
           <a:p>
-            <a:pPr algn="ctr"/>
+            <a:pPr algn="ctr">
+              <a:defRPr>
+                <a:latin typeface="Roboto"/>
+              </a:defRPr>
+            </a:pPr>
           </a:p>
         </p:txBody>
       </p:sp>
@@ -5008,12 +5169,17 @@
           </a:bodyPr>
           <a:lstStyle/>
           <a:p>
+            <a:pPr>
+              <a:defRPr>
+                <a:latin typeface="Roboto"/>
+              </a:defRPr>
+            </a:pPr>
             <a:r>
               <a:rPr sz="1000" b="0">
                 <a:solidFill>
                   <a:srgbClr val="5F6F63"/>
                 </a:solidFill>
-                <a:latin typeface="Arial"/>
+                <a:latin typeface="Roboto"/>
               </a:rPr>
               <a:t>Sample Community Services Ltd · What does each program really cost?</a:t>
             </a:r>
@@ -5042,12 +5208,17 @@
           </a:bodyPr>
           <a:lstStyle/>
           <a:p>
+            <a:pPr>
+              <a:defRPr>
+                <a:latin typeface="Roboto"/>
+              </a:defRPr>
+            </a:pPr>
             <a:r>
               <a:rPr sz="2400" b="1">
                 <a:solidFill>
                   <a:srgbClr val="25342A"/>
                 </a:solidFill>
-                <a:latin typeface="Arial"/>
+                <a:latin typeface="Roboto"/>
               </a:rPr>
               <a:t>Full cost of each program, May 2026 · $ · Program: All programs</a:t>
             </a:r>
@@ -5094,12 +5265,17 @@
           </a:bodyPr>
           <a:lstStyle/>
           <a:p>
+            <a:pPr>
+              <a:defRPr>
+                <a:latin typeface="Roboto"/>
+              </a:defRPr>
+            </a:pPr>
             <a:r>
               <a:rPr sz="900" b="0">
                 <a:solidFill>
                   <a:srgbClr val="5F6F63"/>
                 </a:solidFill>
-                <a:latin typeface="Arial"/>
+                <a:latin typeface="Roboto"/>
               </a:rPr>
               <a:t>program-cost.pptx</a:t>
             </a:r>
@@ -5128,13 +5304,17 @@
           </a:bodyPr>
           <a:lstStyle/>
           <a:p>
-            <a:pPr algn="ctr"/>
+            <a:pPr algn="ctr">
+              <a:defRPr>
+                <a:latin typeface="Roboto"/>
+              </a:defRPr>
+            </a:pPr>
             <a:r>
               <a:rPr sz="900" b="0">
                 <a:solidFill>
                   <a:srgbClr val="5F6F63"/>
                 </a:solidFill>
-                <a:latin typeface="Arial"/>
+                <a:latin typeface="Roboto"/>
               </a:rPr>
               <a:t>Data retrieved 2pm, Tue 6 Oct 2026 · Sample data</a:t>
             </a:r>
@@ -5163,13 +5343,17 @@
           </a:bodyPr>
           <a:lstStyle/>
           <a:p>
-            <a:pPr algn="r"/>
+            <a:pPr algn="r">
+              <a:defRPr>
+                <a:latin typeface="Roboto"/>
+              </a:defRPr>
+            </a:pPr>
             <a:r>
               <a:rPr sz="900" b="0">
                 <a:solidFill>
                   <a:srgbClr val="5F6F63"/>
                 </a:solidFill>
-                <a:latin typeface="Arial"/>
+                <a:latin typeface="Roboto"/>
               </a:rPr>
               <a:t>Slide 2 of 11</a:t>
             </a:r>
@@ -5233,7 +5417,11 @@
           <a:bodyPr rtlCol="0" anchor="ctr"/>
           <a:lstStyle/>
           <a:p>
-            <a:pPr algn="ctr"/>
+            <a:pPr algn="ctr">
+              <a:defRPr>
+                <a:latin typeface="Roboto"/>
+              </a:defRPr>
+            </a:pPr>
           </a:p>
         </p:txBody>
       </p:sp>
@@ -5259,12 +5447,17 @@
           </a:bodyPr>
           <a:lstStyle/>
           <a:p>
+            <a:pPr>
+              <a:defRPr>
+                <a:latin typeface="Roboto"/>
+              </a:defRPr>
+            </a:pPr>
             <a:r>
               <a:rPr sz="1000" b="0">
                 <a:solidFill>
                   <a:srgbClr val="5F6F63"/>
                 </a:solidFill>
-                <a:latin typeface="Arial"/>
+                <a:latin typeface="Roboto"/>
               </a:rPr>
               <a:t>Sample Community Services Ltd · What does each program really cost?</a:t>
             </a:r>
@@ -5293,12 +5486,17 @@
           </a:bodyPr>
           <a:lstStyle/>
           <a:p>
+            <a:pPr>
+              <a:defRPr>
+                <a:latin typeface="Roboto"/>
+              </a:defRPr>
+            </a:pPr>
             <a:r>
               <a:rPr sz="2400" b="1">
                 <a:solidFill>
                   <a:srgbClr val="25342A"/>
                 </a:solidFill>
-                <a:latin typeface="Arial"/>
+                <a:latin typeface="Roboto"/>
               </a:rPr>
               <a:t>Full cost of each program, May 2026 · % of total · Program: All programs</a:t>
             </a:r>
@@ -5345,12 +5543,17 @@
           </a:bodyPr>
           <a:lstStyle/>
           <a:p>
+            <a:pPr>
+              <a:defRPr>
+                <a:latin typeface="Roboto"/>
+              </a:defRPr>
+            </a:pPr>
             <a:r>
               <a:rPr sz="900" b="0">
                 <a:solidFill>
                   <a:srgbClr val="5F6F63"/>
                 </a:solidFill>
-                <a:latin typeface="Arial"/>
+                <a:latin typeface="Roboto"/>
               </a:rPr>
               <a:t>program-cost.pptx</a:t>
             </a:r>
@@ -5379,13 +5582,17 @@
           </a:bodyPr>
           <a:lstStyle/>
           <a:p>
-            <a:pPr algn="ctr"/>
+            <a:pPr algn="ctr">
+              <a:defRPr>
+                <a:latin typeface="Roboto"/>
+              </a:defRPr>
+            </a:pPr>
             <a:r>
               <a:rPr sz="900" b="0">
                 <a:solidFill>
                   <a:srgbClr val="5F6F63"/>
                 </a:solidFill>
-                <a:latin typeface="Arial"/>
+                <a:latin typeface="Roboto"/>
               </a:rPr>
               <a:t>Data retrieved 2pm, Tue 6 Oct 2026 · Sample data</a:t>
             </a:r>
@@ -5414,13 +5621,17 @@
           </a:bodyPr>
           <a:lstStyle/>
           <a:p>
-            <a:pPr algn="r"/>
+            <a:pPr algn="r">
+              <a:defRPr>
+                <a:latin typeface="Roboto"/>
+              </a:defRPr>
+            </a:pPr>
             <a:r>
               <a:rPr sz="900" b="0">
                 <a:solidFill>
                   <a:srgbClr val="5F6F63"/>
                 </a:solidFill>
-                <a:latin typeface="Arial"/>
+                <a:latin typeface="Roboto"/>
               </a:rPr>
               <a:t>Slide 3 of 11</a:t>
             </a:r>
@@ -5484,7 +5695,11 @@
           <a:bodyPr rtlCol="0" anchor="ctr"/>
           <a:lstStyle/>
           <a:p>
-            <a:pPr algn="ctr"/>
+            <a:pPr algn="ctr">
+              <a:defRPr>
+                <a:latin typeface="Roboto"/>
+              </a:defRPr>
+            </a:pPr>
           </a:p>
         </p:txBody>
       </p:sp>
@@ -5510,12 +5725,17 @@
           </a:bodyPr>
           <a:lstStyle/>
           <a:p>
+            <a:pPr>
+              <a:defRPr>
+                <a:latin typeface="Roboto"/>
+              </a:defRPr>
+            </a:pPr>
             <a:r>
               <a:rPr sz="1000" b="0">
                 <a:solidFill>
                   <a:srgbClr val="5F6F63"/>
                 </a:solidFill>
-                <a:latin typeface="Arial"/>
+                <a:latin typeface="Roboto"/>
               </a:rPr>
               <a:t>Sample Community Services Ltd · What does each program really cost?</a:t>
             </a:r>
@@ -5544,12 +5764,17 @@
           </a:bodyPr>
           <a:lstStyle/>
           <a:p>
+            <a:pPr>
+              <a:defRPr>
+                <a:latin typeface="Roboto"/>
+              </a:defRPr>
+            </a:pPr>
             <a:r>
               <a:rPr sz="2400" b="1">
                 <a:solidFill>
                   <a:srgbClr val="25342A"/>
                 </a:solidFill>
-                <a:latin typeface="Arial"/>
+                <a:latin typeface="Roboto"/>
               </a:rPr>
               <a:t>What it shows · Program: All programs</a:t>
             </a:r>
@@ -5597,7 +5822,11 @@
           <a:bodyPr rtlCol="0" anchor="ctr"/>
           <a:lstStyle/>
           <a:p>
-            <a:pPr algn="ctr"/>
+            <a:pPr algn="ctr">
+              <a:defRPr>
+                <a:latin typeface="Roboto"/>
+              </a:defRPr>
+            </a:pPr>
           </a:p>
         </p:txBody>
       </p:sp>
@@ -5623,12 +5852,17 @@
           </a:bodyPr>
           <a:lstStyle/>
           <a:p>
+            <a:pPr>
+              <a:defRPr>
+                <a:latin typeface="Roboto"/>
+              </a:defRPr>
+            </a:pPr>
             <a:r>
               <a:rPr sz="1100" b="1">
                 <a:solidFill>
                   <a:srgbClr val="5F6F63"/>
                 </a:solidFill>
-                <a:latin typeface="Arial"/>
+                <a:latin typeface="Roboto"/>
               </a:rPr>
               <a:t>WHAT IT SHOWS</a:t>
             </a:r>
@@ -5657,12 +5891,17 @@
           </a:bodyPr>
           <a:lstStyle/>
           <a:p>
+            <a:pPr>
+              <a:defRPr>
+                <a:latin typeface="Roboto"/>
+              </a:defRPr>
+            </a:pPr>
             <a:r>
               <a:rPr sz="1600" b="0">
                 <a:solidFill>
                   <a:srgbClr val="25342A"/>
                 </a:solidFill>
-                <a:latin typeface="Arial"/>
+                <a:latin typeface="Roboto"/>
               </a:rPr>
               <a:t>Housing support is the biggest program: $54,240 in May once its share of untied program costs and administration is added to $31,337 of grant spending. Shared costs add 73.1% on top of grant spending across all programs.</a:t>
             </a:r>
@@ -5710,7 +5949,11 @@
           <a:bodyPr rtlCol="0" anchor="ctr"/>
           <a:lstStyle/>
           <a:p>
-            <a:pPr algn="ctr"/>
+            <a:pPr algn="ctr">
+              <a:defRPr>
+                <a:latin typeface="Roboto"/>
+              </a:defRPr>
+            </a:pPr>
           </a:p>
         </p:txBody>
       </p:sp>
@@ -5736,12 +5979,17 @@
           </a:bodyPr>
           <a:lstStyle/>
           <a:p>
+            <a:pPr>
+              <a:defRPr>
+                <a:latin typeface="Roboto"/>
+              </a:defRPr>
+            </a:pPr>
             <a:r>
               <a:rPr sz="1100" b="1">
                 <a:solidFill>
                   <a:srgbClr val="5F6F63"/>
                 </a:solidFill>
-                <a:latin typeface="Arial"/>
+                <a:latin typeface="Roboto"/>
               </a:rPr>
               <a:t>WHAT YOU'D DO ABOUT IT</a:t>
             </a:r>
@@ -5770,12 +6018,17 @@
           </a:bodyPr>
           <a:lstStyle/>
           <a:p>
+            <a:pPr>
+              <a:defRPr>
+                <a:latin typeface="Roboto"/>
+              </a:defRPr>
+            </a:pPr>
             <a:r>
               <a:rPr sz="1600" b="0">
                 <a:solidFill>
                   <a:srgbClr val="25342A"/>
                 </a:solidFill>
-                <a:latin typeface="Arial"/>
+                <a:latin typeface="Roboto"/>
               </a:rPr>
               <a:t>The full cost (not just the grant line) is the number for renewal applications, where the funder lets you recover a share of overheads. Pick a program above to see it on its own.</a:t>
             </a:r>
@@ -5804,12 +6057,17 @@
           </a:bodyPr>
           <a:lstStyle/>
           <a:p>
+            <a:pPr>
+              <a:defRPr>
+                <a:latin typeface="Roboto"/>
+              </a:defRPr>
+            </a:pPr>
             <a:r>
               <a:rPr sz="900" b="0">
                 <a:solidFill>
                   <a:srgbClr val="5F6F63"/>
                 </a:solidFill>
-                <a:latin typeface="Arial"/>
+                <a:latin typeface="Roboto"/>
               </a:rPr>
               <a:t>program-cost.pptx</a:t>
             </a:r>
@@ -5838,13 +6096,17 @@
           </a:bodyPr>
           <a:lstStyle/>
           <a:p>
-            <a:pPr algn="ctr"/>
+            <a:pPr algn="ctr">
+              <a:defRPr>
+                <a:latin typeface="Roboto"/>
+              </a:defRPr>
+            </a:pPr>
             <a:r>
               <a:rPr sz="900" b="0">
                 <a:solidFill>
                   <a:srgbClr val="5F6F63"/>
                 </a:solidFill>
-                <a:latin typeface="Arial"/>
+                <a:latin typeface="Roboto"/>
               </a:rPr>
               <a:t>Data retrieved 2pm, Tue 6 Oct 2026 · Sample data</a:t>
             </a:r>
@@ -5873,13 +6135,17 @@
           </a:bodyPr>
           <a:lstStyle/>
           <a:p>
-            <a:pPr algn="r"/>
+            <a:pPr algn="r">
+              <a:defRPr>
+                <a:latin typeface="Roboto"/>
+              </a:defRPr>
+            </a:pPr>
             <a:r>
               <a:rPr sz="900" b="0">
                 <a:solidFill>
                   <a:srgbClr val="5F6F63"/>
                 </a:solidFill>
-                <a:latin typeface="Arial"/>
+                <a:latin typeface="Roboto"/>
               </a:rPr>
               <a:t>Slide 4 of 11</a:t>
             </a:r>
@@ -5943,7 +6209,11 @@
           <a:bodyPr rtlCol="0" anchor="ctr"/>
           <a:lstStyle/>
           <a:p>
-            <a:pPr algn="ctr"/>
+            <a:pPr algn="ctr">
+              <a:defRPr>
+                <a:latin typeface="Roboto"/>
+              </a:defRPr>
+            </a:pPr>
           </a:p>
         </p:txBody>
       </p:sp>
@@ -5969,12 +6239,17 @@
           </a:bodyPr>
           <a:lstStyle/>
           <a:p>
+            <a:pPr>
+              <a:defRPr>
+                <a:latin typeface="Roboto"/>
+              </a:defRPr>
+            </a:pPr>
             <a:r>
               <a:rPr sz="1000" b="0">
                 <a:solidFill>
                   <a:srgbClr val="5F6F63"/>
                 </a:solidFill>
-                <a:latin typeface="Arial"/>
+                <a:latin typeface="Roboto"/>
               </a:rPr>
               <a:t>Sample Community Services Ltd · What does each program really cost?</a:t>
             </a:r>
@@ -6003,12 +6278,17 @@
           </a:bodyPr>
           <a:lstStyle/>
           <a:p>
+            <a:pPr>
+              <a:defRPr>
+                <a:latin typeface="Roboto"/>
+              </a:defRPr>
+            </a:pPr>
             <a:r>
               <a:rPr sz="2400" b="1">
                 <a:solidFill>
                   <a:srgbClr val="25342A"/>
                 </a:solidFill>
-                <a:latin typeface="Arial"/>
+                <a:latin typeface="Roboto"/>
               </a:rPr>
               <a:t>What it shows · Program: Housing support</a:t>
             </a:r>
@@ -6056,7 +6336,11 @@
           <a:bodyPr rtlCol="0" anchor="ctr"/>
           <a:lstStyle/>
           <a:p>
-            <a:pPr algn="ctr"/>
+            <a:pPr algn="ctr">
+              <a:defRPr>
+                <a:latin typeface="Roboto"/>
+              </a:defRPr>
+            </a:pPr>
           </a:p>
         </p:txBody>
       </p:sp>
@@ -6082,12 +6366,17 @@
           </a:bodyPr>
           <a:lstStyle/>
           <a:p>
+            <a:pPr>
+              <a:defRPr>
+                <a:latin typeface="Roboto"/>
+              </a:defRPr>
+            </a:pPr>
             <a:r>
               <a:rPr sz="1100" b="1">
                 <a:solidFill>
                   <a:srgbClr val="5F6F63"/>
                 </a:solidFill>
-                <a:latin typeface="Arial"/>
+                <a:latin typeface="Roboto"/>
               </a:rPr>
               <a:t>WHAT IT SHOWS</a:t>
             </a:r>
@@ -6116,12 +6405,17 @@
           </a:bodyPr>
           <a:lstStyle/>
           <a:p>
+            <a:pPr>
+              <a:defRPr>
+                <a:latin typeface="Roboto"/>
+              </a:defRPr>
+            </a:pPr>
             <a:r>
               <a:rPr sz="1600" b="0">
                 <a:solidFill>
                   <a:srgbClr val="25342A"/>
                 </a:solidFill>
-                <a:latin typeface="Arial"/>
+                <a:latin typeface="Roboto"/>
               </a:rPr>
               <a:t>Housing support cost $54,240 in full in May: $31,337 paid by the State Housing Program grant, and $22,903 of shared costs no grant covers. It has spent 91.3% of its budget to date, with $223,091 left and 7 months to go.</a:t>
             </a:r>
@@ -6169,7 +6463,11 @@
           <a:bodyPr rtlCol="0" anchor="ctr"/>
           <a:lstStyle/>
           <a:p>
-            <a:pPr algn="ctr"/>
+            <a:pPr algn="ctr">
+              <a:defRPr>
+                <a:latin typeface="Roboto"/>
+              </a:defRPr>
+            </a:pPr>
           </a:p>
         </p:txBody>
       </p:sp>
@@ -6195,12 +6493,17 @@
           </a:bodyPr>
           <a:lstStyle/>
           <a:p>
+            <a:pPr>
+              <a:defRPr>
+                <a:latin typeface="Roboto"/>
+              </a:defRPr>
+            </a:pPr>
             <a:r>
               <a:rPr sz="1100" b="1">
                 <a:solidFill>
                   <a:srgbClr val="5F6F63"/>
                 </a:solidFill>
-                <a:latin typeface="Arial"/>
+                <a:latin typeface="Roboto"/>
               </a:rPr>
               <a:t>WHAT YOU'D DO ABOUT IT</a:t>
             </a:r>
@@ -6229,12 +6532,17 @@
           </a:bodyPr>
           <a:lstStyle/>
           <a:p>
+            <a:pPr>
+              <a:defRPr>
+                <a:latin typeface="Roboto"/>
+              </a:defRPr>
+            </a:pPr>
             <a:r>
               <a:rPr sz="1600" b="0">
                 <a:solidFill>
                   <a:srgbClr val="25342A"/>
                 </a:solidFill>
-                <a:latin typeface="Arial"/>
+                <a:latin typeface="Roboto"/>
               </a:rPr>
               <a:t>The full cost is $54,240 a month; $22,903 of it is shared cost the grant doesn't pay for. Worth asking for as much of it as the funder allows at renewal.</a:t>
             </a:r>
@@ -6263,12 +6571,17 @@
           </a:bodyPr>
           <a:lstStyle/>
           <a:p>
+            <a:pPr>
+              <a:defRPr>
+                <a:latin typeface="Roboto"/>
+              </a:defRPr>
+            </a:pPr>
             <a:r>
               <a:rPr sz="900" b="0">
                 <a:solidFill>
                   <a:srgbClr val="5F6F63"/>
                 </a:solidFill>
-                <a:latin typeface="Arial"/>
+                <a:latin typeface="Roboto"/>
               </a:rPr>
               <a:t>program-cost.pptx</a:t>
             </a:r>
@@ -6297,13 +6610,17 @@
           </a:bodyPr>
           <a:lstStyle/>
           <a:p>
-            <a:pPr algn="ctr"/>
+            <a:pPr algn="ctr">
+              <a:defRPr>
+                <a:latin typeface="Roboto"/>
+              </a:defRPr>
+            </a:pPr>
             <a:r>
               <a:rPr sz="900" b="0">
                 <a:solidFill>
                   <a:srgbClr val="5F6F63"/>
                 </a:solidFill>
-                <a:latin typeface="Arial"/>
+                <a:latin typeface="Roboto"/>
               </a:rPr>
               <a:t>Data retrieved 2pm, Tue 6 Oct 2026 · Sample data</a:t>
             </a:r>
@@ -6332,13 +6649,17 @@
           </a:bodyPr>
           <a:lstStyle/>
           <a:p>
-            <a:pPr algn="r"/>
+            <a:pPr algn="r">
+              <a:defRPr>
+                <a:latin typeface="Roboto"/>
+              </a:defRPr>
+            </a:pPr>
             <a:r>
               <a:rPr sz="900" b="0">
                 <a:solidFill>
                   <a:srgbClr val="5F6F63"/>
                 </a:solidFill>
-                <a:latin typeface="Arial"/>
+                <a:latin typeface="Roboto"/>
               </a:rPr>
               <a:t>Slide 5 of 11</a:t>
             </a:r>
@@ -6402,7 +6723,11 @@
           <a:bodyPr rtlCol="0" anchor="ctr"/>
           <a:lstStyle/>
           <a:p>
-            <a:pPr algn="ctr"/>
+            <a:pPr algn="ctr">
+              <a:defRPr>
+                <a:latin typeface="Roboto"/>
+              </a:defRPr>
+            </a:pPr>
           </a:p>
         </p:txBody>
       </p:sp>
@@ -6428,12 +6753,17 @@
           </a:bodyPr>
           <a:lstStyle/>
           <a:p>
+            <a:pPr>
+              <a:defRPr>
+                <a:latin typeface="Roboto"/>
+              </a:defRPr>
+            </a:pPr>
             <a:r>
               <a:rPr sz="1000" b="0">
                 <a:solidFill>
                   <a:srgbClr val="5F6F63"/>
                 </a:solidFill>
-                <a:latin typeface="Arial"/>
+                <a:latin typeface="Roboto"/>
               </a:rPr>
               <a:t>Sample Community Services Ltd · What does each program really cost?</a:t>
             </a:r>
@@ -6462,12 +6792,17 @@
           </a:bodyPr>
           <a:lstStyle/>
           <a:p>
+            <a:pPr>
+              <a:defRPr>
+                <a:latin typeface="Roboto"/>
+              </a:defRPr>
+            </a:pPr>
             <a:r>
               <a:rPr sz="2400" b="1">
                 <a:solidFill>
                   <a:srgbClr val="25342A"/>
                 </a:solidFill>
-                <a:latin typeface="Arial"/>
+                <a:latin typeface="Roboto"/>
               </a:rPr>
               <a:t>What it shows · Program: Youth outreach</a:t>
             </a:r>
@@ -6515,7 +6850,11 @@
           <a:bodyPr rtlCol="0" anchor="ctr"/>
           <a:lstStyle/>
           <a:p>
-            <a:pPr algn="ctr"/>
+            <a:pPr algn="ctr">
+              <a:defRPr>
+                <a:latin typeface="Roboto"/>
+              </a:defRPr>
+            </a:pPr>
           </a:p>
         </p:txBody>
       </p:sp>
@@ -6541,12 +6880,17 @@
           </a:bodyPr>
           <a:lstStyle/>
           <a:p>
+            <a:pPr>
+              <a:defRPr>
+                <a:latin typeface="Roboto"/>
+              </a:defRPr>
+            </a:pPr>
             <a:r>
               <a:rPr sz="1100" b="1">
                 <a:solidFill>
                   <a:srgbClr val="5F6F63"/>
                 </a:solidFill>
-                <a:latin typeface="Arial"/>
+                <a:latin typeface="Roboto"/>
               </a:rPr>
               <a:t>WHAT IT SHOWS</a:t>
             </a:r>
@@ -6575,12 +6919,17 @@
           </a:bodyPr>
           <a:lstStyle/>
           <a:p>
+            <a:pPr>
+              <a:defRPr>
+                <a:latin typeface="Roboto"/>
+              </a:defRPr>
+            </a:pPr>
             <a:r>
               <a:rPr sz="1600" b="0">
                 <a:solidFill>
                   <a:srgbClr val="25342A"/>
                 </a:solidFill>
-                <a:latin typeface="Arial"/>
+                <a:latin typeface="Roboto"/>
               </a:rPr>
               <a:t>Youth outreach cost $36,649 in full in May: $21,174 paid by the State Department of Families grant, and $15,475 of shared costs no grant covers. It has spent 99.3% of its budget to date, with $261,640 left and 13 months to go.</a:t>
             </a:r>
@@ -6628,7 +6977,11 @@
           <a:bodyPr rtlCol="0" anchor="ctr"/>
           <a:lstStyle/>
           <a:p>
-            <a:pPr algn="ctr"/>
+            <a:pPr algn="ctr">
+              <a:defRPr>
+                <a:latin typeface="Roboto"/>
+              </a:defRPr>
+            </a:pPr>
           </a:p>
         </p:txBody>
       </p:sp>
@@ -6654,12 +7007,17 @@
           </a:bodyPr>
           <a:lstStyle/>
           <a:p>
+            <a:pPr>
+              <a:defRPr>
+                <a:latin typeface="Roboto"/>
+              </a:defRPr>
+            </a:pPr>
             <a:r>
               <a:rPr sz="1100" b="1">
                 <a:solidFill>
                   <a:srgbClr val="5F6F63"/>
                 </a:solidFill>
-                <a:latin typeface="Arial"/>
+                <a:latin typeface="Roboto"/>
               </a:rPr>
               <a:t>WHAT YOU'D DO ABOUT IT</a:t>
             </a:r>
@@ -6688,12 +7046,17 @@
           </a:bodyPr>
           <a:lstStyle/>
           <a:p>
+            <a:pPr>
+              <a:defRPr>
+                <a:latin typeface="Roboto"/>
+              </a:defRPr>
+            </a:pPr>
             <a:r>
               <a:rPr sz="1600" b="0">
                 <a:solidFill>
                   <a:srgbClr val="25342A"/>
                 </a:solidFill>
-                <a:latin typeface="Arial"/>
+                <a:latin typeface="Roboto"/>
               </a:rPr>
               <a:t>The full cost is $36,649 a month; $15,475 of it is shared cost the grant doesn't pay for. Worth asking for as much of it as the funder allows at renewal.</a:t>
             </a:r>
@@ -6722,12 +7085,17 @@
           </a:bodyPr>
           <a:lstStyle/>
           <a:p>
+            <a:pPr>
+              <a:defRPr>
+                <a:latin typeface="Roboto"/>
+              </a:defRPr>
+            </a:pPr>
             <a:r>
               <a:rPr sz="900" b="0">
                 <a:solidFill>
                   <a:srgbClr val="5F6F63"/>
                 </a:solidFill>
-                <a:latin typeface="Arial"/>
+                <a:latin typeface="Roboto"/>
               </a:rPr>
               <a:t>program-cost.pptx</a:t>
             </a:r>
@@ -6756,13 +7124,17 @@
           </a:bodyPr>
           <a:lstStyle/>
           <a:p>
-            <a:pPr algn="ctr"/>
+            <a:pPr algn="ctr">
+              <a:defRPr>
+                <a:latin typeface="Roboto"/>
+              </a:defRPr>
+            </a:pPr>
             <a:r>
               <a:rPr sz="900" b="0">
                 <a:solidFill>
                   <a:srgbClr val="5F6F63"/>
                 </a:solidFill>
-                <a:latin typeface="Arial"/>
+                <a:latin typeface="Roboto"/>
               </a:rPr>
               <a:t>Data retrieved 2pm, Tue 6 Oct 2026 · Sample data</a:t>
             </a:r>
@@ -6791,13 +7163,17 @@
           </a:bodyPr>
           <a:lstStyle/>
           <a:p>
-            <a:pPr algn="r"/>
+            <a:pPr algn="r">
+              <a:defRPr>
+                <a:latin typeface="Roboto"/>
+              </a:defRPr>
+            </a:pPr>
             <a:r>
               <a:rPr sz="900" b="0">
                 <a:solidFill>
                   <a:srgbClr val="5F6F63"/>
                 </a:solidFill>
-                <a:latin typeface="Arial"/>
+                <a:latin typeface="Roboto"/>
               </a:rPr>
               <a:t>Slide 6 of 11</a:t>
             </a:r>
@@ -6861,7 +7237,11 @@
           <a:bodyPr rtlCol="0" anchor="ctr"/>
           <a:lstStyle/>
           <a:p>
-            <a:pPr algn="ctr"/>
+            <a:pPr algn="ctr">
+              <a:defRPr>
+                <a:latin typeface="Roboto"/>
+              </a:defRPr>
+            </a:pPr>
           </a:p>
         </p:txBody>
       </p:sp>
@@ -6887,12 +7267,17 @@
           </a:bodyPr>
           <a:lstStyle/>
           <a:p>
+            <a:pPr>
+              <a:defRPr>
+                <a:latin typeface="Roboto"/>
+              </a:defRPr>
+            </a:pPr>
             <a:r>
               <a:rPr sz="1000" b="0">
                 <a:solidFill>
                   <a:srgbClr val="5F6F63"/>
                 </a:solidFill>
-                <a:latin typeface="Arial"/>
+                <a:latin typeface="Roboto"/>
               </a:rPr>
               <a:t>Sample Community Services Ltd · What does each program really cost?</a:t>
             </a:r>
@@ -6921,12 +7306,17 @@
           </a:bodyPr>
           <a:lstStyle/>
           <a:p>
+            <a:pPr>
+              <a:defRPr>
+                <a:latin typeface="Roboto"/>
+              </a:defRPr>
+            </a:pPr>
             <a:r>
               <a:rPr sz="2400" b="1">
                 <a:solidFill>
                   <a:srgbClr val="25342A"/>
                 </a:solidFill>
-                <a:latin typeface="Arial"/>
+                <a:latin typeface="Roboto"/>
               </a:rPr>
               <a:t>What it shows · Program: Mental health first aid</a:t>
             </a:r>
@@ -6974,7 +7364,11 @@
           <a:bodyPr rtlCol="0" anchor="ctr"/>
           <a:lstStyle/>
           <a:p>
-            <a:pPr algn="ctr"/>
+            <a:pPr algn="ctr">
+              <a:defRPr>
+                <a:latin typeface="Roboto"/>
+              </a:defRPr>
+            </a:pPr>
           </a:p>
         </p:txBody>
       </p:sp>
@@ -7000,12 +7394,17 @@
           </a:bodyPr>
           <a:lstStyle/>
           <a:p>
+            <a:pPr>
+              <a:defRPr>
+                <a:latin typeface="Roboto"/>
+              </a:defRPr>
+            </a:pPr>
             <a:r>
               <a:rPr sz="1100" b="1">
                 <a:solidFill>
                   <a:srgbClr val="5F6F63"/>
                 </a:solidFill>
-                <a:latin typeface="Arial"/>
+                <a:latin typeface="Roboto"/>
               </a:rPr>
               <a:t>WHAT IT SHOWS</a:t>
             </a:r>
@@ -7034,12 +7433,17 @@
           </a:bodyPr>
           <a:lstStyle/>
           <a:p>
+            <a:pPr>
+              <a:defRPr>
+                <a:latin typeface="Roboto"/>
+              </a:defRPr>
+            </a:pPr>
             <a:r>
               <a:rPr sz="1600" b="0">
                 <a:solidFill>
                   <a:srgbClr val="25342A"/>
                 </a:solidFill>
-                <a:latin typeface="Arial"/>
+                <a:latin typeface="Roboto"/>
               </a:rPr>
               <a:t>Mental health first aid cost $15,491 in full in May: $8,950 paid by the Federal health program grant, and $6,541 of shared costs no grant covers. It has spent 92.7% of its budget to date, with $101,466 left and 10 months to go.</a:t>
             </a:r>
@@ -7087,7 +7491,11 @@
           <a:bodyPr rtlCol="0" anchor="ctr"/>
           <a:lstStyle/>
           <a:p>
-            <a:pPr algn="ctr"/>
+            <a:pPr algn="ctr">
+              <a:defRPr>
+                <a:latin typeface="Roboto"/>
+              </a:defRPr>
+            </a:pPr>
           </a:p>
         </p:txBody>
       </p:sp>
@@ -7113,12 +7521,17 @@
           </a:bodyPr>
           <a:lstStyle/>
           <a:p>
+            <a:pPr>
+              <a:defRPr>
+                <a:latin typeface="Roboto"/>
+              </a:defRPr>
+            </a:pPr>
             <a:r>
               <a:rPr sz="1100" b="1">
                 <a:solidFill>
                   <a:srgbClr val="5F6F63"/>
                 </a:solidFill>
-                <a:latin typeface="Arial"/>
+                <a:latin typeface="Roboto"/>
               </a:rPr>
               <a:t>WHAT YOU'D DO ABOUT IT</a:t>
             </a:r>
@@ -7147,12 +7560,17 @@
           </a:bodyPr>
           <a:lstStyle/>
           <a:p>
+            <a:pPr>
+              <a:defRPr>
+                <a:latin typeface="Roboto"/>
+              </a:defRPr>
+            </a:pPr>
             <a:r>
               <a:rPr sz="1600" b="0">
                 <a:solidFill>
                   <a:srgbClr val="25342A"/>
                 </a:solidFill>
-                <a:latin typeface="Arial"/>
+                <a:latin typeface="Roboto"/>
               </a:rPr>
               <a:t>The full cost is $15,491 a month; $6,541 of it is shared cost the grant doesn't pay for. Worth asking for as much of it as the funder allows at renewal.</a:t>
             </a:r>
@@ -7181,12 +7599,17 @@
           </a:bodyPr>
           <a:lstStyle/>
           <a:p>
+            <a:pPr>
+              <a:defRPr>
+                <a:latin typeface="Roboto"/>
+              </a:defRPr>
+            </a:pPr>
             <a:r>
               <a:rPr sz="900" b="0">
                 <a:solidFill>
                   <a:srgbClr val="5F6F63"/>
                 </a:solidFill>
-                <a:latin typeface="Arial"/>
+                <a:latin typeface="Roboto"/>
               </a:rPr>
               <a:t>program-cost.pptx</a:t>
             </a:r>
@@ -7215,13 +7638,17 @@
           </a:bodyPr>
           <a:lstStyle/>
           <a:p>
-            <a:pPr algn="ctr"/>
+            <a:pPr algn="ctr">
+              <a:defRPr>
+                <a:latin typeface="Roboto"/>
+              </a:defRPr>
+            </a:pPr>
             <a:r>
               <a:rPr sz="900" b="0">
                 <a:solidFill>
                   <a:srgbClr val="5F6F63"/>
                 </a:solidFill>
-                <a:latin typeface="Arial"/>
+                <a:latin typeface="Roboto"/>
               </a:rPr>
               <a:t>Data retrieved 2pm, Tue 6 Oct 2026 · Sample data</a:t>
             </a:r>
@@ -7250,13 +7677,17 @@
           </a:bodyPr>
           <a:lstStyle/>
           <a:p>
-            <a:pPr algn="r"/>
+            <a:pPr algn="r">
+              <a:defRPr>
+                <a:latin typeface="Roboto"/>
+              </a:defRPr>
+            </a:pPr>
             <a:r>
               <a:rPr sz="900" b="0">
                 <a:solidFill>
                   <a:srgbClr val="5F6F63"/>
                 </a:solidFill>
-                <a:latin typeface="Arial"/>
+                <a:latin typeface="Roboto"/>
               </a:rPr>
               <a:t>Slide 7 of 11</a:t>
             </a:r>
@@ -7320,7 +7751,11 @@
           <a:bodyPr rtlCol="0" anchor="ctr"/>
           <a:lstStyle/>
           <a:p>
-            <a:pPr algn="ctr"/>
+            <a:pPr algn="ctr">
+              <a:defRPr>
+                <a:latin typeface="Roboto"/>
+              </a:defRPr>
+            </a:pPr>
           </a:p>
         </p:txBody>
       </p:sp>
@@ -7346,12 +7781,17 @@
           </a:bodyPr>
           <a:lstStyle/>
           <a:p>
+            <a:pPr>
+              <a:defRPr>
+                <a:latin typeface="Roboto"/>
+              </a:defRPr>
+            </a:pPr>
             <a:r>
               <a:rPr sz="1000" b="0">
                 <a:solidFill>
                   <a:srgbClr val="5F6F63"/>
                 </a:solidFill>
-                <a:latin typeface="Arial"/>
+                <a:latin typeface="Roboto"/>
               </a:rPr>
               <a:t>Sample Community Services Ltd · What does each program really cost?</a:t>
             </a:r>
@@ -7380,12 +7820,17 @@
           </a:bodyPr>
           <a:lstStyle/>
           <a:p>
+            <a:pPr>
+              <a:defRPr>
+                <a:latin typeface="Roboto"/>
+              </a:defRPr>
+            </a:pPr>
             <a:r>
               <a:rPr sz="2400" b="1">
                 <a:solidFill>
                   <a:srgbClr val="25342A"/>
                 </a:solidFill>
-                <a:latin typeface="Arial"/>
+                <a:latin typeface="Roboto"/>
               </a:rPr>
               <a:t>What it shows · Program: Digital literacy</a:t>
             </a:r>
@@ -7433,7 +7878,11 @@
           <a:bodyPr rtlCol="0" anchor="ctr"/>
           <a:lstStyle/>
           <a:p>
-            <a:pPr algn="ctr"/>
+            <a:pPr algn="ctr">
+              <a:defRPr>
+                <a:latin typeface="Roboto"/>
+              </a:defRPr>
+            </a:pPr>
           </a:p>
         </p:txBody>
       </p:sp>
@@ -7459,12 +7908,17 @@
           </a:bodyPr>
           <a:lstStyle/>
           <a:p>
+            <a:pPr>
+              <a:defRPr>
+                <a:latin typeface="Roboto"/>
+              </a:defRPr>
+            </a:pPr>
             <a:r>
               <a:rPr sz="1100" b="1">
                 <a:solidFill>
                   <a:srgbClr val="5F6F63"/>
                 </a:solidFill>
-                <a:latin typeface="Arial"/>
+                <a:latin typeface="Roboto"/>
               </a:rPr>
               <a:t>WHAT IT SHOWS</a:t>
             </a:r>
@@ -7493,12 +7947,17 @@
           </a:bodyPr>
           <a:lstStyle/>
           <a:p>
+            <a:pPr>
+              <a:defRPr>
+                <a:latin typeface="Roboto"/>
+              </a:defRPr>
+            </a:pPr>
             <a:r>
               <a:rPr sz="1600" b="0">
                 <a:solidFill>
                   <a:srgbClr val="25342A"/>
                 </a:solidFill>
-                <a:latin typeface="Arial"/>
+                <a:latin typeface="Roboto"/>
               </a:rPr>
               <a:t>Digital literacy cost $8,022 in full in May: $4,635 paid by the Philanthropic foundation grant, and $3,387 of shared costs no grant covers. It has spent 100.9% of its budget to date, with $49,629 left and 10 months to go.</a:t>
             </a:r>
@@ -7546,7 +8005,11 @@
           <a:bodyPr rtlCol="0" anchor="ctr"/>
           <a:lstStyle/>
           <a:p>
-            <a:pPr algn="ctr"/>
+            <a:pPr algn="ctr">
+              <a:defRPr>
+                <a:latin typeface="Roboto"/>
+              </a:defRPr>
+            </a:pPr>
           </a:p>
         </p:txBody>
       </p:sp>
@@ -7572,12 +8035,17 @@
           </a:bodyPr>
           <a:lstStyle/>
           <a:p>
+            <a:pPr>
+              <a:defRPr>
+                <a:latin typeface="Roboto"/>
+              </a:defRPr>
+            </a:pPr>
             <a:r>
               <a:rPr sz="1100" b="1">
                 <a:solidFill>
                   <a:srgbClr val="5F6F63"/>
                 </a:solidFill>
-                <a:latin typeface="Arial"/>
+                <a:latin typeface="Roboto"/>
               </a:rPr>
               <a:t>WHAT YOU'D DO ABOUT IT</a:t>
             </a:r>
@@ -7606,12 +8074,17 @@
           </a:bodyPr>
           <a:lstStyle/>
           <a:p>
+            <a:pPr>
+              <a:defRPr>
+                <a:latin typeface="Roboto"/>
+              </a:defRPr>
+            </a:pPr>
             <a:r>
               <a:rPr sz="1600" b="0">
                 <a:solidFill>
                   <a:srgbClr val="25342A"/>
                 </a:solidFill>
-                <a:latin typeface="Arial"/>
+                <a:latin typeface="Roboto"/>
               </a:rPr>
               <a:t>The full cost is $8,022 a month; $3,387 of it is shared cost the grant doesn't pay for. Worth asking for as much of it as the funder allows at renewal.</a:t>
             </a:r>
@@ -7640,12 +8113,17 @@
           </a:bodyPr>
           <a:lstStyle/>
           <a:p>
+            <a:pPr>
+              <a:defRPr>
+                <a:latin typeface="Roboto"/>
+              </a:defRPr>
+            </a:pPr>
             <a:r>
               <a:rPr sz="900" b="0">
                 <a:solidFill>
                   <a:srgbClr val="5F6F63"/>
                 </a:solidFill>
-                <a:latin typeface="Arial"/>
+                <a:latin typeface="Roboto"/>
               </a:rPr>
               <a:t>program-cost.pptx</a:t>
             </a:r>
@@ -7674,13 +8152,17 @@
           </a:bodyPr>
           <a:lstStyle/>
           <a:p>
-            <a:pPr algn="ctr"/>
+            <a:pPr algn="ctr">
+              <a:defRPr>
+                <a:latin typeface="Roboto"/>
+              </a:defRPr>
+            </a:pPr>
             <a:r>
               <a:rPr sz="900" b="0">
                 <a:solidFill>
                   <a:srgbClr val="5F6F63"/>
                 </a:solidFill>
-                <a:latin typeface="Arial"/>
+                <a:latin typeface="Roboto"/>
               </a:rPr>
               <a:t>Data retrieved 2pm, Tue 6 Oct 2026 · Sample data</a:t>
             </a:r>
@@ -7709,13 +8191,17 @@
           </a:bodyPr>
           <a:lstStyle/>
           <a:p>
-            <a:pPr algn="r"/>
+            <a:pPr algn="r">
+              <a:defRPr>
+                <a:latin typeface="Roboto"/>
+              </a:defRPr>
+            </a:pPr>
             <a:r>
               <a:rPr sz="900" b="0">
                 <a:solidFill>
                   <a:srgbClr val="5F6F63"/>
                 </a:solidFill>
-                <a:latin typeface="Arial"/>
+                <a:latin typeface="Roboto"/>
               </a:rPr>
               <a:t>Slide 8 of 11</a:t>
             </a:r>
@@ -7779,7 +8265,11 @@
           <a:bodyPr rtlCol="0" anchor="ctr"/>
           <a:lstStyle/>
           <a:p>
-            <a:pPr algn="ctr"/>
+            <a:pPr algn="ctr">
+              <a:defRPr>
+                <a:latin typeface="Roboto"/>
+              </a:defRPr>
+            </a:pPr>
           </a:p>
         </p:txBody>
       </p:sp>
@@ -7805,12 +8295,17 @@
           </a:bodyPr>
           <a:lstStyle/>
           <a:p>
+            <a:pPr>
+              <a:defRPr>
+                <a:latin typeface="Roboto"/>
+              </a:defRPr>
+            </a:pPr>
             <a:r>
               <a:rPr sz="1000" b="0">
                 <a:solidFill>
                   <a:srgbClr val="5F6F63"/>
                 </a:solidFill>
-                <a:latin typeface="Arial"/>
+                <a:latin typeface="Roboto"/>
               </a:rPr>
               <a:t>Sample Community Services Ltd · What does each program really cost?</a:t>
             </a:r>
@@ -7839,12 +8334,17 @@
           </a:bodyPr>
           <a:lstStyle/>
           <a:p>
+            <a:pPr>
+              <a:defRPr>
+                <a:latin typeface="Roboto"/>
+              </a:defRPr>
+            </a:pPr>
             <a:r>
               <a:rPr sz="2400" b="1">
                 <a:solidFill>
                   <a:srgbClr val="25342A"/>
                 </a:solidFill>
-                <a:latin typeface="Arial"/>
+                <a:latin typeface="Roboto"/>
               </a:rPr>
               <a:t>What it shows · Program: Community meals (2025-26)</a:t>
             </a:r>
@@ -7892,7 +8392,11 @@
           <a:bodyPr rtlCol="0" anchor="ctr"/>
           <a:lstStyle/>
           <a:p>
-            <a:pPr algn="ctr"/>
+            <a:pPr algn="ctr">
+              <a:defRPr>
+                <a:latin typeface="Roboto"/>
+              </a:defRPr>
+            </a:pPr>
           </a:p>
         </p:txBody>
       </p:sp>
@@ -7918,12 +8422,17 @@
           </a:bodyPr>
           <a:lstStyle/>
           <a:p>
+            <a:pPr>
+              <a:defRPr>
+                <a:latin typeface="Roboto"/>
+              </a:defRPr>
+            </a:pPr>
             <a:r>
               <a:rPr sz="1100" b="1">
                 <a:solidFill>
                   <a:srgbClr val="5F6F63"/>
                 </a:solidFill>
-                <a:latin typeface="Arial"/>
+                <a:latin typeface="Roboto"/>
               </a:rPr>
               <a:t>WHAT IT SHOWS</a:t>
             </a:r>
@@ -7952,12 +8461,17 @@
           </a:bodyPr>
           <a:lstStyle/>
           <a:p>
+            <a:pPr>
+              <a:defRPr>
+                <a:latin typeface="Roboto"/>
+              </a:defRPr>
+            </a:pPr>
             <a:r>
               <a:rPr sz="1600" b="0">
                 <a:solidFill>
                   <a:srgbClr val="25342A"/>
                 </a:solidFill>
-                <a:latin typeface="Arial"/>
+                <a:latin typeface="Roboto"/>
               </a:rPr>
               <a:t>Community meals (2025-26) cost $6,058 in full in May: $3,500 paid by the Local council community grant grant, and $2,558 of shared costs no grant covers. It has spent 97.4% of its budget to date, with $4,700 left and 1 months to go.</a:t>
             </a:r>
@@ -8005,7 +8519,11 @@
           <a:bodyPr rtlCol="0" anchor="ctr"/>
           <a:lstStyle/>
           <a:p>
-            <a:pPr algn="ctr"/>
+            <a:pPr algn="ctr">
+              <a:defRPr>
+                <a:latin typeface="Roboto"/>
+              </a:defRPr>
+            </a:pPr>
           </a:p>
         </p:txBody>
       </p:sp>
@@ -8031,12 +8549,17 @@
           </a:bodyPr>
           <a:lstStyle/>
           <a:p>
+            <a:pPr>
+              <a:defRPr>
+                <a:latin typeface="Roboto"/>
+              </a:defRPr>
+            </a:pPr>
             <a:r>
               <a:rPr sz="1100" b="1">
                 <a:solidFill>
                   <a:srgbClr val="5F6F63"/>
                 </a:solidFill>
-                <a:latin typeface="Arial"/>
+                <a:latin typeface="Roboto"/>
               </a:rPr>
               <a:t>WHAT YOU'D DO ABOUT IT</a:t>
             </a:r>
@@ -8065,12 +8588,17 @@
           </a:bodyPr>
           <a:lstStyle/>
           <a:p>
+            <a:pPr>
+              <a:defRPr>
+                <a:latin typeface="Roboto"/>
+              </a:defRPr>
+            </a:pPr>
             <a:r>
               <a:rPr sz="1600" b="0">
                 <a:solidFill>
                   <a:srgbClr val="25342A"/>
                 </a:solidFill>
-                <a:latin typeface="Arial"/>
+                <a:latin typeface="Roboto"/>
               </a:rPr>
               <a:t>The full cost is $6,058 a month; $2,558 of it is shared cost the grant doesn't pay for. Worth asking for as much of it as the funder allows at renewal.</a:t>
             </a:r>
@@ -8099,12 +8627,17 @@
           </a:bodyPr>
           <a:lstStyle/>
           <a:p>
+            <a:pPr>
+              <a:defRPr>
+                <a:latin typeface="Roboto"/>
+              </a:defRPr>
+            </a:pPr>
             <a:r>
               <a:rPr sz="900" b="0">
                 <a:solidFill>
                   <a:srgbClr val="5F6F63"/>
                 </a:solidFill>
-                <a:latin typeface="Arial"/>
+                <a:latin typeface="Roboto"/>
               </a:rPr>
               <a:t>program-cost.pptx</a:t>
             </a:r>
@@ -8133,13 +8666,17 @@
           </a:bodyPr>
           <a:lstStyle/>
           <a:p>
-            <a:pPr algn="ctr"/>
+            <a:pPr algn="ctr">
+              <a:defRPr>
+                <a:latin typeface="Roboto"/>
+              </a:defRPr>
+            </a:pPr>
             <a:r>
               <a:rPr sz="900" b="0">
                 <a:solidFill>
                   <a:srgbClr val="5F6F63"/>
                 </a:solidFill>
-                <a:latin typeface="Arial"/>
+                <a:latin typeface="Roboto"/>
               </a:rPr>
               <a:t>Data retrieved 2pm, Tue 6 Oct 2026 · Sample data</a:t>
             </a:r>
@@ -8168,13 +8705,17 @@
           </a:bodyPr>
           <a:lstStyle/>
           <a:p>
-            <a:pPr algn="r"/>
+            <a:pPr algn="r">
+              <a:defRPr>
+                <a:latin typeface="Roboto"/>
+              </a:defRPr>
+            </a:pPr>
             <a:r>
               <a:rPr sz="900" b="0">
                 <a:solidFill>
                   <a:srgbClr val="5F6F63"/>
                 </a:solidFill>
-                <a:latin typeface="Arial"/>
+                <a:latin typeface="Roboto"/>
               </a:rPr>
               <a:t>Slide 9 of 11</a:t>
             </a:r>

--- a/media/exports/reports/2026-05/program-cost.pptx
+++ b/media/exports/reports/2026-05/program-cost.pptx
@@ -6,16 +6,13 @@
   </p:sldMasterIdLst>
   <p:sldIdLst>
     <p:sldId id="256" r:id="rId7"/>
-    <p:sldId id="257" r:id="rId8"/>
-    <p:sldId id="258" r:id="rId9"/>
-    <p:sldId id="259" r:id="rId10"/>
-    <p:sldId id="260" r:id="rId11"/>
-    <p:sldId id="261" r:id="rId12"/>
-    <p:sldId id="262" r:id="rId13"/>
-    <p:sldId id="263" r:id="rId14"/>
-    <p:sldId id="264" r:id="rId15"/>
-    <p:sldId id="265" r:id="rId16"/>
-    <p:sldId id="266" r:id="rId17"/>
+    <p:sldId id="257" r:id="rId9"/>
+    <p:sldId id="258" r:id="rId10"/>
+    <p:sldId id="259" r:id="rId11"/>
+    <p:sldId id="260" r:id="rId12"/>
+    <p:sldId id="261" r:id="rId13"/>
+    <p:sldId id="262" r:id="rId14"/>
+    <p:sldId id="263" r:id="rId15"/>
   </p:sldIdLst>
   <p:sldSz cx="12191695" cy="6858000" type="screen4x3"/>
   <p:notesSz cx="6858000" cy="9144000"/>
@@ -121,8 +118,19 @@
 <c:chartSpace xmlns:c="http://schemas.openxmlformats.org/drawingml/2006/chart" xmlns:a="http://schemas.openxmlformats.org/drawingml/2006/main" xmlns:r="http://schemas.openxmlformats.org/officeDocument/2006/relationships">
   <c:date1904 val="0"/>
   <c:chart>
-    <c:autoTitleDeleted val="0"/>
+    <c:autoTitleDeleted val="1"/>
     <c:plotArea>
+      <c:layout>
+        <c:manualLayout>
+          <c:layoutTarget val="inner"/>
+          <c:xMode val="edge"/>
+          <c:yMode val="edge"/>
+          <c:x val="0.3"/>
+          <c:y val="0.03"/>
+          <c:w val="0.58"/>
+          <c:h val="0.88"/>
+        </c:manualLayout>
+      </c:layout>
       <c:barChart>
         <c:barDir val="bar"/>
         <c:grouping val="clustered"/>
@@ -135,7 +143,7 @@
               <c:strCache>
                 <c:ptCount val="1"/>
                 <c:pt idx="0">
-                  <c:v>Value</c:v>
+                  <c:v>$</c:v>
                 </c:pt>
               </c:strCache>
             </c:strRef>
@@ -249,7 +257,7 @@
             <a:lstStyle/>
             <a:p>
               <a:pPr>
-                <a:defRPr sz="1100"/>
+                <a:defRPr sz="1000"/>
               </a:pPr>
             </a:p>
           </c:txPr>
@@ -286,7 +294,7 @@
           <a:lstStyle/>
           <a:p>
             <a:pPr>
-              <a:defRPr sz="1200"/>
+              <a:defRPr sz="1100"/>
             </a:pPr>
           </a:p>
         </c:txPr>
@@ -299,7 +307,10 @@
       </c:catAx>
       <c:valAx>
         <c:axId val="-2113994440"/>
-        <c:scaling/>
+        <c:scaling>
+          <c:max val="62375.99999999999"/>
+          <c:min val="0.0"/>
+        </c:scaling>
         <c:delete/>
         <c:axPos val="b"/>
         <c:majorTickMark val="out"/>
@@ -332,223 +343,21 @@
 <file path=ppt/charts/chart2.xml><?xml version="1.0" encoding="utf-8"?>
 <c:chartSpace xmlns:c="http://schemas.openxmlformats.org/drawingml/2006/chart" xmlns:a="http://schemas.openxmlformats.org/drawingml/2006/main" xmlns:r="http://schemas.openxmlformats.org/officeDocument/2006/relationships">
   <c:date1904 val="0"/>
-  <c:chart>
-    <c:autoTitleDeleted val="0"/>
-    <c:plotArea>
-      <c:barChart>
-        <c:barDir val="bar"/>
-        <c:grouping val="clustered"/>
-        <c:ser>
-          <c:idx val="0"/>
-          <c:order val="0"/>
-          <c:tx>
-            <c:strRef>
-              <c:f>Sheet1!$B$1</c:f>
-              <c:strCache>
-                <c:ptCount val="1"/>
-                <c:pt idx="0">
-                  <c:v>Value</c:v>
-                </c:pt>
-              </c:strCache>
-            </c:strRef>
-          </c:tx>
-          <c:dPt>
-            <c:idx val="0"/>
-            <c:spPr>
-              <a:solidFill>
-                <a:srgbClr val="0E9F6E"/>
-              </a:solidFill>
-            </c:spPr>
-          </c:dPt>
-          <c:dPt>
-            <c:idx val="1"/>
-            <c:spPr>
-              <a:solidFill>
-                <a:srgbClr val="0E9F6E"/>
-              </a:solidFill>
-            </c:spPr>
-          </c:dPt>
-          <c:dPt>
-            <c:idx val="2"/>
-            <c:spPr>
-              <a:solidFill>
-                <a:srgbClr val="0E9F6E"/>
-              </a:solidFill>
-            </c:spPr>
-          </c:dPt>
-          <c:dPt>
-            <c:idx val="3"/>
-            <c:spPr>
-              <a:solidFill>
-                <a:srgbClr val="0E9F6E"/>
-              </a:solidFill>
-            </c:spPr>
-          </c:dPt>
-          <c:dPt>
-            <c:idx val="4"/>
-            <c:spPr>
-              <a:solidFill>
-                <a:srgbClr val="0E9F6E"/>
-              </a:solidFill>
-            </c:spPr>
-          </c:dPt>
-          <c:dPt>
-            <c:idx val="5"/>
-            <c:spPr>
-              <a:solidFill>
-                <a:srgbClr val="0E9F6E"/>
-              </a:solidFill>
-            </c:spPr>
-          </c:dPt>
-          <c:cat>
-            <c:strRef>
-              <c:f>Sheet1!$A$2:$A$7</c:f>
-              <c:strCache>
-                <c:ptCount val="6"/>
-                <c:pt idx="0">
-                  <c:v>Volunteer coordinator</c:v>
-                </c:pt>
-                <c:pt idx="1">
-                  <c:v>Community meals (2025-26)</c:v>
-                </c:pt>
-                <c:pt idx="2">
-                  <c:v>Digital literacy</c:v>
-                </c:pt>
-                <c:pt idx="3">
-                  <c:v>Mental health first aid</c:v>
-                </c:pt>
-                <c:pt idx="4">
-                  <c:v>Youth outreach</c:v>
-                </c:pt>
-                <c:pt idx="5">
-                  <c:v>Housing support</c:v>
-                </c:pt>
-              </c:strCache>
-            </c:strRef>
-          </c:cat>
-          <c:val>
-            <c:numRef>
-              <c:f>Sheet1!$B$2:$B$7</c:f>
-              <c:numCache>
-                <c:formatCode>0.0"%";[Red](0.0"%")</c:formatCode>
-                <c:ptCount val="6"/>
-                <c:pt idx="0">
-                  <c:v>3.7</c:v>
-                </c:pt>
-                <c:pt idx="1">
-                  <c:v>4.8</c:v>
-                </c:pt>
-                <c:pt idx="2">
-                  <c:v>6.4</c:v>
-                </c:pt>
-                <c:pt idx="3">
-                  <c:v>12.4</c:v>
-                </c:pt>
-                <c:pt idx="4">
-                  <c:v>29.3</c:v>
-                </c:pt>
-                <c:pt idx="5">
-                  <c:v>43.4</c:v>
-                </c:pt>
-              </c:numCache>
-            </c:numRef>
-          </c:val>
-        </c:ser>
-        <c:dLbls>
-          <c:numFmt formatCode="0.0&quot;%&quot;;[Red](0.0&quot;%&quot;)" sourceLinked="0"/>
-          <c:txPr>
-            <a:bodyPr/>
-            <a:lstStyle/>
-            <a:p>
-              <a:pPr>
-                <a:defRPr sz="1100"/>
-              </a:pPr>
-            </a:p>
-          </c:txPr>
-          <c:dLblPos val="outEnd"/>
-          <c:showLegendKey val="0"/>
-          <c:showVal val="1"/>
-          <c:showCatName val="0"/>
-          <c:showSerName val="0"/>
-          <c:showPercent val="0"/>
-          <c:showBubbleSize val="0"/>
-          <c:showLeaderLines val="1"/>
-        </c:dLbls>
-        <c:gapWidth val="60"/>
-        <c:axId val="-2068027336"/>
-        <c:axId val="-2113994440"/>
-      </c:barChart>
-      <c:catAx>
-        <c:axId val="-2068027336"/>
-        <c:scaling>
-          <c:orientation val="minMax"/>
-        </c:scaling>
-        <c:delete val="0"/>
-        <c:axPos val="l"/>
-        <c:majorTickMark val="out"/>
-        <c:minorTickMark val="none"/>
-        <c:tickLblPos val="nextTo"/>
-        <c:spPr>
-          <a:ln>
-            <a:noFill/>
-          </a:ln>
-        </c:spPr>
-        <c:txPr>
-          <a:bodyPr/>
-          <a:lstStyle/>
-          <a:p>
-            <a:pPr>
-              <a:defRPr sz="1200"/>
-            </a:pPr>
-          </a:p>
-        </c:txPr>
-        <c:crossAx val="-2113994440"/>
-        <c:crosses val="autoZero"/>
-        <c:auto val="1"/>
-        <c:lblAlgn val="ctr"/>
-        <c:lblOffset val="100"/>
-        <c:noMultiLvlLbl val="0"/>
-      </c:catAx>
-      <c:valAx>
-        <c:axId val="-2113994440"/>
-        <c:scaling/>
-        <c:delete/>
-        <c:axPos val="b"/>
-        <c:majorTickMark val="out"/>
-        <c:minorTickMark val="none"/>
-        <c:tickLblPos val="nextTo"/>
-        <c:crossAx val="-2068027336"/>
-        <c:crosses val="autoZero"/>
-      </c:valAx>
-    </c:plotArea>
-    <c:dispBlanksAs val="gap"/>
-  </c:chart>
-  <c:txPr>
-    <a:bodyPr/>
-    <a:lstStyle/>
-    <a:p>
-      <a:pPr>
-        <a:defRPr sz="1800">
-          <a:latin typeface="Roboto"/>
-        </a:defRPr>
-      </a:pPr>
-      <a:endParaRPr lang="en-US"/>
-    </a:p>
-  </c:txPr>
-  <c:externalData r:id="rId1">
-    <c:autoUpdate val="0"/>
-  </c:externalData>
-</c:chartSpace>
-</file>
-
-<file path=ppt/charts/chart3.xml><?xml version="1.0" encoding="utf-8"?>
-<c:chartSpace xmlns:c="http://schemas.openxmlformats.org/drawingml/2006/chart" xmlns:a="http://schemas.openxmlformats.org/drawingml/2006/main" xmlns:r="http://schemas.openxmlformats.org/officeDocument/2006/relationships">
-  <c:date1904 val="0"/>
   <c:roundedCorners val="0"/>
   <c:chart>
-    <c:autoTitleDeleted val="0"/>
+    <c:autoTitleDeleted val="1"/>
     <c:plotArea>
-      <c:layout/>
+      <c:layout>
+        <c:manualLayout>
+          <c:layoutTarget val="inner"/>
+          <c:xMode val="edge"/>
+          <c:yMode val="edge"/>
+          <c:x val="0.11"/>
+          <c:y val="0.05"/>
+          <c:w val="0.86"/>
+          <c:h val="0.8"/>
+        </c:manualLayout>
+      </c:layout>
       <c:areaChart>
         <c:grouping val="standard"/>
         <c:varyColors val="0"/>
@@ -561,7 +370,7 @@
               <c:strCache>
                 <c:ptCount val="1"/>
                 <c:pt idx="0">
-                  <c:v>Value</c:v>
+                  <c:v>Spend $</c:v>
                 </c:pt>
               </c:strCache>
             </c:strRef>
@@ -653,64 +462,64 @@
                 <c:formatCode>$#,##0;[Red]($#,##0);"-"</c:formatCode>
                 <c:ptCount val="20"/>
                 <c:pt idx="0">
-                  <c:v>26600</c:v>
+                  <c:v>0</c:v>
                 </c:pt>
                 <c:pt idx="1">
-                  <c:v>31800</c:v>
+                  <c:v>0</c:v>
                 </c:pt>
                 <c:pt idx="2">
-                  <c:v>29700</c:v>
+                  <c:v>0</c:v>
                 </c:pt>
                 <c:pt idx="3">
-                  <c:v>62700</c:v>
+                  <c:v>0</c:v>
                 </c:pt>
                 <c:pt idx="4">
-                  <c:v>61700</c:v>
+                  <c:v>0</c:v>
                 </c:pt>
                 <c:pt idx="5">
-                  <c:v>54500</c:v>
+                  <c:v>0</c:v>
                 </c:pt>
                 <c:pt idx="6">
-                  <c:v>61500</c:v>
+                  <c:v>0</c:v>
                 </c:pt>
                 <c:pt idx="7">
-                  <c:v>61700</c:v>
+                  <c:v>0</c:v>
                 </c:pt>
                 <c:pt idx="8">
-                  <c:v>52200</c:v>
+                  <c:v>0</c:v>
                 </c:pt>
                 <c:pt idx="9">
-                  <c:v>59063</c:v>
+                  <c:v>0</c:v>
                 </c:pt>
                 <c:pt idx="10">
-                  <c:v>61544</c:v>
+                  <c:v>0</c:v>
                 </c:pt>
                 <c:pt idx="11">
-                  <c:v>62137</c:v>
+                  <c:v>0</c:v>
                 </c:pt>
                 <c:pt idx="12">
-                  <c:v>69185</c:v>
+                  <c:v>0</c:v>
                 </c:pt>
                 <c:pt idx="13">
-                  <c:v>70164</c:v>
+                  <c:v>0</c:v>
                 </c:pt>
                 <c:pt idx="14">
-                  <c:v>68793</c:v>
+                  <c:v>0</c:v>
                 </c:pt>
                 <c:pt idx="15">
-                  <c:v>59785</c:v>
+                  <c:v>30502</c:v>
                 </c:pt>
                 <c:pt idx="16">
-                  <c:v>55759</c:v>
+                  <c:v>26508</c:v>
                 </c:pt>
                 <c:pt idx="17">
-                  <c:v>53806</c:v>
+                  <c:v>24832</c:v>
                 </c:pt>
                 <c:pt idx="18">
-                  <c:v>66729</c:v>
+                  <c:v>23730</c:v>
                 </c:pt>
                 <c:pt idx="19">
-                  <c:v>72245</c:v>
+                  <c:v>31337</c:v>
                 </c:pt>
               </c:numCache>
             </c:numRef>
@@ -752,12 +561,15 @@
         <c:auto val="1"/>
         <c:lblAlgn val="ctr"/>
         <c:lblOffset val="100"/>
+        <c:tickLblSkip val="3"/>
         <c:noMultiLvlLbl val="0"/>
       </c:catAx>
       <c:valAx>
         <c:axId val="-2100718248"/>
         <c:scaling>
           <c:orientation val="minMax"/>
+          <c:max val="40000.0"/>
+          <c:min val="0.0"/>
         </c:scaling>
         <c:delete val="0"/>
         <c:axPos val="l"/>
@@ -791,6 +603,7 @@
         <c:crossAx val="-2101159928"/>
         <c:crosses val="autoZero"/>
         <c:crossBetween val="midCat"/>
+        <c:majorUnit val="10000.0"/>
       </c:valAx>
     </c:plotArea>
     <c:plotVisOnly val="1"/>
@@ -813,6 +626,2356 @@
     <c:autoUpdate val="0"/>
   </c:externalData>
 </c:chartSpace>
+</file>
+
+<file path=ppt/charts/chart3.xml><?xml version="1.0" encoding="utf-8"?>
+<c:chartSpace xmlns:c="http://schemas.openxmlformats.org/drawingml/2006/chart" xmlns:a="http://schemas.openxmlformats.org/drawingml/2006/main" xmlns:r="http://schemas.openxmlformats.org/officeDocument/2006/relationships">
+  <c:date1904 val="0"/>
+  <c:roundedCorners val="0"/>
+  <c:chart>
+    <c:autoTitleDeleted val="1"/>
+    <c:plotArea>
+      <c:layout>
+        <c:manualLayout>
+          <c:layoutTarget val="inner"/>
+          <c:xMode val="edge"/>
+          <c:yMode val="edge"/>
+          <c:x val="0.11"/>
+          <c:y val="0.05"/>
+          <c:w val="0.86"/>
+          <c:h val="0.8"/>
+        </c:manualLayout>
+      </c:layout>
+      <c:areaChart>
+        <c:grouping val="standard"/>
+        <c:varyColors val="0"/>
+        <c:ser>
+          <c:idx val="0"/>
+          <c:order val="0"/>
+          <c:tx>
+            <c:strRef>
+              <c:f>Sheet1!$B$1</c:f>
+              <c:strCache>
+                <c:ptCount val="1"/>
+                <c:pt idx="0">
+                  <c:v>Spend $</c:v>
+                </c:pt>
+              </c:strCache>
+            </c:strRef>
+          </c:tx>
+          <c:spPr>
+            <a:solidFill>
+              <a:srgbClr val="0E9F6E">
+                <a:alpha val="25000"/>
+              </a:srgbClr>
+            </a:solidFill>
+            <a:ln w="31750">
+              <a:solidFill>
+                <a:srgbClr val="0E9F6E"/>
+              </a:solidFill>
+            </a:ln>
+          </c:spPr>
+          <c:cat>
+            <c:strRef>
+              <c:f>Sheet1!$A$2:$A$21</c:f>
+              <c:strCache>
+                <c:ptCount val="20"/>
+                <c:pt idx="0">
+                  <c:v>Oct 24</c:v>
+                </c:pt>
+                <c:pt idx="1">
+                  <c:v>Nov 24</c:v>
+                </c:pt>
+                <c:pt idx="2">
+                  <c:v>Dec 24</c:v>
+                </c:pt>
+                <c:pt idx="3">
+                  <c:v>Jan 25</c:v>
+                </c:pt>
+                <c:pt idx="4">
+                  <c:v>Feb 25</c:v>
+                </c:pt>
+                <c:pt idx="5">
+                  <c:v>Mar 25</c:v>
+                </c:pt>
+                <c:pt idx="6">
+                  <c:v>Apr 25</c:v>
+                </c:pt>
+                <c:pt idx="7">
+                  <c:v>May 25</c:v>
+                </c:pt>
+                <c:pt idx="8">
+                  <c:v>Jun 25</c:v>
+                </c:pt>
+                <c:pt idx="9">
+                  <c:v>Jul 25</c:v>
+                </c:pt>
+                <c:pt idx="10">
+                  <c:v>Aug 25</c:v>
+                </c:pt>
+                <c:pt idx="11">
+                  <c:v>Sep 25</c:v>
+                </c:pt>
+                <c:pt idx="12">
+                  <c:v>Oct 25</c:v>
+                </c:pt>
+                <c:pt idx="13">
+                  <c:v>Nov 25</c:v>
+                </c:pt>
+                <c:pt idx="14">
+                  <c:v>Dec 25</c:v>
+                </c:pt>
+                <c:pt idx="15">
+                  <c:v>Jan 26</c:v>
+                </c:pt>
+                <c:pt idx="16">
+                  <c:v>Feb 26</c:v>
+                </c:pt>
+                <c:pt idx="17">
+                  <c:v>Mar 26</c:v>
+                </c:pt>
+                <c:pt idx="18">
+                  <c:v>Apr 26</c:v>
+                </c:pt>
+                <c:pt idx="19">
+                  <c:v>May 26</c:v>
+                </c:pt>
+              </c:strCache>
+            </c:strRef>
+          </c:cat>
+          <c:val>
+            <c:numRef>
+              <c:f>Sheet1!$B$2:$B$21</c:f>
+              <c:numCache>
+                <c:formatCode>$#,##0;[Red]($#,##0);"-"</c:formatCode>
+                <c:ptCount val="20"/>
+                <c:pt idx="0">
+                  <c:v>0</c:v>
+                </c:pt>
+                <c:pt idx="1">
+                  <c:v>0</c:v>
+                </c:pt>
+                <c:pt idx="2">
+                  <c:v>0</c:v>
+                </c:pt>
+                <c:pt idx="3">
+                  <c:v>0</c:v>
+                </c:pt>
+                <c:pt idx="4">
+                  <c:v>0</c:v>
+                </c:pt>
+                <c:pt idx="5">
+                  <c:v>0</c:v>
+                </c:pt>
+                <c:pt idx="6">
+                  <c:v>0</c:v>
+                </c:pt>
+                <c:pt idx="7">
+                  <c:v>0</c:v>
+                </c:pt>
+                <c:pt idx="8">
+                  <c:v>0</c:v>
+                </c:pt>
+                <c:pt idx="9">
+                  <c:v>17363</c:v>
+                </c:pt>
+                <c:pt idx="10">
+                  <c:v>21144</c:v>
+                </c:pt>
+                <c:pt idx="11">
+                  <c:v>17537</c:v>
+                </c:pt>
+                <c:pt idx="12">
+                  <c:v>21925</c:v>
+                </c:pt>
+                <c:pt idx="13">
+                  <c:v>21079</c:v>
+                </c:pt>
+                <c:pt idx="14">
+                  <c:v>19272</c:v>
+                </c:pt>
+                <c:pt idx="15">
+                  <c:v>21157</c:v>
+                </c:pt>
+                <c:pt idx="16">
+                  <c:v>20743</c:v>
+                </c:pt>
+                <c:pt idx="17">
+                  <c:v>16515</c:v>
+                </c:pt>
+                <c:pt idx="18">
+                  <c:v>20451</c:v>
+                </c:pt>
+                <c:pt idx="19">
+                  <c:v>21174</c:v>
+                </c:pt>
+              </c:numCache>
+            </c:numRef>
+          </c:val>
+        </c:ser>
+        <c:dLbls>
+          <c:showLegendKey val="0"/>
+          <c:showVal val="0"/>
+          <c:showCatName val="0"/>
+          <c:showSerName val="0"/>
+          <c:showPercent val="0"/>
+          <c:showBubbleSize val="0"/>
+        </c:dLbls>
+        <c:axId val="-2101159928"/>
+        <c:axId val="-2100718248"/>
+      </c:areaChart>
+      <c:catAx>
+        <c:axId val="-2101159928"/>
+        <c:scaling>
+          <c:orientation val="minMax"/>
+        </c:scaling>
+        <c:delete val="0"/>
+        <c:axPos val="b"/>
+        <c:numFmt formatCode="General" sourceLinked="1"/>
+        <c:majorTickMark val="out"/>
+        <c:minorTickMark val="none"/>
+        <c:tickLblPos val="nextTo"/>
+        <c:txPr>
+          <a:bodyPr/>
+          <a:lstStyle/>
+          <a:p>
+            <a:pPr>
+              <a:defRPr sz="1000"/>
+            </a:pPr>
+          </a:p>
+        </c:txPr>
+        <c:crossAx val="-2100718248"/>
+        <c:crosses val="autoZero"/>
+        <c:auto val="1"/>
+        <c:lblAlgn val="ctr"/>
+        <c:lblOffset val="100"/>
+        <c:tickLblSkip val="3"/>
+        <c:noMultiLvlLbl val="0"/>
+      </c:catAx>
+      <c:valAx>
+        <c:axId val="-2100718248"/>
+        <c:scaling>
+          <c:orientation val="minMax"/>
+          <c:max val="25000.0"/>
+          <c:min val="0.0"/>
+        </c:scaling>
+        <c:delete val="0"/>
+        <c:axPos val="l"/>
+        <c:majorGridlines>
+          <c:spPr>
+            <a:ln>
+              <a:solidFill>
+                <a:srgbClr val="E6EAE7"/>
+              </a:solidFill>
+            </a:ln>
+          </c:spPr>
+        </c:majorGridlines>
+        <c:numFmt formatCode="$#,##0;[Red]($#,##0);&quot;-&quot;" sourceLinked="0"/>
+        <c:majorTickMark val="out"/>
+        <c:minorTickMark val="none"/>
+        <c:tickLblPos val="nextTo"/>
+        <c:spPr>
+          <a:ln>
+            <a:noFill/>
+          </a:ln>
+        </c:spPr>
+        <c:txPr>
+          <a:bodyPr/>
+          <a:lstStyle/>
+          <a:p>
+            <a:pPr>
+              <a:defRPr sz="1000"/>
+            </a:pPr>
+          </a:p>
+        </c:txPr>
+        <c:crossAx val="-2101159928"/>
+        <c:crosses val="autoZero"/>
+        <c:crossBetween val="midCat"/>
+        <c:majorUnit val="5000.0"/>
+      </c:valAx>
+    </c:plotArea>
+    <c:plotVisOnly val="1"/>
+    <c:dispBlanksAs val="zero"/>
+    <c:showDLblsOverMax val="0"/>
+  </c:chart>
+  <c:txPr>
+    <a:bodyPr/>
+    <a:lstStyle/>
+    <a:p>
+      <a:pPr>
+        <a:defRPr sz="1800">
+          <a:latin typeface="Roboto"/>
+        </a:defRPr>
+      </a:pPr>
+      <a:endParaRPr/>
+    </a:p>
+  </c:txPr>
+  <c:externalData r:id="rId1">
+    <c:autoUpdate val="0"/>
+  </c:externalData>
+</c:chartSpace>
+</file>
+
+<file path=ppt/charts/chart4.xml><?xml version="1.0" encoding="utf-8"?>
+<c:chartSpace xmlns:c="http://schemas.openxmlformats.org/drawingml/2006/chart" xmlns:a="http://schemas.openxmlformats.org/drawingml/2006/main" xmlns:r="http://schemas.openxmlformats.org/officeDocument/2006/relationships">
+  <c:date1904 val="0"/>
+  <c:roundedCorners val="0"/>
+  <c:chart>
+    <c:autoTitleDeleted val="1"/>
+    <c:plotArea>
+      <c:layout>
+        <c:manualLayout>
+          <c:layoutTarget val="inner"/>
+          <c:xMode val="edge"/>
+          <c:yMode val="edge"/>
+          <c:x val="0.11"/>
+          <c:y val="0.05"/>
+          <c:w val="0.86"/>
+          <c:h val="0.8"/>
+        </c:manualLayout>
+      </c:layout>
+      <c:areaChart>
+        <c:grouping val="standard"/>
+        <c:varyColors val="0"/>
+        <c:ser>
+          <c:idx val="0"/>
+          <c:order val="0"/>
+          <c:tx>
+            <c:strRef>
+              <c:f>Sheet1!$B$1</c:f>
+              <c:strCache>
+                <c:ptCount val="1"/>
+                <c:pt idx="0">
+                  <c:v>Spend $</c:v>
+                </c:pt>
+              </c:strCache>
+            </c:strRef>
+          </c:tx>
+          <c:spPr>
+            <a:solidFill>
+              <a:srgbClr val="0E9F6E">
+                <a:alpha val="25000"/>
+              </a:srgbClr>
+            </a:solidFill>
+            <a:ln w="31750">
+              <a:solidFill>
+                <a:srgbClr val="0E9F6E"/>
+              </a:solidFill>
+            </a:ln>
+          </c:spPr>
+          <c:cat>
+            <c:strRef>
+              <c:f>Sheet1!$A$2:$A$21</c:f>
+              <c:strCache>
+                <c:ptCount val="20"/>
+                <c:pt idx="0">
+                  <c:v>Oct 24</c:v>
+                </c:pt>
+                <c:pt idx="1">
+                  <c:v>Nov 24</c:v>
+                </c:pt>
+                <c:pt idx="2">
+                  <c:v>Dec 24</c:v>
+                </c:pt>
+                <c:pt idx="3">
+                  <c:v>Jan 25</c:v>
+                </c:pt>
+                <c:pt idx="4">
+                  <c:v>Feb 25</c:v>
+                </c:pt>
+                <c:pt idx="5">
+                  <c:v>Mar 25</c:v>
+                </c:pt>
+                <c:pt idx="6">
+                  <c:v>Apr 25</c:v>
+                </c:pt>
+                <c:pt idx="7">
+                  <c:v>May 25</c:v>
+                </c:pt>
+                <c:pt idx="8">
+                  <c:v>Jun 25</c:v>
+                </c:pt>
+                <c:pt idx="9">
+                  <c:v>Jul 25</c:v>
+                </c:pt>
+                <c:pt idx="10">
+                  <c:v>Aug 25</c:v>
+                </c:pt>
+                <c:pt idx="11">
+                  <c:v>Sep 25</c:v>
+                </c:pt>
+                <c:pt idx="12">
+                  <c:v>Oct 25</c:v>
+                </c:pt>
+                <c:pt idx="13">
+                  <c:v>Nov 25</c:v>
+                </c:pt>
+                <c:pt idx="14">
+                  <c:v>Dec 25</c:v>
+                </c:pt>
+                <c:pt idx="15">
+                  <c:v>Jan 26</c:v>
+                </c:pt>
+                <c:pt idx="16">
+                  <c:v>Feb 26</c:v>
+                </c:pt>
+                <c:pt idx="17">
+                  <c:v>Mar 26</c:v>
+                </c:pt>
+                <c:pt idx="18">
+                  <c:v>Apr 26</c:v>
+                </c:pt>
+                <c:pt idx="19">
+                  <c:v>May 26</c:v>
+                </c:pt>
+              </c:strCache>
+            </c:strRef>
+          </c:cat>
+          <c:val>
+            <c:numRef>
+              <c:f>Sheet1!$B$2:$B$21</c:f>
+              <c:numCache>
+                <c:formatCode>$#,##0;[Red]($#,##0);"-"</c:formatCode>
+                <c:ptCount val="20"/>
+                <c:pt idx="0">
+                  <c:v>0</c:v>
+                </c:pt>
+                <c:pt idx="1">
+                  <c:v>0</c:v>
+                </c:pt>
+                <c:pt idx="2">
+                  <c:v>0</c:v>
+                </c:pt>
+                <c:pt idx="3">
+                  <c:v>0</c:v>
+                </c:pt>
+                <c:pt idx="4">
+                  <c:v>0</c:v>
+                </c:pt>
+                <c:pt idx="5">
+                  <c:v>0</c:v>
+                </c:pt>
+                <c:pt idx="6">
+                  <c:v>0</c:v>
+                </c:pt>
+                <c:pt idx="7">
+                  <c:v>0</c:v>
+                </c:pt>
+                <c:pt idx="8">
+                  <c:v>0</c:v>
+                </c:pt>
+                <c:pt idx="9">
+                  <c:v>0</c:v>
+                </c:pt>
+                <c:pt idx="10">
+                  <c:v>0</c:v>
+                </c:pt>
+                <c:pt idx="11">
+                  <c:v>0</c:v>
+                </c:pt>
+                <c:pt idx="12">
+                  <c:v>0</c:v>
+                </c:pt>
+                <c:pt idx="13">
+                  <c:v>0</c:v>
+                </c:pt>
+                <c:pt idx="14">
+                  <c:v>0</c:v>
+                </c:pt>
+                <c:pt idx="15">
+                  <c:v>0</c:v>
+                </c:pt>
+                <c:pt idx="16">
+                  <c:v>0</c:v>
+                </c:pt>
+                <c:pt idx="17">
+                  <c:v>0</c:v>
+                </c:pt>
+                <c:pt idx="18">
+                  <c:v>9584</c:v>
+                </c:pt>
+                <c:pt idx="19">
+                  <c:v>8950</c:v>
+                </c:pt>
+              </c:numCache>
+            </c:numRef>
+          </c:val>
+        </c:ser>
+        <c:dLbls>
+          <c:showLegendKey val="0"/>
+          <c:showVal val="0"/>
+          <c:showCatName val="0"/>
+          <c:showSerName val="0"/>
+          <c:showPercent val="0"/>
+          <c:showBubbleSize val="0"/>
+        </c:dLbls>
+        <c:axId val="-2101159928"/>
+        <c:axId val="-2100718248"/>
+      </c:areaChart>
+      <c:catAx>
+        <c:axId val="-2101159928"/>
+        <c:scaling>
+          <c:orientation val="minMax"/>
+        </c:scaling>
+        <c:delete val="0"/>
+        <c:axPos val="b"/>
+        <c:numFmt formatCode="General" sourceLinked="1"/>
+        <c:majorTickMark val="out"/>
+        <c:minorTickMark val="none"/>
+        <c:tickLblPos val="nextTo"/>
+        <c:txPr>
+          <a:bodyPr/>
+          <a:lstStyle/>
+          <a:p>
+            <a:pPr>
+              <a:defRPr sz="1000"/>
+            </a:pPr>
+          </a:p>
+        </c:txPr>
+        <c:crossAx val="-2100718248"/>
+        <c:crosses val="autoZero"/>
+        <c:auto val="1"/>
+        <c:lblAlgn val="ctr"/>
+        <c:lblOffset val="100"/>
+        <c:tickLblSkip val="3"/>
+        <c:noMultiLvlLbl val="0"/>
+      </c:catAx>
+      <c:valAx>
+        <c:axId val="-2100718248"/>
+        <c:scaling>
+          <c:orientation val="minMax"/>
+          <c:max val="10000.0"/>
+          <c:min val="0.0"/>
+        </c:scaling>
+        <c:delete val="0"/>
+        <c:axPos val="l"/>
+        <c:majorGridlines>
+          <c:spPr>
+            <a:ln>
+              <a:solidFill>
+                <a:srgbClr val="E6EAE7"/>
+              </a:solidFill>
+            </a:ln>
+          </c:spPr>
+        </c:majorGridlines>
+        <c:numFmt formatCode="$#,##0;[Red]($#,##0);&quot;-&quot;" sourceLinked="0"/>
+        <c:majorTickMark val="out"/>
+        <c:minorTickMark val="none"/>
+        <c:tickLblPos val="nextTo"/>
+        <c:spPr>
+          <a:ln>
+            <a:noFill/>
+          </a:ln>
+        </c:spPr>
+        <c:txPr>
+          <a:bodyPr/>
+          <a:lstStyle/>
+          <a:p>
+            <a:pPr>
+              <a:defRPr sz="1000"/>
+            </a:pPr>
+          </a:p>
+        </c:txPr>
+        <c:crossAx val="-2101159928"/>
+        <c:crosses val="autoZero"/>
+        <c:crossBetween val="midCat"/>
+        <c:majorUnit val="2000.0"/>
+      </c:valAx>
+    </c:plotArea>
+    <c:plotVisOnly val="1"/>
+    <c:dispBlanksAs val="zero"/>
+    <c:showDLblsOverMax val="0"/>
+  </c:chart>
+  <c:txPr>
+    <a:bodyPr/>
+    <a:lstStyle/>
+    <a:p>
+      <a:pPr>
+        <a:defRPr sz="1800">
+          <a:latin typeface="Roboto"/>
+        </a:defRPr>
+      </a:pPr>
+      <a:endParaRPr/>
+    </a:p>
+  </c:txPr>
+  <c:externalData r:id="rId1">
+    <c:autoUpdate val="0"/>
+  </c:externalData>
+</c:chartSpace>
+</file>
+
+<file path=ppt/charts/chart5.xml><?xml version="1.0" encoding="utf-8"?>
+<c:chartSpace xmlns:c="http://schemas.openxmlformats.org/drawingml/2006/chart" xmlns:a="http://schemas.openxmlformats.org/drawingml/2006/main" xmlns:r="http://schemas.openxmlformats.org/officeDocument/2006/relationships">
+  <c:date1904 val="0"/>
+  <c:roundedCorners val="0"/>
+  <c:chart>
+    <c:autoTitleDeleted val="1"/>
+    <c:plotArea>
+      <c:layout>
+        <c:manualLayout>
+          <c:layoutTarget val="inner"/>
+          <c:xMode val="edge"/>
+          <c:yMode val="edge"/>
+          <c:x val="0.11"/>
+          <c:y val="0.05"/>
+          <c:w val="0.86"/>
+          <c:h val="0.8"/>
+        </c:manualLayout>
+      </c:layout>
+      <c:areaChart>
+        <c:grouping val="standard"/>
+        <c:varyColors val="0"/>
+        <c:ser>
+          <c:idx val="0"/>
+          <c:order val="0"/>
+          <c:tx>
+            <c:strRef>
+              <c:f>Sheet1!$B$1</c:f>
+              <c:strCache>
+                <c:ptCount val="1"/>
+                <c:pt idx="0">
+                  <c:v>Spend $</c:v>
+                </c:pt>
+              </c:strCache>
+            </c:strRef>
+          </c:tx>
+          <c:spPr>
+            <a:solidFill>
+              <a:srgbClr val="0E9F6E">
+                <a:alpha val="25000"/>
+              </a:srgbClr>
+            </a:solidFill>
+            <a:ln w="31750">
+              <a:solidFill>
+                <a:srgbClr val="0E9F6E"/>
+              </a:solidFill>
+            </a:ln>
+          </c:spPr>
+          <c:cat>
+            <c:strRef>
+              <c:f>Sheet1!$A$2:$A$21</c:f>
+              <c:strCache>
+                <c:ptCount val="20"/>
+                <c:pt idx="0">
+                  <c:v>Oct 24</c:v>
+                </c:pt>
+                <c:pt idx="1">
+                  <c:v>Nov 24</c:v>
+                </c:pt>
+                <c:pt idx="2">
+                  <c:v>Dec 24</c:v>
+                </c:pt>
+                <c:pt idx="3">
+                  <c:v>Jan 25</c:v>
+                </c:pt>
+                <c:pt idx="4">
+                  <c:v>Feb 25</c:v>
+                </c:pt>
+                <c:pt idx="5">
+                  <c:v>Mar 25</c:v>
+                </c:pt>
+                <c:pt idx="6">
+                  <c:v>Apr 25</c:v>
+                </c:pt>
+                <c:pt idx="7">
+                  <c:v>May 25</c:v>
+                </c:pt>
+                <c:pt idx="8">
+                  <c:v>Jun 25</c:v>
+                </c:pt>
+                <c:pt idx="9">
+                  <c:v>Jul 25</c:v>
+                </c:pt>
+                <c:pt idx="10">
+                  <c:v>Aug 25</c:v>
+                </c:pt>
+                <c:pt idx="11">
+                  <c:v>Sep 25</c:v>
+                </c:pt>
+                <c:pt idx="12">
+                  <c:v>Oct 25</c:v>
+                </c:pt>
+                <c:pt idx="13">
+                  <c:v>Nov 25</c:v>
+                </c:pt>
+                <c:pt idx="14">
+                  <c:v>Dec 25</c:v>
+                </c:pt>
+                <c:pt idx="15">
+                  <c:v>Jan 26</c:v>
+                </c:pt>
+                <c:pt idx="16">
+                  <c:v>Feb 26</c:v>
+                </c:pt>
+                <c:pt idx="17">
+                  <c:v>Mar 26</c:v>
+                </c:pt>
+                <c:pt idx="18">
+                  <c:v>Apr 26</c:v>
+                </c:pt>
+                <c:pt idx="19">
+                  <c:v>May 26</c:v>
+                </c:pt>
+              </c:strCache>
+            </c:strRef>
+          </c:cat>
+          <c:val>
+            <c:numRef>
+              <c:f>Sheet1!$B$2:$B$21</c:f>
+              <c:numCache>
+                <c:formatCode>$#,##0;[Red]($#,##0);"-"</c:formatCode>
+                <c:ptCount val="20"/>
+                <c:pt idx="0">
+                  <c:v>0</c:v>
+                </c:pt>
+                <c:pt idx="1">
+                  <c:v>0</c:v>
+                </c:pt>
+                <c:pt idx="2">
+                  <c:v>0</c:v>
+                </c:pt>
+                <c:pt idx="3">
+                  <c:v>0</c:v>
+                </c:pt>
+                <c:pt idx="4">
+                  <c:v>0</c:v>
+                </c:pt>
+                <c:pt idx="5">
+                  <c:v>0</c:v>
+                </c:pt>
+                <c:pt idx="6">
+                  <c:v>0</c:v>
+                </c:pt>
+                <c:pt idx="7">
+                  <c:v>0</c:v>
+                </c:pt>
+                <c:pt idx="8">
+                  <c:v>0</c:v>
+                </c:pt>
+                <c:pt idx="9">
+                  <c:v>0</c:v>
+                </c:pt>
+                <c:pt idx="10">
+                  <c:v>0</c:v>
+                </c:pt>
+                <c:pt idx="11">
+                  <c:v>0</c:v>
+                </c:pt>
+                <c:pt idx="12">
+                  <c:v>5160</c:v>
+                </c:pt>
+                <c:pt idx="13">
+                  <c:v>4585</c:v>
+                </c:pt>
+                <c:pt idx="14">
+                  <c:v>5221</c:v>
+                </c:pt>
+                <c:pt idx="15">
+                  <c:v>4426</c:v>
+                </c:pt>
+                <c:pt idx="16">
+                  <c:v>5408</c:v>
+                </c:pt>
+                <c:pt idx="17">
+                  <c:v>5427</c:v>
+                </c:pt>
+                <c:pt idx="18">
+                  <c:v>5509</c:v>
+                </c:pt>
+                <c:pt idx="19">
+                  <c:v>4635</c:v>
+                </c:pt>
+              </c:numCache>
+            </c:numRef>
+          </c:val>
+        </c:ser>
+        <c:dLbls>
+          <c:showLegendKey val="0"/>
+          <c:showVal val="0"/>
+          <c:showCatName val="0"/>
+          <c:showSerName val="0"/>
+          <c:showPercent val="0"/>
+          <c:showBubbleSize val="0"/>
+        </c:dLbls>
+        <c:axId val="-2101159928"/>
+        <c:axId val="-2100718248"/>
+      </c:areaChart>
+      <c:catAx>
+        <c:axId val="-2101159928"/>
+        <c:scaling>
+          <c:orientation val="minMax"/>
+        </c:scaling>
+        <c:delete val="0"/>
+        <c:axPos val="b"/>
+        <c:numFmt formatCode="General" sourceLinked="1"/>
+        <c:majorTickMark val="out"/>
+        <c:minorTickMark val="none"/>
+        <c:tickLblPos val="nextTo"/>
+        <c:txPr>
+          <a:bodyPr/>
+          <a:lstStyle/>
+          <a:p>
+            <a:pPr>
+              <a:defRPr sz="1000"/>
+            </a:pPr>
+          </a:p>
+        </c:txPr>
+        <c:crossAx val="-2100718248"/>
+        <c:crosses val="autoZero"/>
+        <c:auto val="1"/>
+        <c:lblAlgn val="ctr"/>
+        <c:lblOffset val="100"/>
+        <c:tickLblSkip val="3"/>
+        <c:noMultiLvlLbl val="0"/>
+      </c:catAx>
+      <c:valAx>
+        <c:axId val="-2100718248"/>
+        <c:scaling>
+          <c:orientation val="minMax"/>
+          <c:max val="6000.0"/>
+          <c:min val="0.0"/>
+        </c:scaling>
+        <c:delete val="0"/>
+        <c:axPos val="l"/>
+        <c:majorGridlines>
+          <c:spPr>
+            <a:ln>
+              <a:solidFill>
+                <a:srgbClr val="E6EAE7"/>
+              </a:solidFill>
+            </a:ln>
+          </c:spPr>
+        </c:majorGridlines>
+        <c:numFmt formatCode="$#,##0;[Red]($#,##0);&quot;-&quot;" sourceLinked="0"/>
+        <c:majorTickMark val="out"/>
+        <c:minorTickMark val="none"/>
+        <c:tickLblPos val="nextTo"/>
+        <c:spPr>
+          <a:ln>
+            <a:noFill/>
+          </a:ln>
+        </c:spPr>
+        <c:txPr>
+          <a:bodyPr/>
+          <a:lstStyle/>
+          <a:p>
+            <a:pPr>
+              <a:defRPr sz="1000"/>
+            </a:pPr>
+          </a:p>
+        </c:txPr>
+        <c:crossAx val="-2101159928"/>
+        <c:crosses val="autoZero"/>
+        <c:crossBetween val="midCat"/>
+        <c:majorUnit val="2000.0"/>
+      </c:valAx>
+    </c:plotArea>
+    <c:plotVisOnly val="1"/>
+    <c:dispBlanksAs val="zero"/>
+    <c:showDLblsOverMax val="0"/>
+  </c:chart>
+  <c:txPr>
+    <a:bodyPr/>
+    <a:lstStyle/>
+    <a:p>
+      <a:pPr>
+        <a:defRPr sz="1800">
+          <a:latin typeface="Roboto"/>
+        </a:defRPr>
+      </a:pPr>
+      <a:endParaRPr/>
+    </a:p>
+  </c:txPr>
+  <c:externalData r:id="rId1">
+    <c:autoUpdate val="0"/>
+  </c:externalData>
+</c:chartSpace>
+</file>
+
+<file path=ppt/charts/chart6.xml><?xml version="1.0" encoding="utf-8"?>
+<c:chartSpace xmlns:c="http://schemas.openxmlformats.org/drawingml/2006/chart" xmlns:a="http://schemas.openxmlformats.org/drawingml/2006/main" xmlns:r="http://schemas.openxmlformats.org/officeDocument/2006/relationships">
+  <c:date1904 val="0"/>
+  <c:roundedCorners val="0"/>
+  <c:chart>
+    <c:autoTitleDeleted val="1"/>
+    <c:plotArea>
+      <c:layout>
+        <c:manualLayout>
+          <c:layoutTarget val="inner"/>
+          <c:xMode val="edge"/>
+          <c:yMode val="edge"/>
+          <c:x val="0.11"/>
+          <c:y val="0.05"/>
+          <c:w val="0.86"/>
+          <c:h val="0.8"/>
+        </c:manualLayout>
+      </c:layout>
+      <c:areaChart>
+        <c:grouping val="standard"/>
+        <c:varyColors val="0"/>
+        <c:ser>
+          <c:idx val="0"/>
+          <c:order val="0"/>
+          <c:tx>
+            <c:strRef>
+              <c:f>Sheet1!$B$1</c:f>
+              <c:strCache>
+                <c:ptCount val="1"/>
+                <c:pt idx="0">
+                  <c:v>Spend $</c:v>
+                </c:pt>
+              </c:strCache>
+            </c:strRef>
+          </c:tx>
+          <c:spPr>
+            <a:solidFill>
+              <a:srgbClr val="0E9F6E">
+                <a:alpha val="25000"/>
+              </a:srgbClr>
+            </a:solidFill>
+            <a:ln w="31750">
+              <a:solidFill>
+                <a:srgbClr val="0E9F6E"/>
+              </a:solidFill>
+            </a:ln>
+          </c:spPr>
+          <c:cat>
+            <c:strRef>
+              <c:f>Sheet1!$A$2:$A$21</c:f>
+              <c:strCache>
+                <c:ptCount val="20"/>
+                <c:pt idx="0">
+                  <c:v>Oct 24</c:v>
+                </c:pt>
+                <c:pt idx="1">
+                  <c:v>Nov 24</c:v>
+                </c:pt>
+                <c:pt idx="2">
+                  <c:v>Dec 24</c:v>
+                </c:pt>
+                <c:pt idx="3">
+                  <c:v>Jan 25</c:v>
+                </c:pt>
+                <c:pt idx="4">
+                  <c:v>Feb 25</c:v>
+                </c:pt>
+                <c:pt idx="5">
+                  <c:v>Mar 25</c:v>
+                </c:pt>
+                <c:pt idx="6">
+                  <c:v>Apr 25</c:v>
+                </c:pt>
+                <c:pt idx="7">
+                  <c:v>May 25</c:v>
+                </c:pt>
+                <c:pt idx="8">
+                  <c:v>Jun 25</c:v>
+                </c:pt>
+                <c:pt idx="9">
+                  <c:v>Jul 25</c:v>
+                </c:pt>
+                <c:pt idx="10">
+                  <c:v>Aug 25</c:v>
+                </c:pt>
+                <c:pt idx="11">
+                  <c:v>Sep 25</c:v>
+                </c:pt>
+                <c:pt idx="12">
+                  <c:v>Oct 25</c:v>
+                </c:pt>
+                <c:pt idx="13">
+                  <c:v>Nov 25</c:v>
+                </c:pt>
+                <c:pt idx="14">
+                  <c:v>Dec 25</c:v>
+                </c:pt>
+                <c:pt idx="15">
+                  <c:v>Jan 26</c:v>
+                </c:pt>
+                <c:pt idx="16">
+                  <c:v>Feb 26</c:v>
+                </c:pt>
+                <c:pt idx="17">
+                  <c:v>Mar 26</c:v>
+                </c:pt>
+                <c:pt idx="18">
+                  <c:v>Apr 26</c:v>
+                </c:pt>
+                <c:pt idx="19">
+                  <c:v>May 26</c:v>
+                </c:pt>
+              </c:strCache>
+            </c:strRef>
+          </c:cat>
+          <c:val>
+            <c:numRef>
+              <c:f>Sheet1!$B$2:$B$21</c:f>
+              <c:numCache>
+                <c:formatCode>$#,##0;[Red]($#,##0);"-"</c:formatCode>
+                <c:ptCount val="20"/>
+                <c:pt idx="0">
+                  <c:v>0</c:v>
+                </c:pt>
+                <c:pt idx="1">
+                  <c:v>0</c:v>
+                </c:pt>
+                <c:pt idx="2">
+                  <c:v>0</c:v>
+                </c:pt>
+                <c:pt idx="3">
+                  <c:v>0</c:v>
+                </c:pt>
+                <c:pt idx="4">
+                  <c:v>0</c:v>
+                </c:pt>
+                <c:pt idx="5">
+                  <c:v>0</c:v>
+                </c:pt>
+                <c:pt idx="6">
+                  <c:v>0</c:v>
+                </c:pt>
+                <c:pt idx="7">
+                  <c:v>0</c:v>
+                </c:pt>
+                <c:pt idx="8">
+                  <c:v>0</c:v>
+                </c:pt>
+                <c:pt idx="9">
+                  <c:v>3400</c:v>
+                </c:pt>
+                <c:pt idx="10">
+                  <c:v>3500</c:v>
+                </c:pt>
+                <c:pt idx="11">
+                  <c:v>4000</c:v>
+                </c:pt>
+                <c:pt idx="12">
+                  <c:v>3200</c:v>
+                </c:pt>
+                <c:pt idx="13">
+                  <c:v>3100</c:v>
+                </c:pt>
+                <c:pt idx="14">
+                  <c:v>3800</c:v>
+                </c:pt>
+                <c:pt idx="15">
+                  <c:v>3700</c:v>
+                </c:pt>
+                <c:pt idx="16">
+                  <c:v>3100</c:v>
+                </c:pt>
+                <c:pt idx="17">
+                  <c:v>4100</c:v>
+                </c:pt>
+                <c:pt idx="18">
+                  <c:v>3900</c:v>
+                </c:pt>
+                <c:pt idx="19">
+                  <c:v>3500</c:v>
+                </c:pt>
+              </c:numCache>
+            </c:numRef>
+          </c:val>
+        </c:ser>
+        <c:dLbls>
+          <c:showLegendKey val="0"/>
+          <c:showVal val="0"/>
+          <c:showCatName val="0"/>
+          <c:showSerName val="0"/>
+          <c:showPercent val="0"/>
+          <c:showBubbleSize val="0"/>
+        </c:dLbls>
+        <c:axId val="-2101159928"/>
+        <c:axId val="-2100718248"/>
+      </c:areaChart>
+      <c:catAx>
+        <c:axId val="-2101159928"/>
+        <c:scaling>
+          <c:orientation val="minMax"/>
+        </c:scaling>
+        <c:delete val="0"/>
+        <c:axPos val="b"/>
+        <c:numFmt formatCode="General" sourceLinked="1"/>
+        <c:majorTickMark val="out"/>
+        <c:minorTickMark val="none"/>
+        <c:tickLblPos val="nextTo"/>
+        <c:txPr>
+          <a:bodyPr/>
+          <a:lstStyle/>
+          <a:p>
+            <a:pPr>
+              <a:defRPr sz="1000"/>
+            </a:pPr>
+          </a:p>
+        </c:txPr>
+        <c:crossAx val="-2100718248"/>
+        <c:crosses val="autoZero"/>
+        <c:auto val="1"/>
+        <c:lblAlgn val="ctr"/>
+        <c:lblOffset val="100"/>
+        <c:tickLblSkip val="3"/>
+        <c:noMultiLvlLbl val="0"/>
+      </c:catAx>
+      <c:valAx>
+        <c:axId val="-2100718248"/>
+        <c:scaling>
+          <c:orientation val="minMax"/>
+          <c:max val="5000.0"/>
+          <c:min val="0.0"/>
+        </c:scaling>
+        <c:delete val="0"/>
+        <c:axPos val="l"/>
+        <c:majorGridlines>
+          <c:spPr>
+            <a:ln>
+              <a:solidFill>
+                <a:srgbClr val="E6EAE7"/>
+              </a:solidFill>
+            </a:ln>
+          </c:spPr>
+        </c:majorGridlines>
+        <c:numFmt formatCode="$#,##0;[Red]($#,##0);&quot;-&quot;" sourceLinked="0"/>
+        <c:majorTickMark val="out"/>
+        <c:minorTickMark val="none"/>
+        <c:tickLblPos val="nextTo"/>
+        <c:spPr>
+          <a:ln>
+            <a:noFill/>
+          </a:ln>
+        </c:spPr>
+        <c:txPr>
+          <a:bodyPr/>
+          <a:lstStyle/>
+          <a:p>
+            <a:pPr>
+              <a:defRPr sz="1000"/>
+            </a:pPr>
+          </a:p>
+        </c:txPr>
+        <c:crossAx val="-2101159928"/>
+        <c:crosses val="autoZero"/>
+        <c:crossBetween val="midCat"/>
+        <c:majorUnit val="1000.0"/>
+      </c:valAx>
+    </c:plotArea>
+    <c:plotVisOnly val="1"/>
+    <c:dispBlanksAs val="zero"/>
+    <c:showDLblsOverMax val="0"/>
+  </c:chart>
+  <c:txPr>
+    <a:bodyPr/>
+    <a:lstStyle/>
+    <a:p>
+      <a:pPr>
+        <a:defRPr sz="1800">
+          <a:latin typeface="Roboto"/>
+        </a:defRPr>
+      </a:pPr>
+      <a:endParaRPr/>
+    </a:p>
+  </c:txPr>
+  <c:externalData r:id="rId1">
+    <c:autoUpdate val="0"/>
+  </c:externalData>
+</c:chartSpace>
+</file>
+
+<file path=ppt/charts/chart7.xml><?xml version="1.0" encoding="utf-8"?>
+<c:chartSpace xmlns:c="http://schemas.openxmlformats.org/drawingml/2006/chart" xmlns:a="http://schemas.openxmlformats.org/drawingml/2006/main" xmlns:r="http://schemas.openxmlformats.org/officeDocument/2006/relationships">
+  <c:date1904 val="0"/>
+  <c:roundedCorners val="0"/>
+  <c:chart>
+    <c:autoTitleDeleted val="1"/>
+    <c:plotArea>
+      <c:layout>
+        <c:manualLayout>
+          <c:layoutTarget val="inner"/>
+          <c:xMode val="edge"/>
+          <c:yMode val="edge"/>
+          <c:x val="0.11"/>
+          <c:y val="0.05"/>
+          <c:w val="0.86"/>
+          <c:h val="0.8"/>
+        </c:manualLayout>
+      </c:layout>
+      <c:areaChart>
+        <c:grouping val="standard"/>
+        <c:varyColors val="0"/>
+        <c:ser>
+          <c:idx val="0"/>
+          <c:order val="0"/>
+          <c:tx>
+            <c:strRef>
+              <c:f>Sheet1!$B$1</c:f>
+              <c:strCache>
+                <c:ptCount val="1"/>
+                <c:pt idx="0">
+                  <c:v>Spend $</c:v>
+                </c:pt>
+              </c:strCache>
+            </c:strRef>
+          </c:tx>
+          <c:spPr>
+            <a:solidFill>
+              <a:srgbClr val="0E9F6E">
+                <a:alpha val="25000"/>
+              </a:srgbClr>
+            </a:solidFill>
+            <a:ln w="31750">
+              <a:solidFill>
+                <a:srgbClr val="0E9F6E"/>
+              </a:solidFill>
+            </a:ln>
+          </c:spPr>
+          <c:cat>
+            <c:strRef>
+              <c:f>Sheet1!$A$2:$A$21</c:f>
+              <c:strCache>
+                <c:ptCount val="20"/>
+                <c:pt idx="0">
+                  <c:v>Oct 24</c:v>
+                </c:pt>
+                <c:pt idx="1">
+                  <c:v>Nov 24</c:v>
+                </c:pt>
+                <c:pt idx="2">
+                  <c:v>Dec 24</c:v>
+                </c:pt>
+                <c:pt idx="3">
+                  <c:v>Jan 25</c:v>
+                </c:pt>
+                <c:pt idx="4">
+                  <c:v>Feb 25</c:v>
+                </c:pt>
+                <c:pt idx="5">
+                  <c:v>Mar 25</c:v>
+                </c:pt>
+                <c:pt idx="6">
+                  <c:v>Apr 25</c:v>
+                </c:pt>
+                <c:pt idx="7">
+                  <c:v>May 25</c:v>
+                </c:pt>
+                <c:pt idx="8">
+                  <c:v>Jun 25</c:v>
+                </c:pt>
+                <c:pt idx="9">
+                  <c:v>Jul 25</c:v>
+                </c:pt>
+                <c:pt idx="10">
+                  <c:v>Aug 25</c:v>
+                </c:pt>
+                <c:pt idx="11">
+                  <c:v>Sep 25</c:v>
+                </c:pt>
+                <c:pt idx="12">
+                  <c:v>Oct 25</c:v>
+                </c:pt>
+                <c:pt idx="13">
+                  <c:v>Nov 25</c:v>
+                </c:pt>
+                <c:pt idx="14">
+                  <c:v>Dec 25</c:v>
+                </c:pt>
+                <c:pt idx="15">
+                  <c:v>Jan 26</c:v>
+                </c:pt>
+                <c:pt idx="16">
+                  <c:v>Feb 26</c:v>
+                </c:pt>
+                <c:pt idx="17">
+                  <c:v>Mar 26</c:v>
+                </c:pt>
+                <c:pt idx="18">
+                  <c:v>Apr 26</c:v>
+                </c:pt>
+                <c:pt idx="19">
+                  <c:v>May 26</c:v>
+                </c:pt>
+              </c:strCache>
+            </c:strRef>
+          </c:cat>
+          <c:val>
+            <c:numRef>
+              <c:f>Sheet1!$B$2:$B$21</c:f>
+              <c:numCache>
+                <c:formatCode>$#,##0;[Red]($#,##0);"-"</c:formatCode>
+                <c:ptCount val="20"/>
+                <c:pt idx="0">
+                  <c:v>0</c:v>
+                </c:pt>
+                <c:pt idx="1">
+                  <c:v>0</c:v>
+                </c:pt>
+                <c:pt idx="2">
+                  <c:v>0</c:v>
+                </c:pt>
+                <c:pt idx="3">
+                  <c:v>0</c:v>
+                </c:pt>
+                <c:pt idx="4">
+                  <c:v>0</c:v>
+                </c:pt>
+                <c:pt idx="5">
+                  <c:v>0</c:v>
+                </c:pt>
+                <c:pt idx="6">
+                  <c:v>0</c:v>
+                </c:pt>
+                <c:pt idx="7">
+                  <c:v>0</c:v>
+                </c:pt>
+                <c:pt idx="8">
+                  <c:v>0</c:v>
+                </c:pt>
+                <c:pt idx="9">
+                  <c:v>0</c:v>
+                </c:pt>
+                <c:pt idx="10">
+                  <c:v>0</c:v>
+                </c:pt>
+                <c:pt idx="11">
+                  <c:v>0</c:v>
+                </c:pt>
+                <c:pt idx="12">
+                  <c:v>0</c:v>
+                </c:pt>
+                <c:pt idx="13">
+                  <c:v>0</c:v>
+                </c:pt>
+                <c:pt idx="14">
+                  <c:v>0</c:v>
+                </c:pt>
+                <c:pt idx="15">
+                  <c:v>0</c:v>
+                </c:pt>
+                <c:pt idx="16">
+                  <c:v>0</c:v>
+                </c:pt>
+                <c:pt idx="17">
+                  <c:v>2932</c:v>
+                </c:pt>
+                <c:pt idx="18">
+                  <c:v>3555</c:v>
+                </c:pt>
+                <c:pt idx="19">
+                  <c:v>2649</c:v>
+                </c:pt>
+              </c:numCache>
+            </c:numRef>
+          </c:val>
+        </c:ser>
+        <c:dLbls>
+          <c:showLegendKey val="0"/>
+          <c:showVal val="0"/>
+          <c:showCatName val="0"/>
+          <c:showSerName val="0"/>
+          <c:showPercent val="0"/>
+          <c:showBubbleSize val="0"/>
+        </c:dLbls>
+        <c:axId val="-2101159928"/>
+        <c:axId val="-2100718248"/>
+      </c:areaChart>
+      <c:catAx>
+        <c:axId val="-2101159928"/>
+        <c:scaling>
+          <c:orientation val="minMax"/>
+        </c:scaling>
+        <c:delete val="0"/>
+        <c:axPos val="b"/>
+        <c:numFmt formatCode="General" sourceLinked="1"/>
+        <c:majorTickMark val="out"/>
+        <c:minorTickMark val="none"/>
+        <c:tickLblPos val="nextTo"/>
+        <c:txPr>
+          <a:bodyPr/>
+          <a:lstStyle/>
+          <a:p>
+            <a:pPr>
+              <a:defRPr sz="1000"/>
+            </a:pPr>
+          </a:p>
+        </c:txPr>
+        <c:crossAx val="-2100718248"/>
+        <c:crosses val="autoZero"/>
+        <c:auto val="1"/>
+        <c:lblAlgn val="ctr"/>
+        <c:lblOffset val="100"/>
+        <c:tickLblSkip val="3"/>
+        <c:noMultiLvlLbl val="0"/>
+      </c:catAx>
+      <c:valAx>
+        <c:axId val="-2100718248"/>
+        <c:scaling>
+          <c:orientation val="minMax"/>
+          <c:max val="4000.0"/>
+          <c:min val="0.0"/>
+        </c:scaling>
+        <c:delete val="0"/>
+        <c:axPos val="l"/>
+        <c:majorGridlines>
+          <c:spPr>
+            <a:ln>
+              <a:solidFill>
+                <a:srgbClr val="E6EAE7"/>
+              </a:solidFill>
+            </a:ln>
+          </c:spPr>
+        </c:majorGridlines>
+        <c:numFmt formatCode="$#,##0;[Red]($#,##0);&quot;-&quot;" sourceLinked="0"/>
+        <c:majorTickMark val="out"/>
+        <c:minorTickMark val="none"/>
+        <c:tickLblPos val="nextTo"/>
+        <c:spPr>
+          <a:ln>
+            <a:noFill/>
+          </a:ln>
+        </c:spPr>
+        <c:txPr>
+          <a:bodyPr/>
+          <a:lstStyle/>
+          <a:p>
+            <a:pPr>
+              <a:defRPr sz="1000"/>
+            </a:pPr>
+          </a:p>
+        </c:txPr>
+        <c:crossAx val="-2101159928"/>
+        <c:crosses val="autoZero"/>
+        <c:crossBetween val="midCat"/>
+        <c:majorUnit val="1000.0"/>
+      </c:valAx>
+    </c:plotArea>
+    <c:plotVisOnly val="1"/>
+    <c:dispBlanksAs val="zero"/>
+    <c:showDLblsOverMax val="0"/>
+  </c:chart>
+  <c:txPr>
+    <a:bodyPr/>
+    <a:lstStyle/>
+    <a:p>
+      <a:pPr>
+        <a:defRPr sz="1800">
+          <a:latin typeface="Roboto"/>
+        </a:defRPr>
+      </a:pPr>
+      <a:endParaRPr/>
+    </a:p>
+  </c:txPr>
+  <c:externalData r:id="rId1">
+    <c:autoUpdate val="0"/>
+  </c:externalData>
+</c:chartSpace>
+</file>
+
+<file path=ppt/notesMasters/notesMaster1.xml><?xml version="1.0" encoding="utf-8"?>
+<p:notesMaster xmlns:a="http://schemas.openxmlformats.org/drawingml/2006/main" xmlns:p="http://schemas.openxmlformats.org/presentationml/2006/main" xmlns:r="http://schemas.openxmlformats.org/officeDocument/2006/relationships">
+  <p:cSld>
+    <p:bg>
+      <p:bgRef idx="1001">
+        <a:schemeClr val="bg1"/>
+      </p:bgRef>
+    </p:bg>
+    <p:spTree>
+      <p:nvGrpSpPr>
+        <p:cNvPr id="1" name=""/>
+        <p:cNvGrpSpPr/>
+        <p:nvPr/>
+      </p:nvGrpSpPr>
+      <p:grpSpPr>
+        <a:xfrm>
+          <a:off x="0" y="0"/>
+          <a:ext cx="0" cy="0"/>
+          <a:chOff x="0" y="0"/>
+          <a:chExt cx="0" cy="0"/>
+        </a:xfrm>
+      </p:grpSpPr>
+      <p:sp>
+        <p:nvSpPr>
+          <p:cNvPr id="2" name="Header Placeholder 1"/>
+          <p:cNvSpPr>
+            <a:spLocks noGrp="1"/>
+          </p:cNvSpPr>
+          <p:nvPr>
+            <p:ph type="hdr" sz="quarter"/>
+          </p:nvPr>
+        </p:nvSpPr>
+        <p:spPr>
+          <a:xfrm>
+            <a:off x="0" y="0"/>
+            <a:ext cx="2971800" cy="457200"/>
+          </a:xfrm>
+          <a:prstGeom prst="rect">
+            <a:avLst/>
+          </a:prstGeom>
+        </p:spPr>
+        <p:txBody>
+          <a:bodyPr vert="horz" lIns="91440" tIns="45720" rIns="91440" bIns="45720" rtlCol="0"/>
+          <a:lstStyle>
+            <a:lvl1pPr algn="l">
+              <a:defRPr sz="1200"/>
+            </a:lvl1pPr>
+          </a:lstStyle>
+          <a:p>
+            <a:endParaRPr lang="en-US"/>
+          </a:p>
+        </p:txBody>
+      </p:sp>
+      <p:sp>
+        <p:nvSpPr>
+          <p:cNvPr id="3" name="Date Placeholder 2"/>
+          <p:cNvSpPr>
+            <a:spLocks noGrp="1"/>
+          </p:cNvSpPr>
+          <p:nvPr>
+            <p:ph type="dt" idx="1"/>
+          </p:nvPr>
+        </p:nvSpPr>
+        <p:spPr>
+          <a:xfrm>
+            <a:off x="3884613" y="0"/>
+            <a:ext cx="2971800" cy="457200"/>
+          </a:xfrm>
+          <a:prstGeom prst="rect">
+            <a:avLst/>
+          </a:prstGeom>
+        </p:spPr>
+        <p:txBody>
+          <a:bodyPr vert="horz" lIns="91440" tIns="45720" rIns="91440" bIns="45720" rtlCol="0"/>
+          <a:lstStyle>
+            <a:lvl1pPr algn="r">
+              <a:defRPr sz="1200"/>
+            </a:lvl1pPr>
+          </a:lstStyle>
+          <a:p>
+            <a:fld id="{0F89C1C7-3DCD-1040-A9CF-14679D8B5DDD}" type="datetimeFigureOut">
+              <a:rPr lang="en-US" smtClean="0"/>
+              <a:t>10/17/16</a:t>
+            </a:fld>
+            <a:endParaRPr lang="en-US"/>
+          </a:p>
+        </p:txBody>
+      </p:sp>
+      <p:sp>
+        <p:nvSpPr>
+          <p:cNvPr id="4" name="Slide Image Placeholder 3"/>
+          <p:cNvSpPr>
+            <a:spLocks noGrp="1" noRot="1" noChangeAspect="1"/>
+          </p:cNvSpPr>
+          <p:nvPr>
+            <p:ph type="sldImg" idx="2"/>
+          </p:nvPr>
+        </p:nvSpPr>
+        <p:spPr>
+          <a:xfrm>
+            <a:off x="1143000" y="685800"/>
+            <a:ext cx="4572000" cy="3429000"/>
+          </a:xfrm>
+          <a:prstGeom prst="rect">
+            <a:avLst/>
+          </a:prstGeom>
+          <a:noFill/>
+          <a:ln w="12700">
+            <a:solidFill>
+              <a:prstClr val="black"/>
+            </a:solidFill>
+          </a:ln>
+        </p:spPr>
+        <p:txBody>
+          <a:bodyPr vert="horz" lIns="91440" tIns="45720" rIns="91440" bIns="45720" rtlCol="0" anchor="ctr"/>
+          <a:lstStyle/>
+          <a:p>
+            <a:endParaRPr lang="en-US"/>
+          </a:p>
+        </p:txBody>
+      </p:sp>
+      <p:sp>
+        <p:nvSpPr>
+          <p:cNvPr id="5" name="Notes Placeholder 4"/>
+          <p:cNvSpPr>
+            <a:spLocks noGrp="1"/>
+          </p:cNvSpPr>
+          <p:nvPr>
+            <p:ph type="body" sz="quarter" idx="3"/>
+          </p:nvPr>
+        </p:nvSpPr>
+        <p:spPr>
+          <a:xfrm>
+            <a:off x="685800" y="4343400"/>
+            <a:ext cx="5486400" cy="4114800"/>
+          </a:xfrm>
+          <a:prstGeom prst="rect">
+            <a:avLst/>
+          </a:prstGeom>
+        </p:spPr>
+        <p:txBody>
+          <a:bodyPr vert="horz" lIns="91440" tIns="45720" rIns="91440" bIns="45720" rtlCol="0"/>
+          <a:lstStyle/>
+          <a:p>
+            <a:pPr lvl="0"/>
+            <a:r>
+              <a:rPr lang="en-US" smtClean="0"/>
+              <a:t>Click to edit Master text styles</a:t>
+            </a:r>
+          </a:p>
+          <a:p>
+            <a:pPr lvl="1"/>
+            <a:r>
+              <a:rPr lang="en-US" smtClean="0"/>
+              <a:t>Second level</a:t>
+            </a:r>
+          </a:p>
+          <a:p>
+            <a:pPr lvl="2"/>
+            <a:r>
+              <a:rPr lang="en-US" smtClean="0"/>
+              <a:t>Third level</a:t>
+            </a:r>
+          </a:p>
+          <a:p>
+            <a:pPr lvl="3"/>
+            <a:r>
+              <a:rPr lang="en-US" smtClean="0"/>
+              <a:t>Fourth level</a:t>
+            </a:r>
+          </a:p>
+          <a:p>
+            <a:pPr lvl="4"/>
+            <a:r>
+              <a:rPr lang="en-US" smtClean="0"/>
+              <a:t>Fifth level</a:t>
+            </a:r>
+            <a:endParaRPr lang="en-US"/>
+          </a:p>
+        </p:txBody>
+      </p:sp>
+      <p:sp>
+        <p:nvSpPr>
+          <p:cNvPr id="6" name="Footer Placeholder 5"/>
+          <p:cNvSpPr>
+            <a:spLocks noGrp="1"/>
+          </p:cNvSpPr>
+          <p:nvPr>
+            <p:ph type="ftr" sz="quarter" idx="4"/>
+          </p:nvPr>
+        </p:nvSpPr>
+        <p:spPr>
+          <a:xfrm>
+            <a:off x="0" y="8685213"/>
+            <a:ext cx="2971800" cy="457200"/>
+          </a:xfrm>
+          <a:prstGeom prst="rect">
+            <a:avLst/>
+          </a:prstGeom>
+        </p:spPr>
+        <p:txBody>
+          <a:bodyPr vert="horz" lIns="91440" tIns="45720" rIns="91440" bIns="45720" rtlCol="0" anchor="b"/>
+          <a:lstStyle>
+            <a:lvl1pPr algn="l">
+              <a:defRPr sz="1200"/>
+            </a:lvl1pPr>
+          </a:lstStyle>
+          <a:p>
+            <a:endParaRPr lang="en-US"/>
+          </a:p>
+        </p:txBody>
+      </p:sp>
+      <p:sp>
+        <p:nvSpPr>
+          <p:cNvPr id="7" name="Slide Number Placeholder 6"/>
+          <p:cNvSpPr>
+            <a:spLocks noGrp="1"/>
+          </p:cNvSpPr>
+          <p:nvPr>
+            <p:ph type="sldNum" sz="quarter" idx="5"/>
+          </p:nvPr>
+        </p:nvSpPr>
+        <p:spPr>
+          <a:xfrm>
+            <a:off x="3884613" y="8685213"/>
+            <a:ext cx="2971800" cy="457200"/>
+          </a:xfrm>
+          <a:prstGeom prst="rect">
+            <a:avLst/>
+          </a:prstGeom>
+        </p:spPr>
+        <p:txBody>
+          <a:bodyPr vert="horz" lIns="91440" tIns="45720" rIns="91440" bIns="45720" rtlCol="0" anchor="b"/>
+          <a:lstStyle>
+            <a:lvl1pPr algn="r">
+              <a:defRPr sz="1200"/>
+            </a:lvl1pPr>
+          </a:lstStyle>
+          <a:p>
+            <a:fld id="{BB5E49A5-4136-284D-997B-48E1D791AD67}" type="slidenum">
+              <a:rPr lang="en-US" smtClean="0"/>
+              <a:t>‹#›</a:t>
+            </a:fld>
+            <a:endParaRPr lang="en-US"/>
+          </a:p>
+        </p:txBody>
+      </p:sp>
+    </p:spTree>
+    <p:extLst>
+      <p:ext uri="{BB962C8B-B14F-4D97-AF65-F5344CB8AC3E}">
+        <p14:creationId xmlns:p14="http://schemas.microsoft.com/office/powerpoint/2010/main" val="2623252185"/>
+      </p:ext>
+    </p:extLst>
+  </p:cSld>
+  <p:clrMap bg1="lt1" tx1="dk1" bg2="lt2" tx2="dk2" accent1="accent1" accent2="accent2" accent3="accent3" accent4="accent4" accent5="accent5" accent6="accent6" hlink="hlink" folHlink="folHlink"/>
+  <p:notesStyle>
+    <a:lvl1pPr marL="0" algn="l" defTabSz="457200" rtl="0" eaLnBrk="1" latinLnBrk="0" hangingPunct="1">
+      <a:defRPr sz="1200" kern="1200">
+        <a:solidFill>
+          <a:schemeClr val="tx1"/>
+        </a:solidFill>
+        <a:latin typeface="+mn-lt"/>
+        <a:ea typeface="+mn-ea"/>
+        <a:cs typeface="+mn-cs"/>
+      </a:defRPr>
+    </a:lvl1pPr>
+    <a:lvl2pPr marL="457200" algn="l" defTabSz="457200" rtl="0" eaLnBrk="1" latinLnBrk="0" hangingPunct="1">
+      <a:defRPr sz="1200" kern="1200">
+        <a:solidFill>
+          <a:schemeClr val="tx1"/>
+        </a:solidFill>
+        <a:latin typeface="+mn-lt"/>
+        <a:ea typeface="+mn-ea"/>
+        <a:cs typeface="+mn-cs"/>
+      </a:defRPr>
+    </a:lvl2pPr>
+    <a:lvl3pPr marL="914400" algn="l" defTabSz="457200" rtl="0" eaLnBrk="1" latinLnBrk="0" hangingPunct="1">
+      <a:defRPr sz="1200" kern="1200">
+        <a:solidFill>
+          <a:schemeClr val="tx1"/>
+        </a:solidFill>
+        <a:latin typeface="+mn-lt"/>
+        <a:ea typeface="+mn-ea"/>
+        <a:cs typeface="+mn-cs"/>
+      </a:defRPr>
+    </a:lvl3pPr>
+    <a:lvl4pPr marL="1371600" algn="l" defTabSz="457200" rtl="0" eaLnBrk="1" latinLnBrk="0" hangingPunct="1">
+      <a:defRPr sz="1200" kern="1200">
+        <a:solidFill>
+          <a:schemeClr val="tx1"/>
+        </a:solidFill>
+        <a:latin typeface="+mn-lt"/>
+        <a:ea typeface="+mn-ea"/>
+        <a:cs typeface="+mn-cs"/>
+      </a:defRPr>
+    </a:lvl4pPr>
+    <a:lvl5pPr marL="1828800" algn="l" defTabSz="457200" rtl="0" eaLnBrk="1" latinLnBrk="0" hangingPunct="1">
+      <a:defRPr sz="1200" kern="1200">
+        <a:solidFill>
+          <a:schemeClr val="tx1"/>
+        </a:solidFill>
+        <a:latin typeface="+mn-lt"/>
+        <a:ea typeface="+mn-ea"/>
+        <a:cs typeface="+mn-cs"/>
+      </a:defRPr>
+    </a:lvl5pPr>
+    <a:lvl6pPr marL="2286000" algn="l" defTabSz="457200" rtl="0" eaLnBrk="1" latinLnBrk="0" hangingPunct="1">
+      <a:defRPr sz="1200" kern="1200">
+        <a:solidFill>
+          <a:schemeClr val="tx1"/>
+        </a:solidFill>
+        <a:latin typeface="+mn-lt"/>
+        <a:ea typeface="+mn-ea"/>
+        <a:cs typeface="+mn-cs"/>
+      </a:defRPr>
+    </a:lvl6pPr>
+    <a:lvl7pPr marL="2743200" algn="l" defTabSz="457200" rtl="0" eaLnBrk="1" latinLnBrk="0" hangingPunct="1">
+      <a:defRPr sz="1200" kern="1200">
+        <a:solidFill>
+          <a:schemeClr val="tx1"/>
+        </a:solidFill>
+        <a:latin typeface="+mn-lt"/>
+        <a:ea typeface="+mn-ea"/>
+        <a:cs typeface="+mn-cs"/>
+      </a:defRPr>
+    </a:lvl7pPr>
+    <a:lvl8pPr marL="3200400" algn="l" defTabSz="457200" rtl="0" eaLnBrk="1" latinLnBrk="0" hangingPunct="1">
+      <a:defRPr sz="1200" kern="1200">
+        <a:solidFill>
+          <a:schemeClr val="tx1"/>
+        </a:solidFill>
+        <a:latin typeface="+mn-lt"/>
+        <a:ea typeface="+mn-ea"/>
+        <a:cs typeface="+mn-cs"/>
+      </a:defRPr>
+    </a:lvl8pPr>
+    <a:lvl9pPr marL="3657600" algn="l" defTabSz="457200" rtl="0" eaLnBrk="1" latinLnBrk="0" hangingPunct="1">
+      <a:defRPr sz="1200" kern="1200">
+        <a:solidFill>
+          <a:schemeClr val="tx1"/>
+        </a:solidFill>
+        <a:latin typeface="+mn-lt"/>
+        <a:ea typeface="+mn-ea"/>
+        <a:cs typeface="+mn-cs"/>
+      </a:defRPr>
+    </a:lvl9pPr>
+  </p:notesStyle>
+</p:notesMaster>
+</file>
+
+<file path=ppt/notesSlides/notesSlide1.xml><?xml version="1.0" encoding="utf-8"?>
+<p:notes xmlns:a="http://schemas.openxmlformats.org/drawingml/2006/main" xmlns:p="http://schemas.openxmlformats.org/presentationml/2006/main" xmlns:r="http://schemas.openxmlformats.org/officeDocument/2006/relationships">
+  <p:cSld>
+    <p:spTree>
+      <p:nvGrpSpPr>
+        <p:cNvPr id="1" name=""/>
+        <p:cNvGrpSpPr/>
+        <p:nvPr/>
+      </p:nvGrpSpPr>
+      <p:grpSpPr>
+        <a:xfrm>
+          <a:off x="0" y="0"/>
+          <a:ext cx="0" cy="0"/>
+          <a:chOff x="0" y="0"/>
+          <a:chExt cx="0" cy="0"/>
+        </a:xfrm>
+      </p:grpSpPr>
+      <p:sp>
+        <p:nvSpPr>
+          <p:cNvPr id="2" name="Slide Image Placeholder 1"/>
+          <p:cNvSpPr>
+            <a:spLocks noGrp="1"/>
+          </p:cNvSpPr>
+          <p:nvPr>
+            <p:ph type="sldImg" idx="2"/>
+          </p:nvPr>
+        </p:nvSpPr>
+        <p:spPr/>
+      </p:sp>
+      <p:sp>
+        <p:nvSpPr>
+          <p:cNvPr id="3" name="Notes Placeholder 2"/>
+          <p:cNvSpPr>
+            <a:spLocks noGrp="1"/>
+          </p:cNvSpPr>
+          <p:nvPr>
+            <p:ph type="body" idx="3" sz="quarter"/>
+          </p:nvPr>
+        </p:nvSpPr>
+        <p:spPr/>
+        <p:txBody>
+          <a:bodyPr/>
+          <a:lstStyle/>
+          <a:p>
+            <a:r>
+              <a:t>What does each program really cost?. Sample Community Services Ltd. Period: May 2026. Each program's full cost: what its grant pays for, plus its fair share of the costs no single grant covers (untied program costs and administration, shared by grant spending). Pick a program and every chart and note follows it.</a:t>
+            </a:r>
+          </a:p>
+        </p:txBody>
+      </p:sp>
+      <p:sp>
+        <p:nvSpPr>
+          <p:cNvPr id="4" name="Slide Number Placeholder 3"/>
+          <p:cNvSpPr>
+            <a:spLocks noGrp="1"/>
+          </p:cNvSpPr>
+          <p:nvPr>
+            <p:ph type="sldNum" idx="5" sz="quarter"/>
+          </p:nvPr>
+        </p:nvSpPr>
+        <p:spPr/>
+      </p:sp>
+    </p:spTree>
+  </p:cSld>
+  <p:clrMapOvr>
+    <a:masterClrMapping/>
+  </p:clrMapOvr>
+</p:notes>
+</file>
+
+<file path=ppt/notesSlides/notesSlide2.xml><?xml version="1.0" encoding="utf-8"?>
+<p:notes xmlns:a="http://schemas.openxmlformats.org/drawingml/2006/main" xmlns:p="http://schemas.openxmlformats.org/presentationml/2006/main" xmlns:r="http://schemas.openxmlformats.org/officeDocument/2006/relationships">
+  <p:cSld>
+    <p:spTree>
+      <p:nvGrpSpPr>
+        <p:cNvPr id="1" name=""/>
+        <p:cNvGrpSpPr/>
+        <p:nvPr/>
+      </p:nvGrpSpPr>
+      <p:grpSpPr>
+        <a:xfrm>
+          <a:off x="0" y="0"/>
+          <a:ext cx="0" cy="0"/>
+          <a:chOff x="0" y="0"/>
+          <a:chExt cx="0" cy="0"/>
+        </a:xfrm>
+      </p:grpSpPr>
+      <p:sp>
+        <p:nvSpPr>
+          <p:cNvPr id="2" name="Slide Image Placeholder 1"/>
+          <p:cNvSpPr>
+            <a:spLocks noGrp="1"/>
+          </p:cNvSpPr>
+          <p:nvPr>
+            <p:ph type="sldImg" idx="2"/>
+          </p:nvPr>
+        </p:nvSpPr>
+        <p:spPr/>
+      </p:sp>
+      <p:sp>
+        <p:nvSpPr>
+          <p:cNvPr id="3" name="Notes Placeholder 2"/>
+          <p:cNvSpPr>
+            <a:spLocks noGrp="1"/>
+          </p:cNvSpPr>
+          <p:nvPr>
+            <p:ph type="body" idx="3" sz="quarter"/>
+          </p:nvPr>
+        </p:nvSpPr>
+        <p:spPr/>
+        <p:txBody>
+          <a:bodyPr/>
+          <a:lstStyle/>
+          <a:p>
+            <a:r>
+              <a:t>All programs. Housing support is the biggest program: $54,240 in May once its share of untied program costs and administration is added to $31,337 of grant spending. Shared costs add 73.1% on top of grant spending across all programs. The full cost (not just the grant line) is the number for renewal applications, where the funder lets you recover a share of overheads. Pick a program above to see it on its own.</a:t>
+            </a:r>
+          </a:p>
+        </p:txBody>
+      </p:sp>
+      <p:sp>
+        <p:nvSpPr>
+          <p:cNvPr id="4" name="Slide Number Placeholder 3"/>
+          <p:cNvSpPr>
+            <a:spLocks noGrp="1"/>
+          </p:cNvSpPr>
+          <p:nvPr>
+            <p:ph type="sldNum" idx="5" sz="quarter"/>
+          </p:nvPr>
+        </p:nvSpPr>
+        <p:spPr/>
+      </p:sp>
+    </p:spTree>
+  </p:cSld>
+  <p:clrMapOvr>
+    <a:masterClrMapping/>
+  </p:clrMapOvr>
+</p:notes>
+</file>
+
+<file path=ppt/notesSlides/notesSlide3.xml><?xml version="1.0" encoding="utf-8"?>
+<p:notes xmlns:a="http://schemas.openxmlformats.org/drawingml/2006/main" xmlns:p="http://schemas.openxmlformats.org/presentationml/2006/main" xmlns:r="http://schemas.openxmlformats.org/officeDocument/2006/relationships">
+  <p:cSld>
+    <p:spTree>
+      <p:nvGrpSpPr>
+        <p:cNvPr id="1" name=""/>
+        <p:cNvGrpSpPr/>
+        <p:nvPr/>
+      </p:nvGrpSpPr>
+      <p:grpSpPr>
+        <a:xfrm>
+          <a:off x="0" y="0"/>
+          <a:ext cx="0" cy="0"/>
+          <a:chOff x="0" y="0"/>
+          <a:chExt cx="0" cy="0"/>
+        </a:xfrm>
+      </p:grpSpPr>
+      <p:sp>
+        <p:nvSpPr>
+          <p:cNvPr id="2" name="Slide Image Placeholder 1"/>
+          <p:cNvSpPr>
+            <a:spLocks noGrp="1"/>
+          </p:cNvSpPr>
+          <p:nvPr>
+            <p:ph type="sldImg" idx="2"/>
+          </p:nvPr>
+        </p:nvSpPr>
+        <p:spPr/>
+      </p:sp>
+      <p:sp>
+        <p:nvSpPr>
+          <p:cNvPr id="3" name="Notes Placeholder 2"/>
+          <p:cNvSpPr>
+            <a:spLocks noGrp="1"/>
+          </p:cNvSpPr>
+          <p:nvPr>
+            <p:ph type="body" idx="3" sz="quarter"/>
+          </p:nvPr>
+        </p:nvSpPr>
+        <p:spPr/>
+        <p:txBody>
+          <a:bodyPr/>
+          <a:lstStyle/>
+          <a:p>
+            <a:r>
+              <a:t>Housing support. Housing support cost $54,240 in full in May: $31,337 paid by the State Housing Program grant, and $22,903 of shared costs no grant covers. It has spent 91.3% of its budget to date, with $223,091 left and 7 months to go. The full cost is $54,240 a month; $22,903 of it is shared cost the grant doesn't pay for. Worth asking for as much of it as the funder allows at renewal.</a:t>
+            </a:r>
+          </a:p>
+        </p:txBody>
+      </p:sp>
+      <p:sp>
+        <p:nvSpPr>
+          <p:cNvPr id="4" name="Slide Number Placeholder 3"/>
+          <p:cNvSpPr>
+            <a:spLocks noGrp="1"/>
+          </p:cNvSpPr>
+          <p:nvPr>
+            <p:ph type="sldNum" idx="5" sz="quarter"/>
+          </p:nvPr>
+        </p:nvSpPr>
+        <p:spPr/>
+      </p:sp>
+    </p:spTree>
+  </p:cSld>
+  <p:clrMapOvr>
+    <a:masterClrMapping/>
+  </p:clrMapOvr>
+</p:notes>
+</file>
+
+<file path=ppt/notesSlides/notesSlide4.xml><?xml version="1.0" encoding="utf-8"?>
+<p:notes xmlns:a="http://schemas.openxmlformats.org/drawingml/2006/main" xmlns:p="http://schemas.openxmlformats.org/presentationml/2006/main" xmlns:r="http://schemas.openxmlformats.org/officeDocument/2006/relationships">
+  <p:cSld>
+    <p:spTree>
+      <p:nvGrpSpPr>
+        <p:cNvPr id="1" name=""/>
+        <p:cNvGrpSpPr/>
+        <p:nvPr/>
+      </p:nvGrpSpPr>
+      <p:grpSpPr>
+        <a:xfrm>
+          <a:off x="0" y="0"/>
+          <a:ext cx="0" cy="0"/>
+          <a:chOff x="0" y="0"/>
+          <a:chExt cx="0" cy="0"/>
+        </a:xfrm>
+      </p:grpSpPr>
+      <p:sp>
+        <p:nvSpPr>
+          <p:cNvPr id="2" name="Slide Image Placeholder 1"/>
+          <p:cNvSpPr>
+            <a:spLocks noGrp="1"/>
+          </p:cNvSpPr>
+          <p:nvPr>
+            <p:ph type="sldImg" idx="2"/>
+          </p:nvPr>
+        </p:nvSpPr>
+        <p:spPr/>
+      </p:sp>
+      <p:sp>
+        <p:nvSpPr>
+          <p:cNvPr id="3" name="Notes Placeholder 2"/>
+          <p:cNvSpPr>
+            <a:spLocks noGrp="1"/>
+          </p:cNvSpPr>
+          <p:nvPr>
+            <p:ph type="body" idx="3" sz="quarter"/>
+          </p:nvPr>
+        </p:nvSpPr>
+        <p:spPr/>
+        <p:txBody>
+          <a:bodyPr/>
+          <a:lstStyle/>
+          <a:p>
+            <a:r>
+              <a:t>Youth outreach. Youth outreach cost $36,649 in full in May: $21,174 paid by the State Department of Families grant, and $15,475 of shared costs no grant covers. It has spent 99.3% of its budget to date, with $261,640 left and 13 months to go. The full cost is $36,649 a month; $15,475 of it is shared cost the grant doesn't pay for. Worth asking for as much of it as the funder allows at renewal.</a:t>
+            </a:r>
+          </a:p>
+        </p:txBody>
+      </p:sp>
+      <p:sp>
+        <p:nvSpPr>
+          <p:cNvPr id="4" name="Slide Number Placeholder 3"/>
+          <p:cNvSpPr>
+            <a:spLocks noGrp="1"/>
+          </p:cNvSpPr>
+          <p:nvPr>
+            <p:ph type="sldNum" idx="5" sz="quarter"/>
+          </p:nvPr>
+        </p:nvSpPr>
+        <p:spPr/>
+      </p:sp>
+    </p:spTree>
+  </p:cSld>
+  <p:clrMapOvr>
+    <a:masterClrMapping/>
+  </p:clrMapOvr>
+</p:notes>
+</file>
+
+<file path=ppt/notesSlides/notesSlide5.xml><?xml version="1.0" encoding="utf-8"?>
+<p:notes xmlns:a="http://schemas.openxmlformats.org/drawingml/2006/main" xmlns:p="http://schemas.openxmlformats.org/presentationml/2006/main" xmlns:r="http://schemas.openxmlformats.org/officeDocument/2006/relationships">
+  <p:cSld>
+    <p:spTree>
+      <p:nvGrpSpPr>
+        <p:cNvPr id="1" name=""/>
+        <p:cNvGrpSpPr/>
+        <p:nvPr/>
+      </p:nvGrpSpPr>
+      <p:grpSpPr>
+        <a:xfrm>
+          <a:off x="0" y="0"/>
+          <a:ext cx="0" cy="0"/>
+          <a:chOff x="0" y="0"/>
+          <a:chExt cx="0" cy="0"/>
+        </a:xfrm>
+      </p:grpSpPr>
+      <p:sp>
+        <p:nvSpPr>
+          <p:cNvPr id="2" name="Slide Image Placeholder 1"/>
+          <p:cNvSpPr>
+            <a:spLocks noGrp="1"/>
+          </p:cNvSpPr>
+          <p:nvPr>
+            <p:ph type="sldImg" idx="2"/>
+          </p:nvPr>
+        </p:nvSpPr>
+        <p:spPr/>
+      </p:sp>
+      <p:sp>
+        <p:nvSpPr>
+          <p:cNvPr id="3" name="Notes Placeholder 2"/>
+          <p:cNvSpPr>
+            <a:spLocks noGrp="1"/>
+          </p:cNvSpPr>
+          <p:nvPr>
+            <p:ph type="body" idx="3" sz="quarter"/>
+          </p:nvPr>
+        </p:nvSpPr>
+        <p:spPr/>
+        <p:txBody>
+          <a:bodyPr/>
+          <a:lstStyle/>
+          <a:p>
+            <a:r>
+              <a:t>Mental health first aid. Mental health first aid cost $15,491 in full in May: $8,950 paid by the Federal health program grant, and $6,541 of shared costs no grant covers. It has spent 92.7% of its budget to date, with $101,466 left and 10 months to go. The full cost is $15,491 a month; $6,541 of it is shared cost the grant doesn't pay for. Worth asking for as much of it as the funder allows at renewal.</a:t>
+            </a:r>
+          </a:p>
+        </p:txBody>
+      </p:sp>
+      <p:sp>
+        <p:nvSpPr>
+          <p:cNvPr id="4" name="Slide Number Placeholder 3"/>
+          <p:cNvSpPr>
+            <a:spLocks noGrp="1"/>
+          </p:cNvSpPr>
+          <p:nvPr>
+            <p:ph type="sldNum" idx="5" sz="quarter"/>
+          </p:nvPr>
+        </p:nvSpPr>
+        <p:spPr/>
+      </p:sp>
+    </p:spTree>
+  </p:cSld>
+  <p:clrMapOvr>
+    <a:masterClrMapping/>
+  </p:clrMapOvr>
+</p:notes>
+</file>
+
+<file path=ppt/notesSlides/notesSlide6.xml><?xml version="1.0" encoding="utf-8"?>
+<p:notes xmlns:a="http://schemas.openxmlformats.org/drawingml/2006/main" xmlns:p="http://schemas.openxmlformats.org/presentationml/2006/main" xmlns:r="http://schemas.openxmlformats.org/officeDocument/2006/relationships">
+  <p:cSld>
+    <p:spTree>
+      <p:nvGrpSpPr>
+        <p:cNvPr id="1" name=""/>
+        <p:cNvGrpSpPr/>
+        <p:nvPr/>
+      </p:nvGrpSpPr>
+      <p:grpSpPr>
+        <a:xfrm>
+          <a:off x="0" y="0"/>
+          <a:ext cx="0" cy="0"/>
+          <a:chOff x="0" y="0"/>
+          <a:chExt cx="0" cy="0"/>
+        </a:xfrm>
+      </p:grpSpPr>
+      <p:sp>
+        <p:nvSpPr>
+          <p:cNvPr id="2" name="Slide Image Placeholder 1"/>
+          <p:cNvSpPr>
+            <a:spLocks noGrp="1"/>
+          </p:cNvSpPr>
+          <p:nvPr>
+            <p:ph type="sldImg" idx="2"/>
+          </p:nvPr>
+        </p:nvSpPr>
+        <p:spPr/>
+      </p:sp>
+      <p:sp>
+        <p:nvSpPr>
+          <p:cNvPr id="3" name="Notes Placeholder 2"/>
+          <p:cNvSpPr>
+            <a:spLocks noGrp="1"/>
+          </p:cNvSpPr>
+          <p:nvPr>
+            <p:ph type="body" idx="3" sz="quarter"/>
+          </p:nvPr>
+        </p:nvSpPr>
+        <p:spPr/>
+        <p:txBody>
+          <a:bodyPr/>
+          <a:lstStyle/>
+          <a:p>
+            <a:r>
+              <a:t>Digital literacy. Digital literacy cost $8,022 in full in May: $4,635 paid by the Philanthropic foundation grant, and $3,387 of shared costs no grant covers. It has spent 100.9% of its budget to date, with $49,629 left and 10 months to go. The full cost is $8,022 a month; $3,387 of it is shared cost the grant doesn't pay for. Worth asking for as much of it as the funder allows at renewal.</a:t>
+            </a:r>
+          </a:p>
+        </p:txBody>
+      </p:sp>
+      <p:sp>
+        <p:nvSpPr>
+          <p:cNvPr id="4" name="Slide Number Placeholder 3"/>
+          <p:cNvSpPr>
+            <a:spLocks noGrp="1"/>
+          </p:cNvSpPr>
+          <p:nvPr>
+            <p:ph type="sldNum" idx="5" sz="quarter"/>
+          </p:nvPr>
+        </p:nvSpPr>
+        <p:spPr/>
+      </p:sp>
+    </p:spTree>
+  </p:cSld>
+  <p:clrMapOvr>
+    <a:masterClrMapping/>
+  </p:clrMapOvr>
+</p:notes>
+</file>
+
+<file path=ppt/notesSlides/notesSlide7.xml><?xml version="1.0" encoding="utf-8"?>
+<p:notes xmlns:a="http://schemas.openxmlformats.org/drawingml/2006/main" xmlns:p="http://schemas.openxmlformats.org/presentationml/2006/main" xmlns:r="http://schemas.openxmlformats.org/officeDocument/2006/relationships">
+  <p:cSld>
+    <p:spTree>
+      <p:nvGrpSpPr>
+        <p:cNvPr id="1" name=""/>
+        <p:cNvGrpSpPr/>
+        <p:nvPr/>
+      </p:nvGrpSpPr>
+      <p:grpSpPr>
+        <a:xfrm>
+          <a:off x="0" y="0"/>
+          <a:ext cx="0" cy="0"/>
+          <a:chOff x="0" y="0"/>
+          <a:chExt cx="0" cy="0"/>
+        </a:xfrm>
+      </p:grpSpPr>
+      <p:sp>
+        <p:nvSpPr>
+          <p:cNvPr id="2" name="Slide Image Placeholder 1"/>
+          <p:cNvSpPr>
+            <a:spLocks noGrp="1"/>
+          </p:cNvSpPr>
+          <p:nvPr>
+            <p:ph type="sldImg" idx="2"/>
+          </p:nvPr>
+        </p:nvSpPr>
+        <p:spPr/>
+      </p:sp>
+      <p:sp>
+        <p:nvSpPr>
+          <p:cNvPr id="3" name="Notes Placeholder 2"/>
+          <p:cNvSpPr>
+            <a:spLocks noGrp="1"/>
+          </p:cNvSpPr>
+          <p:nvPr>
+            <p:ph type="body" idx="3" sz="quarter"/>
+          </p:nvPr>
+        </p:nvSpPr>
+        <p:spPr/>
+        <p:txBody>
+          <a:bodyPr/>
+          <a:lstStyle/>
+          <a:p>
+            <a:r>
+              <a:t>Community meals (2025-26). Community meals (2025-26) cost $6,058 in full in May: $3,500 paid by the Local council community grant grant, and $2,558 of shared costs no grant covers. It has spent 97.4% of its budget to date, with $4,700 left and 1 months to go. The full cost is $6,058 a month; $2,558 of it is shared cost the grant doesn't pay for. Worth asking for as much of it as the funder allows at renewal.</a:t>
+            </a:r>
+          </a:p>
+        </p:txBody>
+      </p:sp>
+      <p:sp>
+        <p:nvSpPr>
+          <p:cNvPr id="4" name="Slide Number Placeholder 3"/>
+          <p:cNvSpPr>
+            <a:spLocks noGrp="1"/>
+          </p:cNvSpPr>
+          <p:nvPr>
+            <p:ph type="sldNum" idx="5" sz="quarter"/>
+          </p:nvPr>
+        </p:nvSpPr>
+        <p:spPr/>
+      </p:sp>
+    </p:spTree>
+  </p:cSld>
+  <p:clrMapOvr>
+    <a:masterClrMapping/>
+  </p:clrMapOvr>
+</p:notes>
+</file>
+
+<file path=ppt/notesSlides/notesSlide8.xml><?xml version="1.0" encoding="utf-8"?>
+<p:notes xmlns:a="http://schemas.openxmlformats.org/drawingml/2006/main" xmlns:p="http://schemas.openxmlformats.org/presentationml/2006/main" xmlns:r="http://schemas.openxmlformats.org/officeDocument/2006/relationships">
+  <p:cSld>
+    <p:spTree>
+      <p:nvGrpSpPr>
+        <p:cNvPr id="1" name=""/>
+        <p:cNvGrpSpPr/>
+        <p:nvPr/>
+      </p:nvGrpSpPr>
+      <p:grpSpPr>
+        <a:xfrm>
+          <a:off x="0" y="0"/>
+          <a:ext cx="0" cy="0"/>
+          <a:chOff x="0" y="0"/>
+          <a:chExt cx="0" cy="0"/>
+        </a:xfrm>
+      </p:grpSpPr>
+      <p:sp>
+        <p:nvSpPr>
+          <p:cNvPr id="2" name="Slide Image Placeholder 1"/>
+          <p:cNvSpPr>
+            <a:spLocks noGrp="1"/>
+          </p:cNvSpPr>
+          <p:nvPr>
+            <p:ph type="sldImg" idx="2"/>
+          </p:nvPr>
+        </p:nvSpPr>
+        <p:spPr/>
+      </p:sp>
+      <p:sp>
+        <p:nvSpPr>
+          <p:cNvPr id="3" name="Notes Placeholder 2"/>
+          <p:cNvSpPr>
+            <a:spLocks noGrp="1"/>
+          </p:cNvSpPr>
+          <p:nvPr>
+            <p:ph type="body" idx="3" sz="quarter"/>
+          </p:nvPr>
+        </p:nvSpPr>
+        <p:spPr/>
+        <p:txBody>
+          <a:bodyPr/>
+          <a:lstStyle/>
+          <a:p>
+            <a:r>
+              <a:t>Volunteer coordinator. Volunteer coordinator cost $4,585 in full in May: $2,649 paid by the State volunteering grant grant, and $1,936 of shared costs no grant covers. It has spent 101.5% of its budget to date, with $26,864 left and 9 months to go. The full cost is $4,585 a month; $1,936 of it is shared cost the grant doesn't pay for. Worth asking for as much of it as the funder allows at renewal.</a:t>
+            </a:r>
+          </a:p>
+        </p:txBody>
+      </p:sp>
+      <p:sp>
+        <p:nvSpPr>
+          <p:cNvPr id="4" name="Slide Number Placeholder 3"/>
+          <p:cNvSpPr>
+            <a:spLocks noGrp="1"/>
+          </p:cNvSpPr>
+          <p:nvPr>
+            <p:ph type="sldNum" idx="5" sz="quarter"/>
+          </p:nvPr>
+        </p:nvSpPr>
+        <p:spPr/>
+      </p:sp>
+    </p:spTree>
+  </p:cSld>
+  <p:clrMapOvr>
+    <a:masterClrMapping/>
+  </p:clrMapOvr>
+</p:notes>
 </file>
 
 <file path=ppt/slideLayouts/slideLayout1.xml><?xml version="1.0" encoding="utf-8"?>
@@ -3798,7 +5961,44 @@
       <p:grpSpPr/>
       <p:sp>
         <p:nvSpPr>
-          <p:cNvPr id="2" name="Rectangle 1"/>
+          <p:cNvPr id="2" name="Title 1"/>
+          <p:cNvSpPr>
+            <a:spLocks noGrp="1"/>
+          </p:cNvSpPr>
+          <p:nvPr>
+            <p:ph type="ctrTitle"/>
+          </p:nvPr>
+        </p:nvSpPr>
+        <p:spPr>
+          <a:xfrm>
+            <a:off x="457200" y="1965960"/>
+            <a:ext cx="11277295" cy="1097280"/>
+          </a:xfrm>
+        </p:spPr>
+        <p:txBody>
+          <a:bodyPr wrap="square"/>
+          <a:lstStyle/>
+          <a:p>
+            <a:pPr algn="l">
+              <a:defRPr>
+                <a:latin typeface="Roboto"/>
+              </a:defRPr>
+            </a:pPr>
+            <a:r>
+              <a:rPr sz="3400" b="1">
+                <a:solidFill>
+                  <a:srgbClr val="25342A"/>
+                </a:solidFill>
+                <a:latin typeface="Roboto"/>
+              </a:rPr>
+              <a:t>What does each program really cost?</a:t>
+            </a:r>
+          </a:p>
+        </p:txBody>
+      </p:sp>
+      <p:sp>
+        <p:nvSpPr>
+          <p:cNvPr id="3" name="Rectangle 2"/>
           <p:cNvSpPr/>
           <p:nvPr/>
         </p:nvSpPr>
@@ -3854,7 +6054,7 @@
       </p:sp>
       <p:sp>
         <p:nvSpPr>
-          <p:cNvPr id="3" name="TextBox 2"/>
+          <p:cNvPr id="4" name="TextBox 3"/>
           <p:cNvSpPr txBox="1"/>
           <p:nvPr/>
         </p:nvSpPr>
@@ -3869,7 +6069,7 @@
           <a:noFill/>
         </p:spPr>
         <p:txBody>
-          <a:bodyPr wrap="square">
+          <a:bodyPr wrap="square" lIns="45720" rIns="45720">
             <a:spAutoFit/>
           </a:bodyPr>
           <a:lstStyle/>
@@ -3893,7 +6093,7 @@
       </p:sp>
       <p:sp>
         <p:nvSpPr>
-          <p:cNvPr id="4" name="TextBox 3"/>
+          <p:cNvPr id="5" name="TextBox 4"/>
           <p:cNvSpPr txBox="1"/>
           <p:nvPr/>
         </p:nvSpPr>
@@ -3908,7 +6108,7 @@
           <a:noFill/>
         </p:spPr>
         <p:txBody>
-          <a:bodyPr wrap="square">
+          <a:bodyPr wrap="square" lIns="45720" rIns="45720">
             <a:spAutoFit/>
           </a:bodyPr>
           <a:lstStyle/>
@@ -3932,14 +6132,14 @@
       </p:sp>
       <p:sp>
         <p:nvSpPr>
-          <p:cNvPr id="5" name="TextBox 4"/>
+          <p:cNvPr id="6" name="TextBox 5"/>
           <p:cNvSpPr txBox="1"/>
           <p:nvPr/>
         </p:nvSpPr>
         <p:spPr>
           <a:xfrm>
-            <a:off x="457200" y="2011680"/>
-            <a:ext cx="11247120" cy="1097280"/>
+            <a:off x="457200" y="3154680"/>
+            <a:ext cx="11277295" cy="457200"/>
           </a:xfrm>
           <a:prstGeom prst="rect">
             <a:avLst/>
@@ -3947,7 +6147,7 @@
           <a:noFill/>
         </p:spPr>
         <p:txBody>
-          <a:bodyPr wrap="square">
+          <a:bodyPr wrap="square" lIns="45720" rIns="45720">
             <a:spAutoFit/>
           </a:bodyPr>
           <a:lstStyle/>
@@ -3958,27 +6158,27 @@
               </a:defRPr>
             </a:pPr>
             <a:r>
-              <a:rPr sz="3400" b="1">
+              <a:rPr sz="1600" b="0">
                 <a:solidFill>
-                  <a:srgbClr val="25342A"/>
+                  <a:srgbClr val="5F6F63"/>
                 </a:solidFill>
                 <a:latin typeface="Roboto"/>
               </a:rPr>
-              <a:t>What does each program really cost?</a:t>
-            </a:r>
-          </a:p>
-        </p:txBody>
-      </p:sp>
-      <p:sp>
-        <p:nvSpPr>
-          <p:cNvPr id="6" name="TextBox 5"/>
+              <a:t>Sample Community Services Ltd</a:t>
+            </a:r>
+          </a:p>
+        </p:txBody>
+      </p:sp>
+      <p:sp>
+        <p:nvSpPr>
+          <p:cNvPr id="7" name="TextBox 6"/>
           <p:cNvSpPr txBox="1"/>
           <p:nvPr/>
         </p:nvSpPr>
         <p:spPr>
           <a:xfrm>
-            <a:off x="457200" y="3154680"/>
-            <a:ext cx="11247120" cy="457200"/>
+            <a:off x="457200" y="3703320"/>
+            <a:ext cx="11277295" cy="535940"/>
           </a:xfrm>
           <a:prstGeom prst="rect">
             <a:avLst/>
@@ -3986,7 +6186,7 @@
           <a:noFill/>
         </p:spPr>
         <p:txBody>
-          <a:bodyPr wrap="square">
+          <a:bodyPr wrap="square" lIns="45720" rIns="45720">
             <a:spAutoFit/>
           </a:bodyPr>
           <a:lstStyle/>
@@ -3997,27 +6197,27 @@
               </a:defRPr>
             </a:pPr>
             <a:r>
-              <a:rPr sz="1600" b="0">
+              <a:rPr sz="1400" b="0">
                 <a:solidFill>
-                  <a:srgbClr val="5F6F63"/>
+                  <a:srgbClr val="25342A"/>
                 </a:solidFill>
                 <a:latin typeface="Roboto"/>
               </a:rPr>
-              <a:t>Sample Community Services Ltd</a:t>
-            </a:r>
-          </a:p>
-        </p:txBody>
-      </p:sp>
-      <p:sp>
-        <p:nvSpPr>
-          <p:cNvPr id="7" name="TextBox 6"/>
+              <a:t>Period: May 2026. Each program's full cost: what its grant pays for, plus its fair share of the costs no single grant covers (untied program costs and administration, shared by grant spending). Pick a program and every chart and note follows it.</a:t>
+            </a:r>
+          </a:p>
+        </p:txBody>
+      </p:sp>
+      <p:sp>
+        <p:nvSpPr>
+          <p:cNvPr id="8" name="TextBox 7"/>
           <p:cNvSpPr txBox="1"/>
           <p:nvPr/>
         </p:nvSpPr>
         <p:spPr>
           <a:xfrm>
-            <a:off x="457200" y="3703320"/>
-            <a:ext cx="11247120" cy="1097280"/>
+            <a:off x="457200" y="4330700"/>
+            <a:ext cx="11277295" cy="1097280"/>
           </a:xfrm>
           <a:prstGeom prst="rect">
             <a:avLst/>
@@ -4025,7 +6225,7 @@
           <a:noFill/>
         </p:spPr>
         <p:txBody>
-          <a:bodyPr wrap="square">
+          <a:bodyPr wrap="square" lIns="45720" rIns="45720">
             <a:spAutoFit/>
           </a:bodyPr>
           <a:lstStyle/>
@@ -4036,27 +6236,75 @@
               </a:defRPr>
             </a:pPr>
             <a:r>
-              <a:rPr sz="1400" b="0">
+              <a:rPr sz="1100" b="0">
                 <a:solidFill>
-                  <a:srgbClr val="25342A"/>
+                  <a:srgbClr val="5F6F63"/>
                 </a:solidFill>
                 <a:latin typeface="Roboto"/>
               </a:rPr>
-              <a:t>Period: May 2026. Each program's full cost: what its grant pays for, plus its fair share of the costs no single grant covers (untied program costs and administration, shared by grant spending). Pick a program and every chart and note follows it.</a:t>
-            </a:r>
-          </a:p>
-        </p:txBody>
-      </p:sp>
-      <p:sp>
-        <p:nvSpPr>
-          <p:cNvPr id="8" name="TextBox 7"/>
+              <a:t>How final is this data?</a:t>
+            </a:r>
+          </a:p>
+          <a:p>
+            <a:pPr>
+              <a:defRPr>
+                <a:latin typeface="Roboto"/>
+              </a:defRPr>
+            </a:pPr>
+            <a:r>
+              <a:rPr sz="1100" b="0">
+                <a:solidFill>
+                  <a:srgbClr val="5F6F63"/>
+                </a:solidFill>
+                <a:latin typeface="Roboto"/>
+              </a:rPr>
+              <a:t>April 2026: Locked. April 2026 is locked (closed 5 May 2026). These numbers won't change.</a:t>
+            </a:r>
+          </a:p>
+          <a:p>
+            <a:pPr>
+              <a:defRPr>
+                <a:latin typeface="Roboto"/>
+              </a:defRPr>
+            </a:pPr>
+            <a:r>
+              <a:rPr sz="1100" b="0">
+                <a:solidFill>
+                  <a:srgbClr val="5F6F63"/>
+                </a:solidFill>
+                <a:latin typeface="Roboto"/>
+              </a:rPr>
+              <a:t>May 2026: Locked. May 2026 is locked (closed 2 Jun 2026). These numbers won't change.</a:t>
+            </a:r>
+          </a:p>
+          <a:p>
+            <a:pPr>
+              <a:defRPr>
+                <a:latin typeface="Roboto"/>
+              </a:defRPr>
+            </a:pPr>
+            <a:r>
+              <a:rPr sz="1100" b="0">
+                <a:solidFill>
+                  <a:srgbClr val="5F6F63"/>
+                </a:solidFill>
+                <a:latin typeface="Roboto"/>
+              </a:rPr>
+              <a:t>October 2026: Incomplete. October 2026 is still in progress: figures to 6 Oct only.</a:t>
+            </a:r>
+          </a:p>
+        </p:txBody>
+      </p:sp>
+      <p:sp>
+        <p:nvSpPr>
+          <p:cNvPr id="9" name="TextBox 8"/>
           <p:cNvSpPr txBox="1"/>
           <p:nvPr/>
         </p:nvSpPr>
         <p:spPr>
           <a:xfrm>
-            <a:off x="457200" y="4937760"/>
-            <a:ext cx="11247120" cy="1097280"/>
+            <a:off x="457200" y="6492240"/>
+            <a:ext cx="2926080" cy="274320"/>
           </a:xfrm>
           <a:prstGeom prst="rect">
             <a:avLst/>
@@ -4064,7 +6312,7 @@
           <a:noFill/>
         </p:spPr>
         <p:txBody>
-          <a:bodyPr wrap="square">
+          <a:bodyPr wrap="square" lIns="45720" rIns="45720">
             <a:spAutoFit/>
           </a:bodyPr>
           <a:lstStyle/>
@@ -4075,75 +6323,27 @@
               </a:defRPr>
             </a:pPr>
             <a:r>
-              <a:rPr sz="1100" b="0">
+              <a:rPr sz="900" b="0">
                 <a:solidFill>
                   <a:srgbClr val="5F6F63"/>
                 </a:solidFill>
                 <a:latin typeface="Roboto"/>
               </a:rPr>
-              <a:t>How final is this data?</a:t>
-            </a:r>
-          </a:p>
-          <a:p>
-            <a:pPr>
-              <a:defRPr>
-                <a:latin typeface="Roboto"/>
-              </a:defRPr>
-            </a:pPr>
-            <a:r>
-              <a:rPr sz="1100" b="0">
-                <a:solidFill>
-                  <a:srgbClr val="5F6F63"/>
-                </a:solidFill>
-                <a:latin typeface="Roboto"/>
-              </a:rPr>
-              <a:t>April 2026: Locked. April 2026 is locked (closed 5 May 2026). These numbers won't change.</a:t>
-            </a:r>
-          </a:p>
-          <a:p>
-            <a:pPr>
-              <a:defRPr>
-                <a:latin typeface="Roboto"/>
-              </a:defRPr>
-            </a:pPr>
-            <a:r>
-              <a:rPr sz="1100" b="0">
-                <a:solidFill>
-                  <a:srgbClr val="5F6F63"/>
-                </a:solidFill>
-                <a:latin typeface="Roboto"/>
-              </a:rPr>
-              <a:t>May 2026: Locked. May 2026 is locked (closed 2 Jun 2026). These numbers won't change.</a:t>
-            </a:r>
-          </a:p>
-          <a:p>
-            <a:pPr>
-              <a:defRPr>
-                <a:latin typeface="Roboto"/>
-              </a:defRPr>
-            </a:pPr>
-            <a:r>
-              <a:rPr sz="1100" b="0">
-                <a:solidFill>
-                  <a:srgbClr val="5F6F63"/>
-                </a:solidFill>
-                <a:latin typeface="Roboto"/>
-              </a:rPr>
-              <a:t>October 2026: Incomplete. October 2026 is still in progress: figures to 6 Oct only.</a:t>
-            </a:r>
-          </a:p>
-        </p:txBody>
-      </p:sp>
-      <p:sp>
-        <p:nvSpPr>
-          <p:cNvPr id="9" name="TextBox 8"/>
+              <a:t>program-cost.pptx</a:t>
+            </a:r>
+          </a:p>
+        </p:txBody>
+      </p:sp>
+      <p:sp>
+        <p:nvSpPr>
+          <p:cNvPr id="10" name="TextBox 9"/>
           <p:cNvSpPr txBox="1"/>
           <p:nvPr/>
         </p:nvSpPr>
         <p:spPr>
           <a:xfrm>
-            <a:off x="457200" y="6492240"/>
-            <a:ext cx="3657600" cy="274320"/>
+            <a:off x="3108960" y="6492240"/>
+            <a:ext cx="5943600" cy="274320"/>
           </a:xfrm>
           <a:prstGeom prst="rect">
             <a:avLst/>
@@ -4151,12 +6351,12 @@
           <a:noFill/>
         </p:spPr>
         <p:txBody>
-          <a:bodyPr wrap="square">
+          <a:bodyPr wrap="square" lIns="45720" rIns="45720">
             <a:spAutoFit/>
           </a:bodyPr>
           <a:lstStyle/>
           <a:p>
-            <a:pPr>
+            <a:pPr algn="ctr">
               <a:defRPr>
                 <a:latin typeface="Roboto"/>
               </a:defRPr>
@@ -4168,21 +6368,21 @@
                 </a:solidFill>
                 <a:latin typeface="Roboto"/>
               </a:rPr>
-              <a:t>program-cost.pptx</a:t>
-            </a:r>
-          </a:p>
-        </p:txBody>
-      </p:sp>
-      <p:sp>
-        <p:nvSpPr>
-          <p:cNvPr id="10" name="TextBox 9"/>
+              <a:t>Data retrieved 2pm, Tue 6 Oct 2026 · Generated 8 Oct 2026, 9:35am · Sample data · Made with Python (python-pptx)</a:t>
+            </a:r>
+          </a:p>
+        </p:txBody>
+      </p:sp>
+      <p:sp>
+        <p:nvSpPr>
+          <p:cNvPr id="11" name="TextBox 10"/>
           <p:cNvSpPr txBox="1"/>
           <p:nvPr/>
         </p:nvSpPr>
         <p:spPr>
           <a:xfrm>
-            <a:off x="4297680" y="6492240"/>
-            <a:ext cx="3657600" cy="274320"/>
+            <a:off x="8503920" y="6492240"/>
+            <a:ext cx="3200400" cy="274320"/>
           </a:xfrm>
           <a:prstGeom prst="rect">
             <a:avLst/>
@@ -4190,12 +6390,12 @@
           <a:noFill/>
         </p:spPr>
         <p:txBody>
-          <a:bodyPr wrap="square">
+          <a:bodyPr wrap="square" lIns="45720" rIns="45720">
             <a:spAutoFit/>
           </a:bodyPr>
           <a:lstStyle/>
           <a:p>
-            <a:pPr algn="ctr">
+            <a:pPr algn="r">
               <a:defRPr>
                 <a:latin typeface="Roboto"/>
               </a:defRPr>
@@ -4207,877 +6407,7 @@
                 </a:solidFill>
                 <a:latin typeface="Roboto"/>
               </a:rPr>
-              <a:t>Data retrieved 2pm, Tue 6 Oct 2026 · Sample data</a:t>
-            </a:r>
-          </a:p>
-        </p:txBody>
-      </p:sp>
-      <p:sp>
-        <p:nvSpPr>
-          <p:cNvPr id="11" name="TextBox 10"/>
-          <p:cNvSpPr txBox="1"/>
-          <p:nvPr/>
-        </p:nvSpPr>
-        <p:spPr>
-          <a:xfrm>
-            <a:off x="8503920" y="6492240"/>
-            <a:ext cx="3200400" cy="274320"/>
-          </a:xfrm>
-          <a:prstGeom prst="rect">
-            <a:avLst/>
-          </a:prstGeom>
-          <a:noFill/>
-        </p:spPr>
-        <p:txBody>
-          <a:bodyPr wrap="square">
-            <a:spAutoFit/>
-          </a:bodyPr>
-          <a:lstStyle/>
-          <a:p>
-            <a:pPr algn="r">
-              <a:defRPr>
-                <a:latin typeface="Roboto"/>
-              </a:defRPr>
-            </a:pPr>
-            <a:r>
-              <a:rPr sz="900" b="0">
-                <a:solidFill>
-                  <a:srgbClr val="5F6F63"/>
-                </a:solidFill>
-                <a:latin typeface="Roboto"/>
-              </a:rPr>
-              <a:t>Slide 1 of 11</a:t>
-            </a:r>
-          </a:p>
-        </p:txBody>
-      </p:sp>
-    </p:spTree>
-  </p:cSld>
-  <p:clrMapOvr>
-    <a:masterClrMapping/>
-  </p:clrMapOvr>
-</p:sld>
-</file>
-
-<file path=ppt/slides/slide10.xml><?xml version="1.0" encoding="utf-8"?>
-<p:sld xmlns:a="http://schemas.openxmlformats.org/drawingml/2006/main" xmlns:p="http://schemas.openxmlformats.org/presentationml/2006/main" xmlns:r="http://schemas.openxmlformats.org/officeDocument/2006/relationships">
-  <p:cSld>
-    <p:spTree>
-      <p:nvGrpSpPr>
-        <p:cNvPr id="1" name=""/>
-        <p:cNvGrpSpPr/>
-        <p:nvPr/>
-      </p:nvGrpSpPr>
-      <p:grpSpPr/>
-      <p:sp>
-        <p:nvSpPr>
-          <p:cNvPr id="2" name="Rectangle 1"/>
-          <p:cNvSpPr/>
-          <p:nvPr/>
-        </p:nvSpPr>
-        <p:spPr>
-          <a:xfrm>
-            <a:off x="0" y="0"/>
-            <a:ext cx="12191695" cy="73152"/>
-          </a:xfrm>
-          <a:prstGeom prst="rect">
-            <a:avLst/>
-          </a:prstGeom>
-          <a:solidFill>
-            <a:srgbClr val="2F7A5D"/>
-          </a:solidFill>
-          <a:ln>
-            <a:noFill/>
-          </a:ln>
-        </p:spPr>
-        <p:style>
-          <a:lnRef idx="1">
-            <a:schemeClr val="accent1"/>
-          </a:lnRef>
-          <a:fillRef idx="3">
-            <a:schemeClr val="accent1"/>
-          </a:fillRef>
-          <a:effectRef idx="2">
-            <a:schemeClr val="accent1"/>
-          </a:effectRef>
-          <a:fontRef idx="minor">
-            <a:schemeClr val="lt1"/>
-          </a:fontRef>
-        </p:style>
-        <p:txBody>
-          <a:bodyPr rtlCol="0" anchor="ctr"/>
-          <a:lstStyle/>
-          <a:p>
-            <a:pPr algn="ctr">
-              <a:defRPr>
-                <a:latin typeface="Roboto"/>
-              </a:defRPr>
-            </a:pPr>
-          </a:p>
-        </p:txBody>
-      </p:sp>
-      <p:sp>
-        <p:nvSpPr>
-          <p:cNvPr id="3" name="TextBox 2"/>
-          <p:cNvSpPr txBox="1"/>
-          <p:nvPr/>
-        </p:nvSpPr>
-        <p:spPr>
-          <a:xfrm>
-            <a:off x="457200" y="164592"/>
-            <a:ext cx="7315200" cy="274320"/>
-          </a:xfrm>
-          <a:prstGeom prst="rect">
-            <a:avLst/>
-          </a:prstGeom>
-          <a:noFill/>
-        </p:spPr>
-        <p:txBody>
-          <a:bodyPr wrap="square">
-            <a:spAutoFit/>
-          </a:bodyPr>
-          <a:lstStyle/>
-          <a:p>
-            <a:pPr>
-              <a:defRPr>
-                <a:latin typeface="Roboto"/>
-              </a:defRPr>
-            </a:pPr>
-            <a:r>
-              <a:rPr sz="1000" b="0">
-                <a:solidFill>
-                  <a:srgbClr val="5F6F63"/>
-                </a:solidFill>
-                <a:latin typeface="Roboto"/>
-              </a:rPr>
-              <a:t>Sample Community Services Ltd · What does each program really cost?</a:t>
-            </a:r>
-          </a:p>
-        </p:txBody>
-      </p:sp>
-      <p:sp>
-        <p:nvSpPr>
-          <p:cNvPr id="4" name="TextBox 3"/>
-          <p:cNvSpPr txBox="1"/>
-          <p:nvPr/>
-        </p:nvSpPr>
-        <p:spPr>
-          <a:xfrm>
-            <a:off x="457200" y="411480"/>
-            <a:ext cx="11247120" cy="548640"/>
-          </a:xfrm>
-          <a:prstGeom prst="rect">
-            <a:avLst/>
-          </a:prstGeom>
-          <a:noFill/>
-        </p:spPr>
-        <p:txBody>
-          <a:bodyPr wrap="square">
-            <a:spAutoFit/>
-          </a:bodyPr>
-          <a:lstStyle/>
-          <a:p>
-            <a:pPr>
-              <a:defRPr>
-                <a:latin typeface="Roboto"/>
-              </a:defRPr>
-            </a:pPr>
-            <a:r>
-              <a:rPr sz="2400" b="1">
-                <a:solidFill>
-                  <a:srgbClr val="25342A"/>
-                </a:solidFill>
-                <a:latin typeface="Roboto"/>
-              </a:rPr>
-              <a:t>What it shows · Program: Volunteer coordinator</a:t>
-            </a:r>
-          </a:p>
-        </p:txBody>
-      </p:sp>
-      <p:sp>
-        <p:nvSpPr>
-          <p:cNvPr id="5" name="Rectangle 4"/>
-          <p:cNvSpPr/>
-          <p:nvPr/>
-        </p:nvSpPr>
-        <p:spPr>
-          <a:xfrm>
-            <a:off x="457200" y="1554480"/>
-            <a:ext cx="5501487" cy="4389120"/>
-          </a:xfrm>
-          <a:prstGeom prst="rect">
-            <a:avLst/>
-          </a:prstGeom>
-          <a:solidFill>
-            <a:srgbClr val="FFFFFF"/>
-          </a:solidFill>
-          <a:ln>
-            <a:solidFill>
-              <a:srgbClr val="DCE8DC"/>
-            </a:solidFill>
-          </a:ln>
-        </p:spPr>
-        <p:style>
-          <a:lnRef idx="1">
-            <a:schemeClr val="accent1"/>
-          </a:lnRef>
-          <a:fillRef idx="3">
-            <a:schemeClr val="accent1"/>
-          </a:fillRef>
-          <a:effectRef idx="2">
-            <a:schemeClr val="accent1"/>
-          </a:effectRef>
-          <a:fontRef idx="minor">
-            <a:schemeClr val="lt1"/>
-          </a:fontRef>
-        </p:style>
-        <p:txBody>
-          <a:bodyPr rtlCol="0" anchor="ctr"/>
-          <a:lstStyle/>
-          <a:p>
-            <a:pPr algn="ctr">
-              <a:defRPr>
-                <a:latin typeface="Roboto"/>
-              </a:defRPr>
-            </a:pPr>
-          </a:p>
-        </p:txBody>
-      </p:sp>
-      <p:sp>
-        <p:nvSpPr>
-          <p:cNvPr id="6" name="TextBox 5"/>
-          <p:cNvSpPr txBox="1"/>
-          <p:nvPr/>
-        </p:nvSpPr>
-        <p:spPr>
-          <a:xfrm>
-            <a:off x="685800" y="1691640"/>
-            <a:ext cx="5044287" cy="365760"/>
-          </a:xfrm>
-          <a:prstGeom prst="rect">
-            <a:avLst/>
-          </a:prstGeom>
-          <a:noFill/>
-        </p:spPr>
-        <p:txBody>
-          <a:bodyPr wrap="square">
-            <a:spAutoFit/>
-          </a:bodyPr>
-          <a:lstStyle/>
-          <a:p>
-            <a:pPr>
-              <a:defRPr>
-                <a:latin typeface="Roboto"/>
-              </a:defRPr>
-            </a:pPr>
-            <a:r>
-              <a:rPr sz="1100" b="1">
-                <a:solidFill>
-                  <a:srgbClr val="5F6F63"/>
-                </a:solidFill>
-                <a:latin typeface="Roboto"/>
-              </a:rPr>
-              <a:t>WHAT IT SHOWS</a:t>
-            </a:r>
-          </a:p>
-        </p:txBody>
-      </p:sp>
-      <p:sp>
-        <p:nvSpPr>
-          <p:cNvPr id="7" name="TextBox 6"/>
-          <p:cNvSpPr txBox="1"/>
-          <p:nvPr/>
-        </p:nvSpPr>
-        <p:spPr>
-          <a:xfrm>
-            <a:off x="685800" y="2103120"/>
-            <a:ext cx="5044287" cy="3749039"/>
-          </a:xfrm>
-          <a:prstGeom prst="rect">
-            <a:avLst/>
-          </a:prstGeom>
-          <a:noFill/>
-        </p:spPr>
-        <p:txBody>
-          <a:bodyPr wrap="square">
-            <a:spAutoFit/>
-          </a:bodyPr>
-          <a:lstStyle/>
-          <a:p>
-            <a:pPr>
-              <a:defRPr>
-                <a:latin typeface="Roboto"/>
-              </a:defRPr>
-            </a:pPr>
-            <a:r>
-              <a:rPr sz="1600" b="0">
-                <a:solidFill>
-                  <a:srgbClr val="25342A"/>
-                </a:solidFill>
-                <a:latin typeface="Roboto"/>
-              </a:rPr>
-              <a:t>Volunteer coordinator cost $4,585 in full in May: $2,649 paid by the State volunteering grant grant, and $1,936 of shared costs no grant covers. It has spent 101.5% of its budget to date, with $26,864 left and 9 months to go.</a:t>
-            </a:r>
-          </a:p>
-        </p:txBody>
-      </p:sp>
-      <p:sp>
-        <p:nvSpPr>
-          <p:cNvPr id="8" name="Rectangle 7"/>
-          <p:cNvSpPr/>
-          <p:nvPr/>
-        </p:nvSpPr>
-        <p:spPr>
-          <a:xfrm>
-            <a:off x="6233007" y="1554480"/>
-            <a:ext cx="5501487" cy="4389120"/>
-          </a:xfrm>
-          <a:prstGeom prst="rect">
-            <a:avLst/>
-          </a:prstGeom>
-          <a:solidFill>
-            <a:srgbClr val="EEF5F0"/>
-          </a:solidFill>
-          <a:ln>
-            <a:solidFill>
-              <a:srgbClr val="DCE8DC"/>
-            </a:solidFill>
-          </a:ln>
-        </p:spPr>
-        <p:style>
-          <a:lnRef idx="1">
-            <a:schemeClr val="accent1"/>
-          </a:lnRef>
-          <a:fillRef idx="3">
-            <a:schemeClr val="accent1"/>
-          </a:fillRef>
-          <a:effectRef idx="2">
-            <a:schemeClr val="accent1"/>
-          </a:effectRef>
-          <a:fontRef idx="minor">
-            <a:schemeClr val="lt1"/>
-          </a:fontRef>
-        </p:style>
-        <p:txBody>
-          <a:bodyPr rtlCol="0" anchor="ctr"/>
-          <a:lstStyle/>
-          <a:p>
-            <a:pPr algn="ctr">
-              <a:defRPr>
-                <a:latin typeface="Roboto"/>
-              </a:defRPr>
-            </a:pPr>
-          </a:p>
-        </p:txBody>
-      </p:sp>
-      <p:sp>
-        <p:nvSpPr>
-          <p:cNvPr id="9" name="TextBox 8"/>
-          <p:cNvSpPr txBox="1"/>
-          <p:nvPr/>
-        </p:nvSpPr>
-        <p:spPr>
-          <a:xfrm>
-            <a:off x="6461607" y="1691640"/>
-            <a:ext cx="5044287" cy="365760"/>
-          </a:xfrm>
-          <a:prstGeom prst="rect">
-            <a:avLst/>
-          </a:prstGeom>
-          <a:noFill/>
-        </p:spPr>
-        <p:txBody>
-          <a:bodyPr wrap="square">
-            <a:spAutoFit/>
-          </a:bodyPr>
-          <a:lstStyle/>
-          <a:p>
-            <a:pPr>
-              <a:defRPr>
-                <a:latin typeface="Roboto"/>
-              </a:defRPr>
-            </a:pPr>
-            <a:r>
-              <a:rPr sz="1100" b="1">
-                <a:solidFill>
-                  <a:srgbClr val="5F6F63"/>
-                </a:solidFill>
-                <a:latin typeface="Roboto"/>
-              </a:rPr>
-              <a:t>WHAT YOU'D DO ABOUT IT</a:t>
-            </a:r>
-          </a:p>
-        </p:txBody>
-      </p:sp>
-      <p:sp>
-        <p:nvSpPr>
-          <p:cNvPr id="10" name="TextBox 9"/>
-          <p:cNvSpPr txBox="1"/>
-          <p:nvPr/>
-        </p:nvSpPr>
-        <p:spPr>
-          <a:xfrm>
-            <a:off x="6461607" y="2103120"/>
-            <a:ext cx="5044287" cy="3749039"/>
-          </a:xfrm>
-          <a:prstGeom prst="rect">
-            <a:avLst/>
-          </a:prstGeom>
-          <a:noFill/>
-        </p:spPr>
-        <p:txBody>
-          <a:bodyPr wrap="square">
-            <a:spAutoFit/>
-          </a:bodyPr>
-          <a:lstStyle/>
-          <a:p>
-            <a:pPr>
-              <a:defRPr>
-                <a:latin typeface="Roboto"/>
-              </a:defRPr>
-            </a:pPr>
-            <a:r>
-              <a:rPr sz="1600" b="0">
-                <a:solidFill>
-                  <a:srgbClr val="25342A"/>
-                </a:solidFill>
-                <a:latin typeface="Roboto"/>
-              </a:rPr>
-              <a:t>The full cost is $4,585 a month; $1,936 of it is shared cost the grant doesn't pay for. Worth asking for as much of it as the funder allows at renewal.</a:t>
-            </a:r>
-          </a:p>
-        </p:txBody>
-      </p:sp>
-      <p:sp>
-        <p:nvSpPr>
-          <p:cNvPr id="11" name="TextBox 10"/>
-          <p:cNvSpPr txBox="1"/>
-          <p:nvPr/>
-        </p:nvSpPr>
-        <p:spPr>
-          <a:xfrm>
-            <a:off x="457200" y="6492240"/>
-            <a:ext cx="3657600" cy="274320"/>
-          </a:xfrm>
-          <a:prstGeom prst="rect">
-            <a:avLst/>
-          </a:prstGeom>
-          <a:noFill/>
-        </p:spPr>
-        <p:txBody>
-          <a:bodyPr wrap="square">
-            <a:spAutoFit/>
-          </a:bodyPr>
-          <a:lstStyle/>
-          <a:p>
-            <a:pPr>
-              <a:defRPr>
-                <a:latin typeface="Roboto"/>
-              </a:defRPr>
-            </a:pPr>
-            <a:r>
-              <a:rPr sz="900" b="0">
-                <a:solidFill>
-                  <a:srgbClr val="5F6F63"/>
-                </a:solidFill>
-                <a:latin typeface="Roboto"/>
-              </a:rPr>
-              <a:t>program-cost.pptx</a:t>
-            </a:r>
-          </a:p>
-        </p:txBody>
-      </p:sp>
-      <p:sp>
-        <p:nvSpPr>
-          <p:cNvPr id="12" name="TextBox 11"/>
-          <p:cNvSpPr txBox="1"/>
-          <p:nvPr/>
-        </p:nvSpPr>
-        <p:spPr>
-          <a:xfrm>
-            <a:off x="4297680" y="6492240"/>
-            <a:ext cx="3657600" cy="274320"/>
-          </a:xfrm>
-          <a:prstGeom prst="rect">
-            <a:avLst/>
-          </a:prstGeom>
-          <a:noFill/>
-        </p:spPr>
-        <p:txBody>
-          <a:bodyPr wrap="square">
-            <a:spAutoFit/>
-          </a:bodyPr>
-          <a:lstStyle/>
-          <a:p>
-            <a:pPr algn="ctr">
-              <a:defRPr>
-                <a:latin typeface="Roboto"/>
-              </a:defRPr>
-            </a:pPr>
-            <a:r>
-              <a:rPr sz="900" b="0">
-                <a:solidFill>
-                  <a:srgbClr val="5F6F63"/>
-                </a:solidFill>
-                <a:latin typeface="Roboto"/>
-              </a:rPr>
-              <a:t>Data retrieved 2pm, Tue 6 Oct 2026 · Sample data</a:t>
-            </a:r>
-          </a:p>
-        </p:txBody>
-      </p:sp>
-      <p:sp>
-        <p:nvSpPr>
-          <p:cNvPr id="13" name="TextBox 12"/>
-          <p:cNvSpPr txBox="1"/>
-          <p:nvPr/>
-        </p:nvSpPr>
-        <p:spPr>
-          <a:xfrm>
-            <a:off x="8503920" y="6492240"/>
-            <a:ext cx="3200400" cy="274320"/>
-          </a:xfrm>
-          <a:prstGeom prst="rect">
-            <a:avLst/>
-          </a:prstGeom>
-          <a:noFill/>
-        </p:spPr>
-        <p:txBody>
-          <a:bodyPr wrap="square">
-            <a:spAutoFit/>
-          </a:bodyPr>
-          <a:lstStyle/>
-          <a:p>
-            <a:pPr algn="r">
-              <a:defRPr>
-                <a:latin typeface="Roboto"/>
-              </a:defRPr>
-            </a:pPr>
-            <a:r>
-              <a:rPr sz="900" b="0">
-                <a:solidFill>
-                  <a:srgbClr val="5F6F63"/>
-                </a:solidFill>
-                <a:latin typeface="Roboto"/>
-              </a:rPr>
-              <a:t>Slide 10 of 11</a:t>
-            </a:r>
-          </a:p>
-        </p:txBody>
-      </p:sp>
-    </p:spTree>
-  </p:cSld>
-  <p:clrMapOvr>
-    <a:masterClrMapping/>
-  </p:clrMapOvr>
-</p:sld>
-</file>
-
-<file path=ppt/slides/slide11.xml><?xml version="1.0" encoding="utf-8"?>
-<p:sld xmlns:a="http://schemas.openxmlformats.org/drawingml/2006/main" xmlns:p="http://schemas.openxmlformats.org/presentationml/2006/main" xmlns:r="http://schemas.openxmlformats.org/officeDocument/2006/relationships">
-  <p:cSld>
-    <p:spTree>
-      <p:nvGrpSpPr>
-        <p:cNvPr id="1" name=""/>
-        <p:cNvGrpSpPr/>
-        <p:nvPr/>
-      </p:nvGrpSpPr>
-      <p:grpSpPr/>
-      <p:sp>
-        <p:nvSpPr>
-          <p:cNvPr id="2" name="Rectangle 1"/>
-          <p:cNvSpPr/>
-          <p:nvPr/>
-        </p:nvSpPr>
-        <p:spPr>
-          <a:xfrm>
-            <a:off x="0" y="0"/>
-            <a:ext cx="12191695" cy="73152"/>
-          </a:xfrm>
-          <a:prstGeom prst="rect">
-            <a:avLst/>
-          </a:prstGeom>
-          <a:solidFill>
-            <a:srgbClr val="2F7A5D"/>
-          </a:solidFill>
-          <a:ln>
-            <a:noFill/>
-          </a:ln>
-        </p:spPr>
-        <p:style>
-          <a:lnRef idx="1">
-            <a:schemeClr val="accent1"/>
-          </a:lnRef>
-          <a:fillRef idx="3">
-            <a:schemeClr val="accent1"/>
-          </a:fillRef>
-          <a:effectRef idx="2">
-            <a:schemeClr val="accent1"/>
-          </a:effectRef>
-          <a:fontRef idx="minor">
-            <a:schemeClr val="lt1"/>
-          </a:fontRef>
-        </p:style>
-        <p:txBody>
-          <a:bodyPr rtlCol="0" anchor="ctr"/>
-          <a:lstStyle/>
-          <a:p>
-            <a:pPr algn="ctr">
-              <a:defRPr>
-                <a:latin typeface="Roboto"/>
-              </a:defRPr>
-            </a:pPr>
-          </a:p>
-        </p:txBody>
-      </p:sp>
-      <p:sp>
-        <p:nvSpPr>
-          <p:cNvPr id="3" name="TextBox 2"/>
-          <p:cNvSpPr txBox="1"/>
-          <p:nvPr/>
-        </p:nvSpPr>
-        <p:spPr>
-          <a:xfrm>
-            <a:off x="457200" y="164592"/>
-            <a:ext cx="7315200" cy="274320"/>
-          </a:xfrm>
-          <a:prstGeom prst="rect">
-            <a:avLst/>
-          </a:prstGeom>
-          <a:noFill/>
-        </p:spPr>
-        <p:txBody>
-          <a:bodyPr wrap="square">
-            <a:spAutoFit/>
-          </a:bodyPr>
-          <a:lstStyle/>
-          <a:p>
-            <a:pPr>
-              <a:defRPr>
-                <a:latin typeface="Roboto"/>
-              </a:defRPr>
-            </a:pPr>
-            <a:r>
-              <a:rPr sz="1000" b="0">
-                <a:solidFill>
-                  <a:srgbClr val="5F6F63"/>
-                </a:solidFill>
-                <a:latin typeface="Roboto"/>
-              </a:rPr>
-              <a:t>Sample Community Services Ltd · What does each program really cost?</a:t>
-            </a:r>
-          </a:p>
-        </p:txBody>
-      </p:sp>
-      <p:sp>
-        <p:nvSpPr>
-          <p:cNvPr id="4" name="TextBox 3"/>
-          <p:cNvSpPr txBox="1"/>
-          <p:nvPr/>
-        </p:nvSpPr>
-        <p:spPr>
-          <a:xfrm>
-            <a:off x="457200" y="411480"/>
-            <a:ext cx="11247120" cy="548640"/>
-          </a:xfrm>
-          <a:prstGeom prst="rect">
-            <a:avLst/>
-          </a:prstGeom>
-          <a:noFill/>
-        </p:spPr>
-        <p:txBody>
-          <a:bodyPr wrap="square">
-            <a:spAutoFit/>
-          </a:bodyPr>
-          <a:lstStyle/>
-          <a:p>
-            <a:pPr>
-              <a:defRPr>
-                <a:latin typeface="Roboto"/>
-              </a:defRPr>
-            </a:pPr>
-            <a:r>
-              <a:rPr sz="2400" b="1">
-                <a:solidFill>
-                  <a:srgbClr val="25342A"/>
-                </a:solidFill>
-                <a:latin typeface="Roboto"/>
-              </a:rPr>
-              <a:t>Grant spending, by month · Spend $ · Every program at once</a:t>
-            </a:r>
-          </a:p>
-        </p:txBody>
-      </p:sp>
-      <p:sp>
-        <p:nvSpPr>
-          <p:cNvPr id="5" name="TextBox 4"/>
-          <p:cNvSpPr txBox="1"/>
-          <p:nvPr/>
-        </p:nvSpPr>
-        <p:spPr>
-          <a:xfrm>
-            <a:off x="457200" y="960120"/>
-            <a:ext cx="11247120" cy="457200"/>
-          </a:xfrm>
-          <a:prstGeom prst="rect">
-            <a:avLst/>
-          </a:prstGeom>
-          <a:noFill/>
-        </p:spPr>
-        <p:txBody>
-          <a:bodyPr wrap="square">
-            <a:spAutoFit/>
-          </a:bodyPr>
-          <a:lstStyle/>
-          <a:p>
-            <a:pPr>
-              <a:defRPr>
-                <a:latin typeface="Roboto"/>
-              </a:defRPr>
-            </a:pPr>
-            <a:r>
-              <a:rPr sz="1200" b="0">
-                <a:solidFill>
-                  <a:srgbClr val="5F6F63"/>
-                </a:solidFill>
-                <a:latin typeface="Roboto"/>
-              </a:rPr>
-              <a:t>Grant spending only (the program's direct cost). All programs includes grants that have finished.</a:t>
-            </a:r>
-          </a:p>
-        </p:txBody>
-      </p:sp>
-      <p:graphicFrame>
-        <p:nvGraphicFramePr>
-          <p:cNvPr id="6" name="Chart 5"/>
-          <p:cNvGraphicFramePr>
-            <a:graphicFrameLocks noGrp="1"/>
-          </p:cNvGraphicFramePr>
-          <p:nvPr/>
-        </p:nvGraphicFramePr>
-        <p:xfrm>
-          <a:off x="457200" y="1463040"/>
-          <a:ext cx="11247120" cy="4754880"/>
-        </p:xfrm>
-        <a:graphic>
-          <a:graphicData uri="http://schemas.openxmlformats.org/drawingml/2006/chart">
-            <c:chart xmlns:c="http://schemas.openxmlformats.org/drawingml/2006/chart" r:id="rId2"/>
-          </a:graphicData>
-        </a:graphic>
-      </p:graphicFrame>
-      <p:sp>
-        <p:nvSpPr>
-          <p:cNvPr id="7" name="TextBox 6"/>
-          <p:cNvSpPr txBox="1"/>
-          <p:nvPr/>
-        </p:nvSpPr>
-        <p:spPr>
-          <a:xfrm>
-            <a:off x="457200" y="6492240"/>
-            <a:ext cx="3657600" cy="274320"/>
-          </a:xfrm>
-          <a:prstGeom prst="rect">
-            <a:avLst/>
-          </a:prstGeom>
-          <a:noFill/>
-        </p:spPr>
-        <p:txBody>
-          <a:bodyPr wrap="square">
-            <a:spAutoFit/>
-          </a:bodyPr>
-          <a:lstStyle/>
-          <a:p>
-            <a:pPr>
-              <a:defRPr>
-                <a:latin typeface="Roboto"/>
-              </a:defRPr>
-            </a:pPr>
-            <a:r>
-              <a:rPr sz="900" b="0">
-                <a:solidFill>
-                  <a:srgbClr val="5F6F63"/>
-                </a:solidFill>
-                <a:latin typeface="Roboto"/>
-              </a:rPr>
-              <a:t>program-cost.pptx</a:t>
-            </a:r>
-          </a:p>
-        </p:txBody>
-      </p:sp>
-      <p:sp>
-        <p:nvSpPr>
-          <p:cNvPr id="8" name="TextBox 7"/>
-          <p:cNvSpPr txBox="1"/>
-          <p:nvPr/>
-        </p:nvSpPr>
-        <p:spPr>
-          <a:xfrm>
-            <a:off x="4297680" y="6492240"/>
-            <a:ext cx="3657600" cy="274320"/>
-          </a:xfrm>
-          <a:prstGeom prst="rect">
-            <a:avLst/>
-          </a:prstGeom>
-          <a:noFill/>
-        </p:spPr>
-        <p:txBody>
-          <a:bodyPr wrap="square">
-            <a:spAutoFit/>
-          </a:bodyPr>
-          <a:lstStyle/>
-          <a:p>
-            <a:pPr algn="ctr">
-              <a:defRPr>
-                <a:latin typeface="Roboto"/>
-              </a:defRPr>
-            </a:pPr>
-            <a:r>
-              <a:rPr sz="900" b="0">
-                <a:solidFill>
-                  <a:srgbClr val="5F6F63"/>
-                </a:solidFill>
-                <a:latin typeface="Roboto"/>
-              </a:rPr>
-              <a:t>Data retrieved 2pm, Tue 6 Oct 2026 · Sample data</a:t>
-            </a:r>
-          </a:p>
-        </p:txBody>
-      </p:sp>
-      <p:sp>
-        <p:nvSpPr>
-          <p:cNvPr id="9" name="TextBox 8"/>
-          <p:cNvSpPr txBox="1"/>
-          <p:nvPr/>
-        </p:nvSpPr>
-        <p:spPr>
-          <a:xfrm>
-            <a:off x="8503920" y="6492240"/>
-            <a:ext cx="3200400" cy="274320"/>
-          </a:xfrm>
-          <a:prstGeom prst="rect">
-            <a:avLst/>
-          </a:prstGeom>
-          <a:noFill/>
-        </p:spPr>
-        <p:txBody>
-          <a:bodyPr wrap="square">
-            <a:spAutoFit/>
-          </a:bodyPr>
-          <a:lstStyle/>
-          <a:p>
-            <a:pPr algn="r">
-              <a:defRPr>
-                <a:latin typeface="Roboto"/>
-              </a:defRPr>
-            </a:pPr>
-            <a:r>
-              <a:rPr sz="900" b="0">
-                <a:solidFill>
-                  <a:srgbClr val="5F6F63"/>
-                </a:solidFill>
-                <a:latin typeface="Roboto"/>
-              </a:rPr>
-              <a:t>Slide 11 of 11</a:t>
+              <a:t>Slide 1 of 8</a:t>
             </a:r>
           </a:p>
         </p:txBody>
@@ -5102,7 +6432,44 @@
       <p:grpSpPr/>
       <p:sp>
         <p:nvSpPr>
-          <p:cNvPr id="2" name="Rectangle 1"/>
+          <p:cNvPr id="2" name="Title 1"/>
+          <p:cNvSpPr>
+            <a:spLocks noGrp="1"/>
+          </p:cNvSpPr>
+          <p:nvPr>
+            <p:ph type="title"/>
+          </p:nvPr>
+        </p:nvSpPr>
+        <p:spPr>
+          <a:xfrm>
+            <a:off x="457200" y="384048"/>
+            <a:ext cx="11277295" cy="475488"/>
+          </a:xfrm>
+        </p:spPr>
+        <p:txBody>
+          <a:bodyPr wrap="square" lIns="45720" rIns="45720" tIns="0" bIns="0" anchor="t"/>
+          <a:lstStyle/>
+          <a:p>
+            <a:pPr algn="l">
+              <a:defRPr>
+                <a:latin typeface="Roboto"/>
+              </a:defRPr>
+            </a:pPr>
+            <a:r>
+              <a:rPr sz="2400" b="1">
+                <a:solidFill>
+                  <a:srgbClr val="25342A"/>
+                </a:solidFill>
+                <a:latin typeface="Roboto"/>
+              </a:rPr>
+              <a:t>All programs</a:t>
+            </a:r>
+          </a:p>
+        </p:txBody>
+      </p:sp>
+      <p:sp>
+        <p:nvSpPr>
+          <p:cNvPr id="3" name="Rectangle 2"/>
           <p:cNvSpPr/>
           <p:nvPr/>
         </p:nvSpPr>
@@ -5149,14 +6516,14 @@
       </p:sp>
       <p:sp>
         <p:nvSpPr>
-          <p:cNvPr id="3" name="TextBox 2"/>
+          <p:cNvPr id="4" name="TextBox 3"/>
           <p:cNvSpPr txBox="1"/>
           <p:nvPr/>
         </p:nvSpPr>
         <p:spPr>
           <a:xfrm>
-            <a:off x="457200" y="164592"/>
-            <a:ext cx="7315200" cy="274320"/>
+            <a:off x="457200" y="146304"/>
+            <a:ext cx="8229600" cy="256032"/>
           </a:xfrm>
           <a:prstGeom prst="rect">
             <a:avLst/>
@@ -5164,7 +6531,7 @@
           <a:noFill/>
         </p:spPr>
         <p:txBody>
-          <a:bodyPr wrap="square">
+          <a:bodyPr wrap="square" lIns="45720" rIns="45720">
             <a:spAutoFit/>
           </a:bodyPr>
           <a:lstStyle/>
@@ -5188,14 +6555,14 @@
       </p:sp>
       <p:sp>
         <p:nvSpPr>
-          <p:cNvPr id="4" name="TextBox 3"/>
+          <p:cNvPr id="5" name="TextBox 4"/>
           <p:cNvSpPr txBox="1"/>
           <p:nvPr/>
         </p:nvSpPr>
         <p:spPr>
           <a:xfrm>
-            <a:off x="457200" y="411480"/>
-            <a:ext cx="11247120" cy="548640"/>
+            <a:off x="457200" y="914400"/>
+            <a:ext cx="11277295" cy="263652"/>
           </a:xfrm>
           <a:prstGeom prst="rect">
             <a:avLst/>
@@ -5203,7 +6570,7 @@
           <a:noFill/>
         </p:spPr>
         <p:txBody>
-          <a:bodyPr wrap="square">
+          <a:bodyPr wrap="square" lIns="45720" rIns="45720">
             <a:spAutoFit/>
           </a:bodyPr>
           <a:lstStyle/>
@@ -5214,45 +6581,94 @@
               </a:defRPr>
             </a:pPr>
             <a:r>
-              <a:rPr sz="2400" b="1">
+              <a:rPr sz="1200" b="0">
                 <a:solidFill>
-                  <a:srgbClr val="25342A"/>
+                  <a:srgbClr val="5F6F63"/>
                 </a:solidFill>
                 <a:latin typeface="Roboto"/>
               </a:rPr>
-              <a:t>Full cost of each program, May 2026 · $ · Program: All programs</a:t>
+              <a:t>Full cost of each program, May 2026</a:t>
             </a:r>
           </a:p>
         </p:txBody>
       </p:sp>
       <p:graphicFrame>
         <p:nvGraphicFramePr>
-          <p:cNvPr id="5" name="Chart 4"/>
+          <p:cNvPr id="6" name="Chart 5"/>
           <p:cNvGraphicFramePr>
             <a:graphicFrameLocks noGrp="1"/>
           </p:cNvGraphicFramePr>
           <p:nvPr/>
         </p:nvGraphicFramePr>
         <p:xfrm>
-          <a:off x="457200" y="1188720"/>
-          <a:ext cx="11247120" cy="5029200"/>
+          <a:off x="457200" y="1278636"/>
+          <a:ext cx="11277295" cy="3035808"/>
         </p:xfrm>
         <a:graphic>
           <a:graphicData uri="http://schemas.openxmlformats.org/drawingml/2006/chart">
-            <c:chart xmlns:c="http://schemas.openxmlformats.org/drawingml/2006/chart" r:id="rId2"/>
+            <c:chart xmlns:c="http://schemas.openxmlformats.org/drawingml/2006/chart" r:id="rId3"/>
           </a:graphicData>
         </a:graphic>
       </p:graphicFrame>
       <p:sp>
         <p:nvSpPr>
-          <p:cNvPr id="6" name="TextBox 5"/>
+          <p:cNvPr id="7" name="Rectangle 6"/>
+          <p:cNvSpPr/>
+          <p:nvPr/>
+        </p:nvSpPr>
+        <p:spPr>
+          <a:xfrm>
+            <a:off x="457200" y="4405884"/>
+            <a:ext cx="5501487" cy="1295400"/>
+          </a:xfrm>
+          <a:prstGeom prst="rect">
+            <a:avLst/>
+          </a:prstGeom>
+          <a:solidFill>
+            <a:srgbClr val="FFFFFF"/>
+          </a:solidFill>
+          <a:ln>
+            <a:solidFill>
+              <a:srgbClr val="DCE8DC"/>
+            </a:solidFill>
+          </a:ln>
+        </p:spPr>
+        <p:style>
+          <a:lnRef idx="1">
+            <a:schemeClr val="accent1"/>
+          </a:lnRef>
+          <a:fillRef idx="3">
+            <a:schemeClr val="accent1"/>
+          </a:fillRef>
+          <a:effectRef idx="2">
+            <a:schemeClr val="accent1"/>
+          </a:effectRef>
+          <a:fontRef idx="minor">
+            <a:schemeClr val="lt1"/>
+          </a:fontRef>
+        </p:style>
+        <p:txBody>
+          <a:bodyPr rtlCol="0" anchor="ctr"/>
+          <a:lstStyle/>
+          <a:p>
+            <a:pPr algn="ctr">
+              <a:defRPr>
+                <a:latin typeface="Roboto"/>
+              </a:defRPr>
+            </a:pPr>
+          </a:p>
+        </p:txBody>
+      </p:sp>
+      <p:sp>
+        <p:nvSpPr>
+          <p:cNvPr id="8" name="TextBox 7"/>
           <p:cNvSpPr txBox="1"/>
           <p:nvPr/>
         </p:nvSpPr>
         <p:spPr>
           <a:xfrm>
-            <a:off x="457200" y="6492240"/>
-            <a:ext cx="3657600" cy="274320"/>
+            <a:off x="594360" y="4460748"/>
+            <a:ext cx="5227167" cy="274320"/>
           </a:xfrm>
           <a:prstGeom prst="rect">
             <a:avLst/>
@@ -5260,7 +6676,212 @@
           <a:noFill/>
         </p:spPr>
         <p:txBody>
-          <a:bodyPr wrap="square">
+          <a:bodyPr wrap="square" lIns="45720" rIns="45720">
+            <a:spAutoFit/>
+          </a:bodyPr>
+          <a:lstStyle/>
+          <a:p>
+            <a:pPr>
+              <a:defRPr>
+                <a:latin typeface="Roboto"/>
+              </a:defRPr>
+            </a:pPr>
+            <a:r>
+              <a:rPr sz="1000" b="1">
+                <a:solidFill>
+                  <a:srgbClr val="5F6F63"/>
+                </a:solidFill>
+                <a:latin typeface="Roboto"/>
+              </a:rPr>
+              <a:t>WHAT IT SHOWS</a:t>
+            </a:r>
+          </a:p>
+        </p:txBody>
+      </p:sp>
+      <p:sp>
+        <p:nvSpPr>
+          <p:cNvPr id="9" name="TextBox 8"/>
+          <p:cNvSpPr txBox="1"/>
+          <p:nvPr/>
+        </p:nvSpPr>
+        <p:spPr>
+          <a:xfrm>
+            <a:off x="594360" y="4735068"/>
+            <a:ext cx="5227167" cy="929640"/>
+          </a:xfrm>
+          <a:prstGeom prst="rect">
+            <a:avLst/>
+          </a:prstGeom>
+          <a:noFill/>
+        </p:spPr>
+        <p:txBody>
+          <a:bodyPr wrap="square" lIns="45720" rIns="45720">
+            <a:spAutoFit/>
+          </a:bodyPr>
+          <a:lstStyle/>
+          <a:p>
+            <a:pPr>
+              <a:defRPr>
+                <a:latin typeface="Roboto"/>
+              </a:defRPr>
+            </a:pPr>
+            <a:r>
+              <a:rPr sz="1200" b="0">
+                <a:solidFill>
+                  <a:srgbClr val="25342A"/>
+                </a:solidFill>
+                <a:latin typeface="Roboto"/>
+              </a:rPr>
+              <a:t>Housing support is the biggest program: $54,240 in May once its share of untied program costs and administration is added to $31,337 of grant spending. Shared costs add 73.1% on top of grant spending across all programs.</a:t>
+            </a:r>
+          </a:p>
+        </p:txBody>
+      </p:sp>
+      <p:sp>
+        <p:nvSpPr>
+          <p:cNvPr id="10" name="Rectangle 9"/>
+          <p:cNvSpPr/>
+          <p:nvPr/>
+        </p:nvSpPr>
+        <p:spPr>
+          <a:xfrm>
+            <a:off x="6233007" y="4405884"/>
+            <a:ext cx="5501487" cy="1295400"/>
+          </a:xfrm>
+          <a:prstGeom prst="rect">
+            <a:avLst/>
+          </a:prstGeom>
+          <a:solidFill>
+            <a:srgbClr val="EEF5F0"/>
+          </a:solidFill>
+          <a:ln>
+            <a:solidFill>
+              <a:srgbClr val="DCE8DC"/>
+            </a:solidFill>
+          </a:ln>
+        </p:spPr>
+        <p:style>
+          <a:lnRef idx="1">
+            <a:schemeClr val="accent1"/>
+          </a:lnRef>
+          <a:fillRef idx="3">
+            <a:schemeClr val="accent1"/>
+          </a:fillRef>
+          <a:effectRef idx="2">
+            <a:schemeClr val="accent1"/>
+          </a:effectRef>
+          <a:fontRef idx="minor">
+            <a:schemeClr val="lt1"/>
+          </a:fontRef>
+        </p:style>
+        <p:txBody>
+          <a:bodyPr rtlCol="0" anchor="ctr"/>
+          <a:lstStyle/>
+          <a:p>
+            <a:pPr algn="ctr">
+              <a:defRPr>
+                <a:latin typeface="Roboto"/>
+              </a:defRPr>
+            </a:pPr>
+          </a:p>
+        </p:txBody>
+      </p:sp>
+      <p:sp>
+        <p:nvSpPr>
+          <p:cNvPr id="11" name="TextBox 10"/>
+          <p:cNvSpPr txBox="1"/>
+          <p:nvPr/>
+        </p:nvSpPr>
+        <p:spPr>
+          <a:xfrm>
+            <a:off x="6370167" y="4460748"/>
+            <a:ext cx="5227167" cy="274320"/>
+          </a:xfrm>
+          <a:prstGeom prst="rect">
+            <a:avLst/>
+          </a:prstGeom>
+          <a:noFill/>
+        </p:spPr>
+        <p:txBody>
+          <a:bodyPr wrap="square" lIns="45720" rIns="45720">
+            <a:spAutoFit/>
+          </a:bodyPr>
+          <a:lstStyle/>
+          <a:p>
+            <a:pPr>
+              <a:defRPr>
+                <a:latin typeface="Roboto"/>
+              </a:defRPr>
+            </a:pPr>
+            <a:r>
+              <a:rPr sz="1000" b="1">
+                <a:solidFill>
+                  <a:srgbClr val="5F6F63"/>
+                </a:solidFill>
+                <a:latin typeface="Roboto"/>
+              </a:rPr>
+              <a:t>WHAT YOU'D DO ABOUT IT</a:t>
+            </a:r>
+          </a:p>
+        </p:txBody>
+      </p:sp>
+      <p:sp>
+        <p:nvSpPr>
+          <p:cNvPr id="12" name="TextBox 11"/>
+          <p:cNvSpPr txBox="1"/>
+          <p:nvPr/>
+        </p:nvSpPr>
+        <p:spPr>
+          <a:xfrm>
+            <a:off x="6370167" y="4735068"/>
+            <a:ext cx="5227167" cy="929640"/>
+          </a:xfrm>
+          <a:prstGeom prst="rect">
+            <a:avLst/>
+          </a:prstGeom>
+          <a:noFill/>
+        </p:spPr>
+        <p:txBody>
+          <a:bodyPr wrap="square" lIns="45720" rIns="45720">
+            <a:spAutoFit/>
+          </a:bodyPr>
+          <a:lstStyle/>
+          <a:p>
+            <a:pPr>
+              <a:defRPr>
+                <a:latin typeface="Roboto"/>
+              </a:defRPr>
+            </a:pPr>
+            <a:r>
+              <a:rPr sz="1200" b="0">
+                <a:solidFill>
+                  <a:srgbClr val="25342A"/>
+                </a:solidFill>
+                <a:latin typeface="Roboto"/>
+              </a:rPr>
+              <a:t>The full cost (not just the grant line) is the number for renewal applications, where the funder lets you recover a share of overheads. Pick a program above to see it on its own.</a:t>
+            </a:r>
+          </a:p>
+        </p:txBody>
+      </p:sp>
+      <p:sp>
+        <p:nvSpPr>
+          <p:cNvPr id="13" name="TextBox 12"/>
+          <p:cNvSpPr txBox="1"/>
+          <p:nvPr/>
+        </p:nvSpPr>
+        <p:spPr>
+          <a:xfrm>
+            <a:off x="457200" y="6492240"/>
+            <a:ext cx="2926080" cy="274320"/>
+          </a:xfrm>
+          <a:prstGeom prst="rect">
+            <a:avLst/>
+          </a:prstGeom>
+          <a:noFill/>
+        </p:spPr>
+        <p:txBody>
+          <a:bodyPr wrap="square" lIns="45720" rIns="45720">
             <a:spAutoFit/>
           </a:bodyPr>
           <a:lstStyle/>
@@ -5284,14 +6905,14 @@
       </p:sp>
       <p:sp>
         <p:nvSpPr>
-          <p:cNvPr id="7" name="TextBox 6"/>
+          <p:cNvPr id="14" name="TextBox 13"/>
           <p:cNvSpPr txBox="1"/>
           <p:nvPr/>
         </p:nvSpPr>
         <p:spPr>
           <a:xfrm>
-            <a:off x="4297680" y="6492240"/>
-            <a:ext cx="3657600" cy="274320"/>
+            <a:off x="3108960" y="6492240"/>
+            <a:ext cx="5943600" cy="274320"/>
           </a:xfrm>
           <a:prstGeom prst="rect">
             <a:avLst/>
@@ -5299,7 +6920,7 @@
           <a:noFill/>
         </p:spPr>
         <p:txBody>
-          <a:bodyPr wrap="square">
+          <a:bodyPr wrap="square" lIns="45720" rIns="45720">
             <a:spAutoFit/>
           </a:bodyPr>
           <a:lstStyle/>
@@ -5316,14 +6937,14 @@
                 </a:solidFill>
                 <a:latin typeface="Roboto"/>
               </a:rPr>
-              <a:t>Data retrieved 2pm, Tue 6 Oct 2026 · Sample data</a:t>
-            </a:r>
-          </a:p>
-        </p:txBody>
-      </p:sp>
-      <p:sp>
-        <p:nvSpPr>
-          <p:cNvPr id="8" name="TextBox 7"/>
+              <a:t>Data retrieved 2pm, Tue 6 Oct 2026 · Generated 8 Oct 2026, 9:35am · Sample data · Made with Python (python-pptx)</a:t>
+            </a:r>
+          </a:p>
+        </p:txBody>
+      </p:sp>
+      <p:sp>
+        <p:nvSpPr>
+          <p:cNvPr id="15" name="TextBox 14"/>
           <p:cNvSpPr txBox="1"/>
           <p:nvPr/>
         </p:nvSpPr>
@@ -5338,7 +6959,7 @@
           <a:noFill/>
         </p:spPr>
         <p:txBody>
-          <a:bodyPr wrap="square">
+          <a:bodyPr wrap="square" lIns="45720" rIns="45720">
             <a:spAutoFit/>
           </a:bodyPr>
           <a:lstStyle/>
@@ -5355,7 +6976,7 @@
                 </a:solidFill>
                 <a:latin typeface="Roboto"/>
               </a:rPr>
-              <a:t>Slide 2 of 11</a:t>
+              <a:t>Slide 2 of 8</a:t>
             </a:r>
           </a:p>
         </p:txBody>
@@ -5380,7 +7001,44 @@
       <p:grpSpPr/>
       <p:sp>
         <p:nvSpPr>
-          <p:cNvPr id="2" name="Rectangle 1"/>
+          <p:cNvPr id="2" name="Title 1"/>
+          <p:cNvSpPr>
+            <a:spLocks noGrp="1"/>
+          </p:cNvSpPr>
+          <p:nvPr>
+            <p:ph type="title"/>
+          </p:nvPr>
+        </p:nvSpPr>
+        <p:spPr>
+          <a:xfrm>
+            <a:off x="457200" y="384048"/>
+            <a:ext cx="11277295" cy="475488"/>
+          </a:xfrm>
+        </p:spPr>
+        <p:txBody>
+          <a:bodyPr wrap="square" lIns="45720" rIns="45720" tIns="0" bIns="0" anchor="t"/>
+          <a:lstStyle/>
+          <a:p>
+            <a:pPr algn="l">
+              <a:defRPr>
+                <a:latin typeface="Roboto"/>
+              </a:defRPr>
+            </a:pPr>
+            <a:r>
+              <a:rPr sz="2400" b="1">
+                <a:solidFill>
+                  <a:srgbClr val="25342A"/>
+                </a:solidFill>
+                <a:latin typeface="Roboto"/>
+              </a:rPr>
+              <a:t>Housing support</a:t>
+            </a:r>
+          </a:p>
+        </p:txBody>
+      </p:sp>
+      <p:sp>
+        <p:nvSpPr>
+          <p:cNvPr id="3" name="Rectangle 2"/>
           <p:cNvSpPr/>
           <p:nvPr/>
         </p:nvSpPr>
@@ -5427,14 +7085,14 @@
       </p:sp>
       <p:sp>
         <p:nvSpPr>
-          <p:cNvPr id="3" name="TextBox 2"/>
+          <p:cNvPr id="4" name="TextBox 3"/>
           <p:cNvSpPr txBox="1"/>
           <p:nvPr/>
         </p:nvSpPr>
         <p:spPr>
           <a:xfrm>
-            <a:off x="457200" y="164592"/>
-            <a:ext cx="7315200" cy="274320"/>
+            <a:off x="457200" y="146304"/>
+            <a:ext cx="8229600" cy="256032"/>
           </a:xfrm>
           <a:prstGeom prst="rect">
             <a:avLst/>
@@ -5442,7 +7100,7 @@
           <a:noFill/>
         </p:spPr>
         <p:txBody>
-          <a:bodyPr wrap="square">
+          <a:bodyPr wrap="square" lIns="45720" rIns="45720">
             <a:spAutoFit/>
           </a:bodyPr>
           <a:lstStyle/>
@@ -5466,14 +7124,14 @@
       </p:sp>
       <p:sp>
         <p:nvSpPr>
-          <p:cNvPr id="4" name="TextBox 3"/>
+          <p:cNvPr id="5" name="TextBox 4"/>
           <p:cNvSpPr txBox="1"/>
           <p:nvPr/>
         </p:nvSpPr>
         <p:spPr>
           <a:xfrm>
-            <a:off x="457200" y="411480"/>
-            <a:ext cx="11247120" cy="548640"/>
+            <a:off x="457200" y="914400"/>
+            <a:ext cx="11277295" cy="263652"/>
           </a:xfrm>
           <a:prstGeom prst="rect">
             <a:avLst/>
@@ -5481,7 +7139,7 @@
           <a:noFill/>
         </p:spPr>
         <p:txBody>
-          <a:bodyPr wrap="square">
+          <a:bodyPr wrap="square" lIns="45720" rIns="45720">
             <a:spAutoFit/>
           </a:bodyPr>
           <a:lstStyle/>
@@ -5492,45 +7150,94 @@
               </a:defRPr>
             </a:pPr>
             <a:r>
-              <a:rPr sz="2400" b="1">
+              <a:rPr sz="1200" b="0">
                 <a:solidFill>
-                  <a:srgbClr val="25342A"/>
+                  <a:srgbClr val="5F6F63"/>
                 </a:solidFill>
                 <a:latin typeface="Roboto"/>
               </a:rPr>
-              <a:t>Full cost of each program, May 2026 · % of total · Program: All programs</a:t>
+              <a:t>Grant spending, by month · Housing support</a:t>
             </a:r>
           </a:p>
         </p:txBody>
       </p:sp>
       <p:graphicFrame>
         <p:nvGraphicFramePr>
-          <p:cNvPr id="5" name="Chart 4"/>
+          <p:cNvPr id="6" name="Chart 5"/>
           <p:cNvGraphicFramePr>
             <a:graphicFrameLocks noGrp="1"/>
           </p:cNvGraphicFramePr>
           <p:nvPr/>
         </p:nvGraphicFramePr>
         <p:xfrm>
-          <a:off x="457200" y="1188720"/>
-          <a:ext cx="11247120" cy="5029200"/>
+          <a:off x="457200" y="1278636"/>
+          <a:ext cx="11277295" cy="3643884"/>
         </p:xfrm>
         <a:graphic>
           <a:graphicData uri="http://schemas.openxmlformats.org/drawingml/2006/chart">
-            <c:chart xmlns:c="http://schemas.openxmlformats.org/drawingml/2006/chart" r:id="rId2"/>
+            <c:chart xmlns:c="http://schemas.openxmlformats.org/drawingml/2006/chart" r:id="rId3"/>
           </a:graphicData>
         </a:graphic>
       </p:graphicFrame>
       <p:sp>
         <p:nvSpPr>
-          <p:cNvPr id="6" name="TextBox 5"/>
+          <p:cNvPr id="7" name="Rectangle 6"/>
+          <p:cNvSpPr/>
+          <p:nvPr/>
+        </p:nvSpPr>
+        <p:spPr>
+          <a:xfrm>
+            <a:off x="457200" y="5013960"/>
+            <a:ext cx="5501487" cy="1295400"/>
+          </a:xfrm>
+          <a:prstGeom prst="rect">
+            <a:avLst/>
+          </a:prstGeom>
+          <a:solidFill>
+            <a:srgbClr val="FFFFFF"/>
+          </a:solidFill>
+          <a:ln>
+            <a:solidFill>
+              <a:srgbClr val="DCE8DC"/>
+            </a:solidFill>
+          </a:ln>
+        </p:spPr>
+        <p:style>
+          <a:lnRef idx="1">
+            <a:schemeClr val="accent1"/>
+          </a:lnRef>
+          <a:fillRef idx="3">
+            <a:schemeClr val="accent1"/>
+          </a:fillRef>
+          <a:effectRef idx="2">
+            <a:schemeClr val="accent1"/>
+          </a:effectRef>
+          <a:fontRef idx="minor">
+            <a:schemeClr val="lt1"/>
+          </a:fontRef>
+        </p:style>
+        <p:txBody>
+          <a:bodyPr rtlCol="0" anchor="ctr"/>
+          <a:lstStyle/>
+          <a:p>
+            <a:pPr algn="ctr">
+              <a:defRPr>
+                <a:latin typeface="Roboto"/>
+              </a:defRPr>
+            </a:pPr>
+          </a:p>
+        </p:txBody>
+      </p:sp>
+      <p:sp>
+        <p:nvSpPr>
+          <p:cNvPr id="8" name="TextBox 7"/>
           <p:cNvSpPr txBox="1"/>
           <p:nvPr/>
         </p:nvSpPr>
         <p:spPr>
           <a:xfrm>
-            <a:off x="457200" y="6492240"/>
-            <a:ext cx="3657600" cy="274320"/>
+            <a:off x="594360" y="5068824"/>
+            <a:ext cx="5227167" cy="274320"/>
           </a:xfrm>
           <a:prstGeom prst="rect">
             <a:avLst/>
@@ -5538,7 +7245,212 @@
           <a:noFill/>
         </p:spPr>
         <p:txBody>
-          <a:bodyPr wrap="square">
+          <a:bodyPr wrap="square" lIns="45720" rIns="45720">
+            <a:spAutoFit/>
+          </a:bodyPr>
+          <a:lstStyle/>
+          <a:p>
+            <a:pPr>
+              <a:defRPr>
+                <a:latin typeface="Roboto"/>
+              </a:defRPr>
+            </a:pPr>
+            <a:r>
+              <a:rPr sz="1000" b="1">
+                <a:solidFill>
+                  <a:srgbClr val="5F6F63"/>
+                </a:solidFill>
+                <a:latin typeface="Roboto"/>
+              </a:rPr>
+              <a:t>WHAT IT SHOWS</a:t>
+            </a:r>
+          </a:p>
+        </p:txBody>
+      </p:sp>
+      <p:sp>
+        <p:nvSpPr>
+          <p:cNvPr id="9" name="TextBox 8"/>
+          <p:cNvSpPr txBox="1"/>
+          <p:nvPr/>
+        </p:nvSpPr>
+        <p:spPr>
+          <a:xfrm>
+            <a:off x="594360" y="5343144"/>
+            <a:ext cx="5227167" cy="929640"/>
+          </a:xfrm>
+          <a:prstGeom prst="rect">
+            <a:avLst/>
+          </a:prstGeom>
+          <a:noFill/>
+        </p:spPr>
+        <p:txBody>
+          <a:bodyPr wrap="square" lIns="45720" rIns="45720">
+            <a:spAutoFit/>
+          </a:bodyPr>
+          <a:lstStyle/>
+          <a:p>
+            <a:pPr>
+              <a:defRPr>
+                <a:latin typeface="Roboto"/>
+              </a:defRPr>
+            </a:pPr>
+            <a:r>
+              <a:rPr sz="1200" b="0">
+                <a:solidFill>
+                  <a:srgbClr val="25342A"/>
+                </a:solidFill>
+                <a:latin typeface="Roboto"/>
+              </a:rPr>
+              <a:t>Housing support cost $54,240 in full in May: $31,337 paid by the State Housing Program grant, and $22,903 of shared costs no grant covers. It has spent 91.3% of its budget to date, with $223,091 left and 7 months to go.</a:t>
+            </a:r>
+          </a:p>
+        </p:txBody>
+      </p:sp>
+      <p:sp>
+        <p:nvSpPr>
+          <p:cNvPr id="10" name="Rectangle 9"/>
+          <p:cNvSpPr/>
+          <p:nvPr/>
+        </p:nvSpPr>
+        <p:spPr>
+          <a:xfrm>
+            <a:off x="6233007" y="5013960"/>
+            <a:ext cx="5501487" cy="1295400"/>
+          </a:xfrm>
+          <a:prstGeom prst="rect">
+            <a:avLst/>
+          </a:prstGeom>
+          <a:solidFill>
+            <a:srgbClr val="EEF5F0"/>
+          </a:solidFill>
+          <a:ln>
+            <a:solidFill>
+              <a:srgbClr val="DCE8DC"/>
+            </a:solidFill>
+          </a:ln>
+        </p:spPr>
+        <p:style>
+          <a:lnRef idx="1">
+            <a:schemeClr val="accent1"/>
+          </a:lnRef>
+          <a:fillRef idx="3">
+            <a:schemeClr val="accent1"/>
+          </a:fillRef>
+          <a:effectRef idx="2">
+            <a:schemeClr val="accent1"/>
+          </a:effectRef>
+          <a:fontRef idx="minor">
+            <a:schemeClr val="lt1"/>
+          </a:fontRef>
+        </p:style>
+        <p:txBody>
+          <a:bodyPr rtlCol="0" anchor="ctr"/>
+          <a:lstStyle/>
+          <a:p>
+            <a:pPr algn="ctr">
+              <a:defRPr>
+                <a:latin typeface="Roboto"/>
+              </a:defRPr>
+            </a:pPr>
+          </a:p>
+        </p:txBody>
+      </p:sp>
+      <p:sp>
+        <p:nvSpPr>
+          <p:cNvPr id="11" name="TextBox 10"/>
+          <p:cNvSpPr txBox="1"/>
+          <p:nvPr/>
+        </p:nvSpPr>
+        <p:spPr>
+          <a:xfrm>
+            <a:off x="6370167" y="5068824"/>
+            <a:ext cx="5227167" cy="274320"/>
+          </a:xfrm>
+          <a:prstGeom prst="rect">
+            <a:avLst/>
+          </a:prstGeom>
+          <a:noFill/>
+        </p:spPr>
+        <p:txBody>
+          <a:bodyPr wrap="square" lIns="45720" rIns="45720">
+            <a:spAutoFit/>
+          </a:bodyPr>
+          <a:lstStyle/>
+          <a:p>
+            <a:pPr>
+              <a:defRPr>
+                <a:latin typeface="Roboto"/>
+              </a:defRPr>
+            </a:pPr>
+            <a:r>
+              <a:rPr sz="1000" b="1">
+                <a:solidFill>
+                  <a:srgbClr val="5F6F63"/>
+                </a:solidFill>
+                <a:latin typeface="Roboto"/>
+              </a:rPr>
+              <a:t>WHAT YOU'D DO ABOUT IT</a:t>
+            </a:r>
+          </a:p>
+        </p:txBody>
+      </p:sp>
+      <p:sp>
+        <p:nvSpPr>
+          <p:cNvPr id="12" name="TextBox 11"/>
+          <p:cNvSpPr txBox="1"/>
+          <p:nvPr/>
+        </p:nvSpPr>
+        <p:spPr>
+          <a:xfrm>
+            <a:off x="6370167" y="5343144"/>
+            <a:ext cx="5227167" cy="929640"/>
+          </a:xfrm>
+          <a:prstGeom prst="rect">
+            <a:avLst/>
+          </a:prstGeom>
+          <a:noFill/>
+        </p:spPr>
+        <p:txBody>
+          <a:bodyPr wrap="square" lIns="45720" rIns="45720">
+            <a:spAutoFit/>
+          </a:bodyPr>
+          <a:lstStyle/>
+          <a:p>
+            <a:pPr>
+              <a:defRPr>
+                <a:latin typeface="Roboto"/>
+              </a:defRPr>
+            </a:pPr>
+            <a:r>
+              <a:rPr sz="1200" b="0">
+                <a:solidFill>
+                  <a:srgbClr val="25342A"/>
+                </a:solidFill>
+                <a:latin typeface="Roboto"/>
+              </a:rPr>
+              <a:t>The full cost is $54,240 a month; $22,903 of it is shared cost the grant doesn't pay for. Worth asking for as much of it as the funder allows at renewal.</a:t>
+            </a:r>
+          </a:p>
+        </p:txBody>
+      </p:sp>
+      <p:sp>
+        <p:nvSpPr>
+          <p:cNvPr id="13" name="TextBox 12"/>
+          <p:cNvSpPr txBox="1"/>
+          <p:nvPr/>
+        </p:nvSpPr>
+        <p:spPr>
+          <a:xfrm>
+            <a:off x="457200" y="6492240"/>
+            <a:ext cx="2926080" cy="274320"/>
+          </a:xfrm>
+          <a:prstGeom prst="rect">
+            <a:avLst/>
+          </a:prstGeom>
+          <a:noFill/>
+        </p:spPr>
+        <p:txBody>
+          <a:bodyPr wrap="square" lIns="45720" rIns="45720">
             <a:spAutoFit/>
           </a:bodyPr>
           <a:lstStyle/>
@@ -5562,14 +7474,14 @@
       </p:sp>
       <p:sp>
         <p:nvSpPr>
-          <p:cNvPr id="7" name="TextBox 6"/>
+          <p:cNvPr id="14" name="TextBox 13"/>
           <p:cNvSpPr txBox="1"/>
           <p:nvPr/>
         </p:nvSpPr>
         <p:spPr>
           <a:xfrm>
-            <a:off x="4297680" y="6492240"/>
-            <a:ext cx="3657600" cy="274320"/>
+            <a:off x="3108960" y="6492240"/>
+            <a:ext cx="5943600" cy="274320"/>
           </a:xfrm>
           <a:prstGeom prst="rect">
             <a:avLst/>
@@ -5577,7 +7489,7 @@
           <a:noFill/>
         </p:spPr>
         <p:txBody>
-          <a:bodyPr wrap="square">
+          <a:bodyPr wrap="square" lIns="45720" rIns="45720">
             <a:spAutoFit/>
           </a:bodyPr>
           <a:lstStyle/>
@@ -5594,14 +7506,14 @@
                 </a:solidFill>
                 <a:latin typeface="Roboto"/>
               </a:rPr>
-              <a:t>Data retrieved 2pm, Tue 6 Oct 2026 · Sample data</a:t>
-            </a:r>
-          </a:p>
-        </p:txBody>
-      </p:sp>
-      <p:sp>
-        <p:nvSpPr>
-          <p:cNvPr id="8" name="TextBox 7"/>
+              <a:t>Data retrieved 2pm, Tue 6 Oct 2026 · Generated 8 Oct 2026, 9:35am · Sample data · Made with Python (python-pptx)</a:t>
+            </a:r>
+          </a:p>
+        </p:txBody>
+      </p:sp>
+      <p:sp>
+        <p:nvSpPr>
+          <p:cNvPr id="15" name="TextBox 14"/>
           <p:cNvSpPr txBox="1"/>
           <p:nvPr/>
         </p:nvSpPr>
@@ -5616,7 +7528,7 @@
           <a:noFill/>
         </p:spPr>
         <p:txBody>
-          <a:bodyPr wrap="square">
+          <a:bodyPr wrap="square" lIns="45720" rIns="45720">
             <a:spAutoFit/>
           </a:bodyPr>
           <a:lstStyle/>
@@ -5633,7 +7545,7 @@
                 </a:solidFill>
                 <a:latin typeface="Roboto"/>
               </a:rPr>
-              <a:t>Slide 3 of 11</a:t>
+              <a:t>Slide 3 of 8</a:t>
             </a:r>
           </a:p>
         </p:txBody>
@@ -5658,7 +7570,44 @@
       <p:grpSpPr/>
       <p:sp>
         <p:nvSpPr>
-          <p:cNvPr id="2" name="Rectangle 1"/>
+          <p:cNvPr id="2" name="Title 1"/>
+          <p:cNvSpPr>
+            <a:spLocks noGrp="1"/>
+          </p:cNvSpPr>
+          <p:nvPr>
+            <p:ph type="title"/>
+          </p:nvPr>
+        </p:nvSpPr>
+        <p:spPr>
+          <a:xfrm>
+            <a:off x="457200" y="384048"/>
+            <a:ext cx="11277295" cy="475488"/>
+          </a:xfrm>
+        </p:spPr>
+        <p:txBody>
+          <a:bodyPr wrap="square" lIns="45720" rIns="45720" tIns="0" bIns="0" anchor="t"/>
+          <a:lstStyle/>
+          <a:p>
+            <a:pPr algn="l">
+              <a:defRPr>
+                <a:latin typeface="Roboto"/>
+              </a:defRPr>
+            </a:pPr>
+            <a:r>
+              <a:rPr sz="2400" b="1">
+                <a:solidFill>
+                  <a:srgbClr val="25342A"/>
+                </a:solidFill>
+                <a:latin typeface="Roboto"/>
+              </a:rPr>
+              <a:t>Youth outreach</a:t>
+            </a:r>
+          </a:p>
+        </p:txBody>
+      </p:sp>
+      <p:sp>
+        <p:nvSpPr>
+          <p:cNvPr id="3" name="Rectangle 2"/>
           <p:cNvSpPr/>
           <p:nvPr/>
         </p:nvSpPr>
@@ -5705,14 +7654,14 @@
       </p:sp>
       <p:sp>
         <p:nvSpPr>
-          <p:cNvPr id="3" name="TextBox 2"/>
+          <p:cNvPr id="4" name="TextBox 3"/>
           <p:cNvSpPr txBox="1"/>
           <p:nvPr/>
         </p:nvSpPr>
         <p:spPr>
           <a:xfrm>
-            <a:off x="457200" y="164592"/>
-            <a:ext cx="7315200" cy="274320"/>
+            <a:off x="457200" y="146304"/>
+            <a:ext cx="8229600" cy="256032"/>
           </a:xfrm>
           <a:prstGeom prst="rect">
             <a:avLst/>
@@ -5720,7 +7669,7 @@
           <a:noFill/>
         </p:spPr>
         <p:txBody>
-          <a:bodyPr wrap="square">
+          <a:bodyPr wrap="square" lIns="45720" rIns="45720">
             <a:spAutoFit/>
           </a:bodyPr>
           <a:lstStyle/>
@@ -5744,14 +7693,14 @@
       </p:sp>
       <p:sp>
         <p:nvSpPr>
-          <p:cNvPr id="4" name="TextBox 3"/>
+          <p:cNvPr id="5" name="TextBox 4"/>
           <p:cNvSpPr txBox="1"/>
           <p:nvPr/>
         </p:nvSpPr>
         <p:spPr>
           <a:xfrm>
-            <a:off x="457200" y="411480"/>
-            <a:ext cx="11247120" cy="548640"/>
+            <a:off x="457200" y="914400"/>
+            <a:ext cx="11277295" cy="263652"/>
           </a:xfrm>
           <a:prstGeom prst="rect">
             <a:avLst/>
@@ -5759,7 +7708,7 @@
           <a:noFill/>
         </p:spPr>
         <p:txBody>
-          <a:bodyPr wrap="square">
+          <a:bodyPr wrap="square" lIns="45720" rIns="45720">
             <a:spAutoFit/>
           </a:bodyPr>
           <a:lstStyle/>
@@ -5770,27 +7719,45 @@
               </a:defRPr>
             </a:pPr>
             <a:r>
-              <a:rPr sz="2400" b="1">
+              <a:rPr sz="1200" b="0">
                 <a:solidFill>
-                  <a:srgbClr val="25342A"/>
+                  <a:srgbClr val="5F6F63"/>
                 </a:solidFill>
                 <a:latin typeface="Roboto"/>
               </a:rPr>
-              <a:t>What it shows · Program: All programs</a:t>
-            </a:r>
-          </a:p>
-        </p:txBody>
-      </p:sp>
-      <p:sp>
-        <p:nvSpPr>
-          <p:cNvPr id="5" name="Rectangle 4"/>
+              <a:t>Grant spending, by month · Youth outreach</a:t>
+            </a:r>
+          </a:p>
+        </p:txBody>
+      </p:sp>
+      <p:graphicFrame>
+        <p:nvGraphicFramePr>
+          <p:cNvPr id="6" name="Chart 5"/>
+          <p:cNvGraphicFramePr>
+            <a:graphicFrameLocks noGrp="1"/>
+          </p:cNvGraphicFramePr>
+          <p:nvPr/>
+        </p:nvGraphicFramePr>
+        <p:xfrm>
+          <a:off x="457200" y="1278636"/>
+          <a:ext cx="11277295" cy="3643884"/>
+        </p:xfrm>
+        <a:graphic>
+          <a:graphicData uri="http://schemas.openxmlformats.org/drawingml/2006/chart">
+            <c:chart xmlns:c="http://schemas.openxmlformats.org/drawingml/2006/chart" r:id="rId3"/>
+          </a:graphicData>
+        </a:graphic>
+      </p:graphicFrame>
+      <p:sp>
+        <p:nvSpPr>
+          <p:cNvPr id="7" name="Rectangle 6"/>
           <p:cNvSpPr/>
           <p:nvPr/>
         </p:nvSpPr>
         <p:spPr>
           <a:xfrm>
-            <a:off x="457200" y="1554480"/>
-            <a:ext cx="5501487" cy="4389120"/>
+            <a:off x="457200" y="5013960"/>
+            <a:ext cx="5501487" cy="1295400"/>
           </a:xfrm>
           <a:prstGeom prst="rect">
             <a:avLst/>
@@ -5832,14 +7799,14 @@
       </p:sp>
       <p:sp>
         <p:nvSpPr>
-          <p:cNvPr id="6" name="TextBox 5"/>
+          <p:cNvPr id="8" name="TextBox 7"/>
           <p:cNvSpPr txBox="1"/>
           <p:nvPr/>
         </p:nvSpPr>
         <p:spPr>
           <a:xfrm>
-            <a:off x="685800" y="1691640"/>
-            <a:ext cx="5044287" cy="365760"/>
+            <a:off x="594360" y="5068824"/>
+            <a:ext cx="5227167" cy="274320"/>
           </a:xfrm>
           <a:prstGeom prst="rect">
             <a:avLst/>
@@ -5847,7 +7814,7 @@
           <a:noFill/>
         </p:spPr>
         <p:txBody>
-          <a:bodyPr wrap="square">
+          <a:bodyPr wrap="square" lIns="45720" rIns="45720">
             <a:spAutoFit/>
           </a:bodyPr>
           <a:lstStyle/>
@@ -5858,7 +7825,7 @@
               </a:defRPr>
             </a:pPr>
             <a:r>
-              <a:rPr sz="1100" b="1">
+              <a:rPr sz="1000" b="1">
                 <a:solidFill>
                   <a:srgbClr val="5F6F63"/>
                 </a:solidFill>
@@ -5871,14 +7838,14 @@
       </p:sp>
       <p:sp>
         <p:nvSpPr>
-          <p:cNvPr id="7" name="TextBox 6"/>
+          <p:cNvPr id="9" name="TextBox 8"/>
           <p:cNvSpPr txBox="1"/>
           <p:nvPr/>
         </p:nvSpPr>
         <p:spPr>
           <a:xfrm>
-            <a:off x="685800" y="2103120"/>
-            <a:ext cx="5044287" cy="3749039"/>
+            <a:off x="594360" y="5343144"/>
+            <a:ext cx="5227167" cy="929640"/>
           </a:xfrm>
           <a:prstGeom prst="rect">
             <a:avLst/>
@@ -5886,7 +7853,7 @@
           <a:noFill/>
         </p:spPr>
         <p:txBody>
-          <a:bodyPr wrap="square">
+          <a:bodyPr wrap="square" lIns="45720" rIns="45720">
             <a:spAutoFit/>
           </a:bodyPr>
           <a:lstStyle/>
@@ -5897,27 +7864,27 @@
               </a:defRPr>
             </a:pPr>
             <a:r>
-              <a:rPr sz="1600" b="0">
+              <a:rPr sz="1200" b="0">
                 <a:solidFill>
                   <a:srgbClr val="25342A"/>
                 </a:solidFill>
                 <a:latin typeface="Roboto"/>
               </a:rPr>
-              <a:t>Housing support is the biggest program: $54,240 in May once its share of untied program costs and administration is added to $31,337 of grant spending. Shared costs add 73.1% on top of grant spending across all programs.</a:t>
-            </a:r>
-          </a:p>
-        </p:txBody>
-      </p:sp>
-      <p:sp>
-        <p:nvSpPr>
-          <p:cNvPr id="8" name="Rectangle 7"/>
+              <a:t>Youth outreach cost $36,649 in full in May: $21,174 paid by the State Department of Families grant, and $15,475 of shared costs no grant covers. It has spent 99.3% of its budget to date, with $261,640 left and 13 months to go.</a:t>
+            </a:r>
+          </a:p>
+        </p:txBody>
+      </p:sp>
+      <p:sp>
+        <p:nvSpPr>
+          <p:cNvPr id="10" name="Rectangle 9"/>
           <p:cNvSpPr/>
           <p:nvPr/>
         </p:nvSpPr>
         <p:spPr>
           <a:xfrm>
-            <a:off x="6233007" y="1554480"/>
-            <a:ext cx="5501487" cy="4389120"/>
+            <a:off x="6233007" y="5013960"/>
+            <a:ext cx="5501487" cy="1295400"/>
           </a:xfrm>
           <a:prstGeom prst="rect">
             <a:avLst/>
@@ -5959,14 +7926,14 @@
       </p:sp>
       <p:sp>
         <p:nvSpPr>
-          <p:cNvPr id="9" name="TextBox 8"/>
+          <p:cNvPr id="11" name="TextBox 10"/>
           <p:cNvSpPr txBox="1"/>
           <p:nvPr/>
         </p:nvSpPr>
         <p:spPr>
           <a:xfrm>
-            <a:off x="6461607" y="1691640"/>
-            <a:ext cx="5044287" cy="365760"/>
+            <a:off x="6370167" y="5068824"/>
+            <a:ext cx="5227167" cy="274320"/>
           </a:xfrm>
           <a:prstGeom prst="rect">
             <a:avLst/>
@@ -5974,7 +7941,7 @@
           <a:noFill/>
         </p:spPr>
         <p:txBody>
-          <a:bodyPr wrap="square">
+          <a:bodyPr wrap="square" lIns="45720" rIns="45720">
             <a:spAutoFit/>
           </a:bodyPr>
           <a:lstStyle/>
@@ -5985,7 +7952,7 @@
               </a:defRPr>
             </a:pPr>
             <a:r>
-              <a:rPr sz="1100" b="1">
+              <a:rPr sz="1000" b="1">
                 <a:solidFill>
                   <a:srgbClr val="5F6F63"/>
                 </a:solidFill>
@@ -5998,14 +7965,14 @@
       </p:sp>
       <p:sp>
         <p:nvSpPr>
-          <p:cNvPr id="10" name="TextBox 9"/>
+          <p:cNvPr id="12" name="TextBox 11"/>
           <p:cNvSpPr txBox="1"/>
           <p:nvPr/>
         </p:nvSpPr>
         <p:spPr>
           <a:xfrm>
-            <a:off x="6461607" y="2103120"/>
-            <a:ext cx="5044287" cy="3749039"/>
+            <a:off x="6370167" y="5343144"/>
+            <a:ext cx="5227167" cy="929640"/>
           </a:xfrm>
           <a:prstGeom prst="rect">
             <a:avLst/>
@@ -6013,7 +7980,7 @@
           <a:noFill/>
         </p:spPr>
         <p:txBody>
-          <a:bodyPr wrap="square">
+          <a:bodyPr wrap="square" lIns="45720" rIns="45720">
             <a:spAutoFit/>
           </a:bodyPr>
           <a:lstStyle/>
@@ -6024,27 +7991,27 @@
               </a:defRPr>
             </a:pPr>
             <a:r>
-              <a:rPr sz="1600" b="0">
+              <a:rPr sz="1200" b="0">
                 <a:solidFill>
                   <a:srgbClr val="25342A"/>
                 </a:solidFill>
                 <a:latin typeface="Roboto"/>
               </a:rPr>
-              <a:t>The full cost (not just the grant line) is the number for renewal applications, where the funder lets you recover a share of overheads. Pick a program above to see it on its own.</a:t>
-            </a:r>
-          </a:p>
-        </p:txBody>
-      </p:sp>
-      <p:sp>
-        <p:nvSpPr>
-          <p:cNvPr id="11" name="TextBox 10"/>
+              <a:t>The full cost is $36,649 a month; $15,475 of it is shared cost the grant doesn't pay for. Worth asking for as much of it as the funder allows at renewal.</a:t>
+            </a:r>
+          </a:p>
+        </p:txBody>
+      </p:sp>
+      <p:sp>
+        <p:nvSpPr>
+          <p:cNvPr id="13" name="TextBox 12"/>
           <p:cNvSpPr txBox="1"/>
           <p:nvPr/>
         </p:nvSpPr>
         <p:spPr>
           <a:xfrm>
             <a:off x="457200" y="6492240"/>
-            <a:ext cx="3657600" cy="274320"/>
+            <a:ext cx="2926080" cy="274320"/>
           </a:xfrm>
           <a:prstGeom prst="rect">
             <a:avLst/>
@@ -6052,7 +8019,7 @@
           <a:noFill/>
         </p:spPr>
         <p:txBody>
-          <a:bodyPr wrap="square">
+          <a:bodyPr wrap="square" lIns="45720" rIns="45720">
             <a:spAutoFit/>
           </a:bodyPr>
           <a:lstStyle/>
@@ -6076,14 +8043,14 @@
       </p:sp>
       <p:sp>
         <p:nvSpPr>
-          <p:cNvPr id="12" name="TextBox 11"/>
+          <p:cNvPr id="14" name="TextBox 13"/>
           <p:cNvSpPr txBox="1"/>
           <p:nvPr/>
         </p:nvSpPr>
         <p:spPr>
           <a:xfrm>
-            <a:off x="4297680" y="6492240"/>
-            <a:ext cx="3657600" cy="274320"/>
+            <a:off x="3108960" y="6492240"/>
+            <a:ext cx="5943600" cy="274320"/>
           </a:xfrm>
           <a:prstGeom prst="rect">
             <a:avLst/>
@@ -6091,7 +8058,7 @@
           <a:noFill/>
         </p:spPr>
         <p:txBody>
-          <a:bodyPr wrap="square">
+          <a:bodyPr wrap="square" lIns="45720" rIns="45720">
             <a:spAutoFit/>
           </a:bodyPr>
           <a:lstStyle/>
@@ -6108,14 +8075,14 @@
                 </a:solidFill>
                 <a:latin typeface="Roboto"/>
               </a:rPr>
-              <a:t>Data retrieved 2pm, Tue 6 Oct 2026 · Sample data</a:t>
-            </a:r>
-          </a:p>
-        </p:txBody>
-      </p:sp>
-      <p:sp>
-        <p:nvSpPr>
-          <p:cNvPr id="13" name="TextBox 12"/>
+              <a:t>Data retrieved 2pm, Tue 6 Oct 2026 · Generated 8 Oct 2026, 9:35am · Sample data · Made with Python (python-pptx)</a:t>
+            </a:r>
+          </a:p>
+        </p:txBody>
+      </p:sp>
+      <p:sp>
+        <p:nvSpPr>
+          <p:cNvPr id="15" name="TextBox 14"/>
           <p:cNvSpPr txBox="1"/>
           <p:nvPr/>
         </p:nvSpPr>
@@ -6130,7 +8097,7 @@
           <a:noFill/>
         </p:spPr>
         <p:txBody>
-          <a:bodyPr wrap="square">
+          <a:bodyPr wrap="square" lIns="45720" rIns="45720">
             <a:spAutoFit/>
           </a:bodyPr>
           <a:lstStyle/>
@@ -6147,7 +8114,7 @@
                 </a:solidFill>
                 <a:latin typeface="Roboto"/>
               </a:rPr>
-              <a:t>Slide 4 of 11</a:t>
+              <a:t>Slide 4 of 8</a:t>
             </a:r>
           </a:p>
         </p:txBody>
@@ -6172,7 +8139,44 @@
       <p:grpSpPr/>
       <p:sp>
         <p:nvSpPr>
-          <p:cNvPr id="2" name="Rectangle 1"/>
+          <p:cNvPr id="2" name="Title 1"/>
+          <p:cNvSpPr>
+            <a:spLocks noGrp="1"/>
+          </p:cNvSpPr>
+          <p:nvPr>
+            <p:ph type="title"/>
+          </p:nvPr>
+        </p:nvSpPr>
+        <p:spPr>
+          <a:xfrm>
+            <a:off x="457200" y="384048"/>
+            <a:ext cx="11277295" cy="475488"/>
+          </a:xfrm>
+        </p:spPr>
+        <p:txBody>
+          <a:bodyPr wrap="square" lIns="45720" rIns="45720" tIns="0" bIns="0" anchor="t"/>
+          <a:lstStyle/>
+          <a:p>
+            <a:pPr algn="l">
+              <a:defRPr>
+                <a:latin typeface="Roboto"/>
+              </a:defRPr>
+            </a:pPr>
+            <a:r>
+              <a:rPr sz="2400" b="1">
+                <a:solidFill>
+                  <a:srgbClr val="25342A"/>
+                </a:solidFill>
+                <a:latin typeface="Roboto"/>
+              </a:rPr>
+              <a:t>Mental health first aid</a:t>
+            </a:r>
+          </a:p>
+        </p:txBody>
+      </p:sp>
+      <p:sp>
+        <p:nvSpPr>
+          <p:cNvPr id="3" name="Rectangle 2"/>
           <p:cNvSpPr/>
           <p:nvPr/>
         </p:nvSpPr>
@@ -6219,14 +8223,14 @@
       </p:sp>
       <p:sp>
         <p:nvSpPr>
-          <p:cNvPr id="3" name="TextBox 2"/>
+          <p:cNvPr id="4" name="TextBox 3"/>
           <p:cNvSpPr txBox="1"/>
           <p:nvPr/>
         </p:nvSpPr>
         <p:spPr>
           <a:xfrm>
-            <a:off x="457200" y="164592"/>
-            <a:ext cx="7315200" cy="274320"/>
+            <a:off x="457200" y="146304"/>
+            <a:ext cx="8229600" cy="256032"/>
           </a:xfrm>
           <a:prstGeom prst="rect">
             <a:avLst/>
@@ -6234,7 +8238,7 @@
           <a:noFill/>
         </p:spPr>
         <p:txBody>
-          <a:bodyPr wrap="square">
+          <a:bodyPr wrap="square" lIns="45720" rIns="45720">
             <a:spAutoFit/>
           </a:bodyPr>
           <a:lstStyle/>
@@ -6258,14 +8262,14 @@
       </p:sp>
       <p:sp>
         <p:nvSpPr>
-          <p:cNvPr id="4" name="TextBox 3"/>
+          <p:cNvPr id="5" name="TextBox 4"/>
           <p:cNvSpPr txBox="1"/>
           <p:nvPr/>
         </p:nvSpPr>
         <p:spPr>
           <a:xfrm>
-            <a:off x="457200" y="411480"/>
-            <a:ext cx="11247120" cy="548640"/>
+            <a:off x="457200" y="914400"/>
+            <a:ext cx="11277295" cy="263652"/>
           </a:xfrm>
           <a:prstGeom prst="rect">
             <a:avLst/>
@@ -6273,7 +8277,7 @@
           <a:noFill/>
         </p:spPr>
         <p:txBody>
-          <a:bodyPr wrap="square">
+          <a:bodyPr wrap="square" lIns="45720" rIns="45720">
             <a:spAutoFit/>
           </a:bodyPr>
           <a:lstStyle/>
@@ -6284,27 +8288,45 @@
               </a:defRPr>
             </a:pPr>
             <a:r>
-              <a:rPr sz="2400" b="1">
+              <a:rPr sz="1200" b="0">
                 <a:solidFill>
-                  <a:srgbClr val="25342A"/>
+                  <a:srgbClr val="5F6F63"/>
                 </a:solidFill>
                 <a:latin typeface="Roboto"/>
               </a:rPr>
-              <a:t>What it shows · Program: Housing support</a:t>
-            </a:r>
-          </a:p>
-        </p:txBody>
-      </p:sp>
-      <p:sp>
-        <p:nvSpPr>
-          <p:cNvPr id="5" name="Rectangle 4"/>
+              <a:t>Grant spending, by month · Mental health first aid</a:t>
+            </a:r>
+          </a:p>
+        </p:txBody>
+      </p:sp>
+      <p:graphicFrame>
+        <p:nvGraphicFramePr>
+          <p:cNvPr id="6" name="Chart 5"/>
+          <p:cNvGraphicFramePr>
+            <a:graphicFrameLocks noGrp="1"/>
+          </p:cNvGraphicFramePr>
+          <p:nvPr/>
+        </p:nvGraphicFramePr>
+        <p:xfrm>
+          <a:off x="457200" y="1278636"/>
+          <a:ext cx="11277295" cy="3643884"/>
+        </p:xfrm>
+        <a:graphic>
+          <a:graphicData uri="http://schemas.openxmlformats.org/drawingml/2006/chart">
+            <c:chart xmlns:c="http://schemas.openxmlformats.org/drawingml/2006/chart" r:id="rId3"/>
+          </a:graphicData>
+        </a:graphic>
+      </p:graphicFrame>
+      <p:sp>
+        <p:nvSpPr>
+          <p:cNvPr id="7" name="Rectangle 6"/>
           <p:cNvSpPr/>
           <p:nvPr/>
         </p:nvSpPr>
         <p:spPr>
           <a:xfrm>
-            <a:off x="457200" y="1554480"/>
-            <a:ext cx="5501487" cy="4389120"/>
+            <a:off x="457200" y="5013960"/>
+            <a:ext cx="5501487" cy="1295400"/>
           </a:xfrm>
           <a:prstGeom prst="rect">
             <a:avLst/>
@@ -6346,14 +8368,14 @@
       </p:sp>
       <p:sp>
         <p:nvSpPr>
-          <p:cNvPr id="6" name="TextBox 5"/>
+          <p:cNvPr id="8" name="TextBox 7"/>
           <p:cNvSpPr txBox="1"/>
           <p:nvPr/>
         </p:nvSpPr>
         <p:spPr>
           <a:xfrm>
-            <a:off x="685800" y="1691640"/>
-            <a:ext cx="5044287" cy="365760"/>
+            <a:off x="594360" y="5068824"/>
+            <a:ext cx="5227167" cy="274320"/>
           </a:xfrm>
           <a:prstGeom prst="rect">
             <a:avLst/>
@@ -6361,7 +8383,7 @@
           <a:noFill/>
         </p:spPr>
         <p:txBody>
-          <a:bodyPr wrap="square">
+          <a:bodyPr wrap="square" lIns="45720" rIns="45720">
             <a:spAutoFit/>
           </a:bodyPr>
           <a:lstStyle/>
@@ -6372,7 +8394,7 @@
               </a:defRPr>
             </a:pPr>
             <a:r>
-              <a:rPr sz="1100" b="1">
+              <a:rPr sz="1000" b="1">
                 <a:solidFill>
                   <a:srgbClr val="5F6F63"/>
                 </a:solidFill>
@@ -6385,14 +8407,14 @@
       </p:sp>
       <p:sp>
         <p:nvSpPr>
-          <p:cNvPr id="7" name="TextBox 6"/>
+          <p:cNvPr id="9" name="TextBox 8"/>
           <p:cNvSpPr txBox="1"/>
           <p:nvPr/>
         </p:nvSpPr>
         <p:spPr>
           <a:xfrm>
-            <a:off x="685800" y="2103120"/>
-            <a:ext cx="5044287" cy="3749039"/>
+            <a:off x="594360" y="5343144"/>
+            <a:ext cx="5227167" cy="929640"/>
           </a:xfrm>
           <a:prstGeom prst="rect">
             <a:avLst/>
@@ -6400,7 +8422,7 @@
           <a:noFill/>
         </p:spPr>
         <p:txBody>
-          <a:bodyPr wrap="square">
+          <a:bodyPr wrap="square" lIns="45720" rIns="45720">
             <a:spAutoFit/>
           </a:bodyPr>
           <a:lstStyle/>
@@ -6411,27 +8433,27 @@
               </a:defRPr>
             </a:pPr>
             <a:r>
-              <a:rPr sz="1600" b="0">
+              <a:rPr sz="1200" b="0">
                 <a:solidFill>
                   <a:srgbClr val="25342A"/>
                 </a:solidFill>
                 <a:latin typeface="Roboto"/>
               </a:rPr>
-              <a:t>Housing support cost $54,240 in full in May: $31,337 paid by the State Housing Program grant, and $22,903 of shared costs no grant covers. It has spent 91.3% of its budget to date, with $223,091 left and 7 months to go.</a:t>
-            </a:r>
-          </a:p>
-        </p:txBody>
-      </p:sp>
-      <p:sp>
-        <p:nvSpPr>
-          <p:cNvPr id="8" name="Rectangle 7"/>
+              <a:t>Mental health first aid cost $15,491 in full in May: $8,950 paid by the Federal health program grant, and $6,541 of shared costs no grant covers. It has spent 92.7% of its budget to date, with $101,466 left and 10 months to go.</a:t>
+            </a:r>
+          </a:p>
+        </p:txBody>
+      </p:sp>
+      <p:sp>
+        <p:nvSpPr>
+          <p:cNvPr id="10" name="Rectangle 9"/>
           <p:cNvSpPr/>
           <p:nvPr/>
         </p:nvSpPr>
         <p:spPr>
           <a:xfrm>
-            <a:off x="6233007" y="1554480"/>
-            <a:ext cx="5501487" cy="4389120"/>
+            <a:off x="6233007" y="5013960"/>
+            <a:ext cx="5501487" cy="1295400"/>
           </a:xfrm>
           <a:prstGeom prst="rect">
             <a:avLst/>
@@ -6473,14 +8495,14 @@
       </p:sp>
       <p:sp>
         <p:nvSpPr>
-          <p:cNvPr id="9" name="TextBox 8"/>
+          <p:cNvPr id="11" name="TextBox 10"/>
           <p:cNvSpPr txBox="1"/>
           <p:nvPr/>
         </p:nvSpPr>
         <p:spPr>
           <a:xfrm>
-            <a:off x="6461607" y="1691640"/>
-            <a:ext cx="5044287" cy="365760"/>
+            <a:off x="6370167" y="5068824"/>
+            <a:ext cx="5227167" cy="274320"/>
           </a:xfrm>
           <a:prstGeom prst="rect">
             <a:avLst/>
@@ -6488,7 +8510,7 @@
           <a:noFill/>
         </p:spPr>
         <p:txBody>
-          <a:bodyPr wrap="square">
+          <a:bodyPr wrap="square" lIns="45720" rIns="45720">
             <a:spAutoFit/>
           </a:bodyPr>
           <a:lstStyle/>
@@ -6499,7 +8521,7 @@
               </a:defRPr>
             </a:pPr>
             <a:r>
-              <a:rPr sz="1100" b="1">
+              <a:rPr sz="1000" b="1">
                 <a:solidFill>
                   <a:srgbClr val="5F6F63"/>
                 </a:solidFill>
@@ -6512,14 +8534,14 @@
       </p:sp>
       <p:sp>
         <p:nvSpPr>
-          <p:cNvPr id="10" name="TextBox 9"/>
+          <p:cNvPr id="12" name="TextBox 11"/>
           <p:cNvSpPr txBox="1"/>
           <p:nvPr/>
         </p:nvSpPr>
         <p:spPr>
           <a:xfrm>
-            <a:off x="6461607" y="2103120"/>
-            <a:ext cx="5044287" cy="3749039"/>
+            <a:off x="6370167" y="5343144"/>
+            <a:ext cx="5227167" cy="929640"/>
           </a:xfrm>
           <a:prstGeom prst="rect">
             <a:avLst/>
@@ -6527,7 +8549,7 @@
           <a:noFill/>
         </p:spPr>
         <p:txBody>
-          <a:bodyPr wrap="square">
+          <a:bodyPr wrap="square" lIns="45720" rIns="45720">
             <a:spAutoFit/>
           </a:bodyPr>
           <a:lstStyle/>
@@ -6538,27 +8560,27 @@
               </a:defRPr>
             </a:pPr>
             <a:r>
-              <a:rPr sz="1600" b="0">
+              <a:rPr sz="1200" b="0">
                 <a:solidFill>
                   <a:srgbClr val="25342A"/>
                 </a:solidFill>
                 <a:latin typeface="Roboto"/>
               </a:rPr>
-              <a:t>The full cost is $54,240 a month; $22,903 of it is shared cost the grant doesn't pay for. Worth asking for as much of it as the funder allows at renewal.</a:t>
-            </a:r>
-          </a:p>
-        </p:txBody>
-      </p:sp>
-      <p:sp>
-        <p:nvSpPr>
-          <p:cNvPr id="11" name="TextBox 10"/>
+              <a:t>The full cost is $15,491 a month; $6,541 of it is shared cost the grant doesn't pay for. Worth asking for as much of it as the funder allows at renewal.</a:t>
+            </a:r>
+          </a:p>
+        </p:txBody>
+      </p:sp>
+      <p:sp>
+        <p:nvSpPr>
+          <p:cNvPr id="13" name="TextBox 12"/>
           <p:cNvSpPr txBox="1"/>
           <p:nvPr/>
         </p:nvSpPr>
         <p:spPr>
           <a:xfrm>
             <a:off x="457200" y="6492240"/>
-            <a:ext cx="3657600" cy="274320"/>
+            <a:ext cx="2926080" cy="274320"/>
           </a:xfrm>
           <a:prstGeom prst="rect">
             <a:avLst/>
@@ -6566,7 +8588,7 @@
           <a:noFill/>
         </p:spPr>
         <p:txBody>
-          <a:bodyPr wrap="square">
+          <a:bodyPr wrap="square" lIns="45720" rIns="45720">
             <a:spAutoFit/>
           </a:bodyPr>
           <a:lstStyle/>
@@ -6590,14 +8612,14 @@
       </p:sp>
       <p:sp>
         <p:nvSpPr>
-          <p:cNvPr id="12" name="TextBox 11"/>
+          <p:cNvPr id="14" name="TextBox 13"/>
           <p:cNvSpPr txBox="1"/>
           <p:nvPr/>
         </p:nvSpPr>
         <p:spPr>
           <a:xfrm>
-            <a:off x="4297680" y="6492240"/>
-            <a:ext cx="3657600" cy="274320"/>
+            <a:off x="3108960" y="6492240"/>
+            <a:ext cx="5943600" cy="274320"/>
           </a:xfrm>
           <a:prstGeom prst="rect">
             <a:avLst/>
@@ -6605,7 +8627,7 @@
           <a:noFill/>
         </p:spPr>
         <p:txBody>
-          <a:bodyPr wrap="square">
+          <a:bodyPr wrap="square" lIns="45720" rIns="45720">
             <a:spAutoFit/>
           </a:bodyPr>
           <a:lstStyle/>
@@ -6622,14 +8644,14 @@
                 </a:solidFill>
                 <a:latin typeface="Roboto"/>
               </a:rPr>
-              <a:t>Data retrieved 2pm, Tue 6 Oct 2026 · Sample data</a:t>
-            </a:r>
-          </a:p>
-        </p:txBody>
-      </p:sp>
-      <p:sp>
-        <p:nvSpPr>
-          <p:cNvPr id="13" name="TextBox 12"/>
+              <a:t>Data retrieved 2pm, Tue 6 Oct 2026 · Generated 8 Oct 2026, 9:35am · Sample data · Made with Python (python-pptx)</a:t>
+            </a:r>
+          </a:p>
+        </p:txBody>
+      </p:sp>
+      <p:sp>
+        <p:nvSpPr>
+          <p:cNvPr id="15" name="TextBox 14"/>
           <p:cNvSpPr txBox="1"/>
           <p:nvPr/>
         </p:nvSpPr>
@@ -6644,7 +8666,7 @@
           <a:noFill/>
         </p:spPr>
         <p:txBody>
-          <a:bodyPr wrap="square">
+          <a:bodyPr wrap="square" lIns="45720" rIns="45720">
             <a:spAutoFit/>
           </a:bodyPr>
           <a:lstStyle/>
@@ -6661,7 +8683,7 @@
                 </a:solidFill>
                 <a:latin typeface="Roboto"/>
               </a:rPr>
-              <a:t>Slide 5 of 11</a:t>
+              <a:t>Slide 5 of 8</a:t>
             </a:r>
           </a:p>
         </p:txBody>
@@ -6686,7 +8708,44 @@
       <p:grpSpPr/>
       <p:sp>
         <p:nvSpPr>
-          <p:cNvPr id="2" name="Rectangle 1"/>
+          <p:cNvPr id="2" name="Title 1"/>
+          <p:cNvSpPr>
+            <a:spLocks noGrp="1"/>
+          </p:cNvSpPr>
+          <p:nvPr>
+            <p:ph type="title"/>
+          </p:nvPr>
+        </p:nvSpPr>
+        <p:spPr>
+          <a:xfrm>
+            <a:off x="457200" y="384048"/>
+            <a:ext cx="11277295" cy="475488"/>
+          </a:xfrm>
+        </p:spPr>
+        <p:txBody>
+          <a:bodyPr wrap="square" lIns="45720" rIns="45720" tIns="0" bIns="0" anchor="t"/>
+          <a:lstStyle/>
+          <a:p>
+            <a:pPr algn="l">
+              <a:defRPr>
+                <a:latin typeface="Roboto"/>
+              </a:defRPr>
+            </a:pPr>
+            <a:r>
+              <a:rPr sz="2400" b="1">
+                <a:solidFill>
+                  <a:srgbClr val="25342A"/>
+                </a:solidFill>
+                <a:latin typeface="Roboto"/>
+              </a:rPr>
+              <a:t>Digital literacy</a:t>
+            </a:r>
+          </a:p>
+        </p:txBody>
+      </p:sp>
+      <p:sp>
+        <p:nvSpPr>
+          <p:cNvPr id="3" name="Rectangle 2"/>
           <p:cNvSpPr/>
           <p:nvPr/>
         </p:nvSpPr>
@@ -6733,14 +8792,14 @@
       </p:sp>
       <p:sp>
         <p:nvSpPr>
-          <p:cNvPr id="3" name="TextBox 2"/>
+          <p:cNvPr id="4" name="TextBox 3"/>
           <p:cNvSpPr txBox="1"/>
           <p:nvPr/>
         </p:nvSpPr>
         <p:spPr>
           <a:xfrm>
-            <a:off x="457200" y="164592"/>
-            <a:ext cx="7315200" cy="274320"/>
+            <a:off x="457200" y="146304"/>
+            <a:ext cx="8229600" cy="256032"/>
           </a:xfrm>
           <a:prstGeom prst="rect">
             <a:avLst/>
@@ -6748,7 +8807,7 @@
           <a:noFill/>
         </p:spPr>
         <p:txBody>
-          <a:bodyPr wrap="square">
+          <a:bodyPr wrap="square" lIns="45720" rIns="45720">
             <a:spAutoFit/>
           </a:bodyPr>
           <a:lstStyle/>
@@ -6772,14 +8831,14 @@
       </p:sp>
       <p:sp>
         <p:nvSpPr>
-          <p:cNvPr id="4" name="TextBox 3"/>
+          <p:cNvPr id="5" name="TextBox 4"/>
           <p:cNvSpPr txBox="1"/>
           <p:nvPr/>
         </p:nvSpPr>
         <p:spPr>
           <a:xfrm>
-            <a:off x="457200" y="411480"/>
-            <a:ext cx="11247120" cy="548640"/>
+            <a:off x="457200" y="914400"/>
+            <a:ext cx="11277295" cy="263652"/>
           </a:xfrm>
           <a:prstGeom prst="rect">
             <a:avLst/>
@@ -6787,7 +8846,7 @@
           <a:noFill/>
         </p:spPr>
         <p:txBody>
-          <a:bodyPr wrap="square">
+          <a:bodyPr wrap="square" lIns="45720" rIns="45720">
             <a:spAutoFit/>
           </a:bodyPr>
           <a:lstStyle/>
@@ -6798,27 +8857,45 @@
               </a:defRPr>
             </a:pPr>
             <a:r>
-              <a:rPr sz="2400" b="1">
+              <a:rPr sz="1200" b="0">
                 <a:solidFill>
-                  <a:srgbClr val="25342A"/>
+                  <a:srgbClr val="5F6F63"/>
                 </a:solidFill>
                 <a:latin typeface="Roboto"/>
               </a:rPr>
-              <a:t>What it shows · Program: Youth outreach</a:t>
-            </a:r>
-          </a:p>
-        </p:txBody>
-      </p:sp>
-      <p:sp>
-        <p:nvSpPr>
-          <p:cNvPr id="5" name="Rectangle 4"/>
+              <a:t>Grant spending, by month · Digital literacy</a:t>
+            </a:r>
+          </a:p>
+        </p:txBody>
+      </p:sp>
+      <p:graphicFrame>
+        <p:nvGraphicFramePr>
+          <p:cNvPr id="6" name="Chart 5"/>
+          <p:cNvGraphicFramePr>
+            <a:graphicFrameLocks noGrp="1"/>
+          </p:cNvGraphicFramePr>
+          <p:nvPr/>
+        </p:nvGraphicFramePr>
+        <p:xfrm>
+          <a:off x="457200" y="1278636"/>
+          <a:ext cx="11277295" cy="3643884"/>
+        </p:xfrm>
+        <a:graphic>
+          <a:graphicData uri="http://schemas.openxmlformats.org/drawingml/2006/chart">
+            <c:chart xmlns:c="http://schemas.openxmlformats.org/drawingml/2006/chart" r:id="rId3"/>
+          </a:graphicData>
+        </a:graphic>
+      </p:graphicFrame>
+      <p:sp>
+        <p:nvSpPr>
+          <p:cNvPr id="7" name="Rectangle 6"/>
           <p:cNvSpPr/>
           <p:nvPr/>
         </p:nvSpPr>
         <p:spPr>
           <a:xfrm>
-            <a:off x="457200" y="1554480"/>
-            <a:ext cx="5501487" cy="4389120"/>
+            <a:off x="457200" y="5013960"/>
+            <a:ext cx="5501487" cy="1295400"/>
           </a:xfrm>
           <a:prstGeom prst="rect">
             <a:avLst/>
@@ -6860,14 +8937,14 @@
       </p:sp>
       <p:sp>
         <p:nvSpPr>
-          <p:cNvPr id="6" name="TextBox 5"/>
+          <p:cNvPr id="8" name="TextBox 7"/>
           <p:cNvSpPr txBox="1"/>
           <p:nvPr/>
         </p:nvSpPr>
         <p:spPr>
           <a:xfrm>
-            <a:off x="685800" y="1691640"/>
-            <a:ext cx="5044287" cy="365760"/>
+            <a:off x="594360" y="5068824"/>
+            <a:ext cx="5227167" cy="274320"/>
           </a:xfrm>
           <a:prstGeom prst="rect">
             <a:avLst/>
@@ -6875,7 +8952,7 @@
           <a:noFill/>
         </p:spPr>
         <p:txBody>
-          <a:bodyPr wrap="square">
+          <a:bodyPr wrap="square" lIns="45720" rIns="45720">
             <a:spAutoFit/>
           </a:bodyPr>
           <a:lstStyle/>
@@ -6886,7 +8963,7 @@
               </a:defRPr>
             </a:pPr>
             <a:r>
-              <a:rPr sz="1100" b="1">
+              <a:rPr sz="1000" b="1">
                 <a:solidFill>
                   <a:srgbClr val="5F6F63"/>
                 </a:solidFill>
@@ -6899,14 +8976,14 @@
       </p:sp>
       <p:sp>
         <p:nvSpPr>
-          <p:cNvPr id="7" name="TextBox 6"/>
+          <p:cNvPr id="9" name="TextBox 8"/>
           <p:cNvSpPr txBox="1"/>
           <p:nvPr/>
         </p:nvSpPr>
         <p:spPr>
           <a:xfrm>
-            <a:off x="685800" y="2103120"/>
-            <a:ext cx="5044287" cy="3749039"/>
+            <a:off x="594360" y="5343144"/>
+            <a:ext cx="5227167" cy="929640"/>
           </a:xfrm>
           <a:prstGeom prst="rect">
             <a:avLst/>
@@ -6914,7 +8991,7 @@
           <a:noFill/>
         </p:spPr>
         <p:txBody>
-          <a:bodyPr wrap="square">
+          <a:bodyPr wrap="square" lIns="45720" rIns="45720">
             <a:spAutoFit/>
           </a:bodyPr>
           <a:lstStyle/>
@@ -6925,27 +9002,27 @@
               </a:defRPr>
             </a:pPr>
             <a:r>
-              <a:rPr sz="1600" b="0">
+              <a:rPr sz="1200" b="0">
                 <a:solidFill>
                   <a:srgbClr val="25342A"/>
                 </a:solidFill>
                 <a:latin typeface="Roboto"/>
               </a:rPr>
-              <a:t>Youth outreach cost $36,649 in full in May: $21,174 paid by the State Department of Families grant, and $15,475 of shared costs no grant covers. It has spent 99.3% of its budget to date, with $261,640 left and 13 months to go.</a:t>
-            </a:r>
-          </a:p>
-        </p:txBody>
-      </p:sp>
-      <p:sp>
-        <p:nvSpPr>
-          <p:cNvPr id="8" name="Rectangle 7"/>
+              <a:t>Digital literacy cost $8,022 in full in May: $4,635 paid by the Philanthropic foundation grant, and $3,387 of shared costs no grant covers. It has spent 100.9% of its budget to date, with $49,629 left and 10 months to go.</a:t>
+            </a:r>
+          </a:p>
+        </p:txBody>
+      </p:sp>
+      <p:sp>
+        <p:nvSpPr>
+          <p:cNvPr id="10" name="Rectangle 9"/>
           <p:cNvSpPr/>
           <p:nvPr/>
         </p:nvSpPr>
         <p:spPr>
           <a:xfrm>
-            <a:off x="6233007" y="1554480"/>
-            <a:ext cx="5501487" cy="4389120"/>
+            <a:off x="6233007" y="5013960"/>
+            <a:ext cx="5501487" cy="1295400"/>
           </a:xfrm>
           <a:prstGeom prst="rect">
             <a:avLst/>
@@ -6987,14 +9064,14 @@
       </p:sp>
       <p:sp>
         <p:nvSpPr>
-          <p:cNvPr id="9" name="TextBox 8"/>
+          <p:cNvPr id="11" name="TextBox 10"/>
           <p:cNvSpPr txBox="1"/>
           <p:nvPr/>
         </p:nvSpPr>
         <p:spPr>
           <a:xfrm>
-            <a:off x="6461607" y="1691640"/>
-            <a:ext cx="5044287" cy="365760"/>
+            <a:off x="6370167" y="5068824"/>
+            <a:ext cx="5227167" cy="274320"/>
           </a:xfrm>
           <a:prstGeom prst="rect">
             <a:avLst/>
@@ -7002,7 +9079,7 @@
           <a:noFill/>
         </p:spPr>
         <p:txBody>
-          <a:bodyPr wrap="square">
+          <a:bodyPr wrap="square" lIns="45720" rIns="45720">
             <a:spAutoFit/>
           </a:bodyPr>
           <a:lstStyle/>
@@ -7013,7 +9090,7 @@
               </a:defRPr>
             </a:pPr>
             <a:r>
-              <a:rPr sz="1100" b="1">
+              <a:rPr sz="1000" b="1">
                 <a:solidFill>
                   <a:srgbClr val="5F6F63"/>
                 </a:solidFill>
@@ -7026,14 +9103,14 @@
       </p:sp>
       <p:sp>
         <p:nvSpPr>
-          <p:cNvPr id="10" name="TextBox 9"/>
+          <p:cNvPr id="12" name="TextBox 11"/>
           <p:cNvSpPr txBox="1"/>
           <p:nvPr/>
         </p:nvSpPr>
         <p:spPr>
           <a:xfrm>
-            <a:off x="6461607" y="2103120"/>
-            <a:ext cx="5044287" cy="3749039"/>
+            <a:off x="6370167" y="5343144"/>
+            <a:ext cx="5227167" cy="929640"/>
           </a:xfrm>
           <a:prstGeom prst="rect">
             <a:avLst/>
@@ -7041,7 +9118,7 @@
           <a:noFill/>
         </p:spPr>
         <p:txBody>
-          <a:bodyPr wrap="square">
+          <a:bodyPr wrap="square" lIns="45720" rIns="45720">
             <a:spAutoFit/>
           </a:bodyPr>
           <a:lstStyle/>
@@ -7052,27 +9129,27 @@
               </a:defRPr>
             </a:pPr>
             <a:r>
-              <a:rPr sz="1600" b="0">
+              <a:rPr sz="1200" b="0">
                 <a:solidFill>
                   <a:srgbClr val="25342A"/>
                 </a:solidFill>
                 <a:latin typeface="Roboto"/>
               </a:rPr>
-              <a:t>The full cost is $36,649 a month; $15,475 of it is shared cost the grant doesn't pay for. Worth asking for as much of it as the funder allows at renewal.</a:t>
-            </a:r>
-          </a:p>
-        </p:txBody>
-      </p:sp>
-      <p:sp>
-        <p:nvSpPr>
-          <p:cNvPr id="11" name="TextBox 10"/>
+              <a:t>The full cost is $8,022 a month; $3,387 of it is shared cost the grant doesn't pay for. Worth asking for as much of it as the funder allows at renewal.</a:t>
+            </a:r>
+          </a:p>
+        </p:txBody>
+      </p:sp>
+      <p:sp>
+        <p:nvSpPr>
+          <p:cNvPr id="13" name="TextBox 12"/>
           <p:cNvSpPr txBox="1"/>
           <p:nvPr/>
         </p:nvSpPr>
         <p:spPr>
           <a:xfrm>
             <a:off x="457200" y="6492240"/>
-            <a:ext cx="3657600" cy="274320"/>
+            <a:ext cx="2926080" cy="274320"/>
           </a:xfrm>
           <a:prstGeom prst="rect">
             <a:avLst/>
@@ -7080,7 +9157,7 @@
           <a:noFill/>
         </p:spPr>
         <p:txBody>
-          <a:bodyPr wrap="square">
+          <a:bodyPr wrap="square" lIns="45720" rIns="45720">
             <a:spAutoFit/>
           </a:bodyPr>
           <a:lstStyle/>
@@ -7104,14 +9181,14 @@
       </p:sp>
       <p:sp>
         <p:nvSpPr>
-          <p:cNvPr id="12" name="TextBox 11"/>
+          <p:cNvPr id="14" name="TextBox 13"/>
           <p:cNvSpPr txBox="1"/>
           <p:nvPr/>
         </p:nvSpPr>
         <p:spPr>
           <a:xfrm>
-            <a:off x="4297680" y="6492240"/>
-            <a:ext cx="3657600" cy="274320"/>
+            <a:off x="3108960" y="6492240"/>
+            <a:ext cx="5943600" cy="274320"/>
           </a:xfrm>
           <a:prstGeom prst="rect">
             <a:avLst/>
@@ -7119,7 +9196,7 @@
           <a:noFill/>
         </p:spPr>
         <p:txBody>
-          <a:bodyPr wrap="square">
+          <a:bodyPr wrap="square" lIns="45720" rIns="45720">
             <a:spAutoFit/>
           </a:bodyPr>
           <a:lstStyle/>
@@ -7136,14 +9213,14 @@
                 </a:solidFill>
                 <a:latin typeface="Roboto"/>
               </a:rPr>
-              <a:t>Data retrieved 2pm, Tue 6 Oct 2026 · Sample data</a:t>
-            </a:r>
-          </a:p>
-        </p:txBody>
-      </p:sp>
-      <p:sp>
-        <p:nvSpPr>
-          <p:cNvPr id="13" name="TextBox 12"/>
+              <a:t>Data retrieved 2pm, Tue 6 Oct 2026 · Generated 8 Oct 2026, 9:35am · Sample data · Made with Python (python-pptx)</a:t>
+            </a:r>
+          </a:p>
+        </p:txBody>
+      </p:sp>
+      <p:sp>
+        <p:nvSpPr>
+          <p:cNvPr id="15" name="TextBox 14"/>
           <p:cNvSpPr txBox="1"/>
           <p:nvPr/>
         </p:nvSpPr>
@@ -7158,7 +9235,7 @@
           <a:noFill/>
         </p:spPr>
         <p:txBody>
-          <a:bodyPr wrap="square">
+          <a:bodyPr wrap="square" lIns="45720" rIns="45720">
             <a:spAutoFit/>
           </a:bodyPr>
           <a:lstStyle/>
@@ -7175,7 +9252,7 @@
                 </a:solidFill>
                 <a:latin typeface="Roboto"/>
               </a:rPr>
-              <a:t>Slide 6 of 11</a:t>
+              <a:t>Slide 6 of 8</a:t>
             </a:r>
           </a:p>
         </p:txBody>
@@ -7200,7 +9277,44 @@
       <p:grpSpPr/>
       <p:sp>
         <p:nvSpPr>
-          <p:cNvPr id="2" name="Rectangle 1"/>
+          <p:cNvPr id="2" name="Title 1"/>
+          <p:cNvSpPr>
+            <a:spLocks noGrp="1"/>
+          </p:cNvSpPr>
+          <p:nvPr>
+            <p:ph type="title"/>
+          </p:nvPr>
+        </p:nvSpPr>
+        <p:spPr>
+          <a:xfrm>
+            <a:off x="457200" y="384048"/>
+            <a:ext cx="11277295" cy="475488"/>
+          </a:xfrm>
+        </p:spPr>
+        <p:txBody>
+          <a:bodyPr wrap="square" lIns="45720" rIns="45720" tIns="0" bIns="0" anchor="t"/>
+          <a:lstStyle/>
+          <a:p>
+            <a:pPr algn="l">
+              <a:defRPr>
+                <a:latin typeface="Roboto"/>
+              </a:defRPr>
+            </a:pPr>
+            <a:r>
+              <a:rPr sz="2400" b="1">
+                <a:solidFill>
+                  <a:srgbClr val="25342A"/>
+                </a:solidFill>
+                <a:latin typeface="Roboto"/>
+              </a:rPr>
+              <a:t>Community meals (2025-26)</a:t>
+            </a:r>
+          </a:p>
+        </p:txBody>
+      </p:sp>
+      <p:sp>
+        <p:nvSpPr>
+          <p:cNvPr id="3" name="Rectangle 2"/>
           <p:cNvSpPr/>
           <p:nvPr/>
         </p:nvSpPr>
@@ -7247,14 +9361,14 @@
       </p:sp>
       <p:sp>
         <p:nvSpPr>
-          <p:cNvPr id="3" name="TextBox 2"/>
+          <p:cNvPr id="4" name="TextBox 3"/>
           <p:cNvSpPr txBox="1"/>
           <p:nvPr/>
         </p:nvSpPr>
         <p:spPr>
           <a:xfrm>
-            <a:off x="457200" y="164592"/>
-            <a:ext cx="7315200" cy="274320"/>
+            <a:off x="457200" y="146304"/>
+            <a:ext cx="8229600" cy="256032"/>
           </a:xfrm>
           <a:prstGeom prst="rect">
             <a:avLst/>
@@ -7262,7 +9376,7 @@
           <a:noFill/>
         </p:spPr>
         <p:txBody>
-          <a:bodyPr wrap="square">
+          <a:bodyPr wrap="square" lIns="45720" rIns="45720">
             <a:spAutoFit/>
           </a:bodyPr>
           <a:lstStyle/>
@@ -7286,14 +9400,14 @@
       </p:sp>
       <p:sp>
         <p:nvSpPr>
-          <p:cNvPr id="4" name="TextBox 3"/>
+          <p:cNvPr id="5" name="TextBox 4"/>
           <p:cNvSpPr txBox="1"/>
           <p:nvPr/>
         </p:nvSpPr>
         <p:spPr>
           <a:xfrm>
-            <a:off x="457200" y="411480"/>
-            <a:ext cx="11247120" cy="548640"/>
+            <a:off x="457200" y="914400"/>
+            <a:ext cx="11277295" cy="263652"/>
           </a:xfrm>
           <a:prstGeom prst="rect">
             <a:avLst/>
@@ -7301,7 +9415,7 @@
           <a:noFill/>
         </p:spPr>
         <p:txBody>
-          <a:bodyPr wrap="square">
+          <a:bodyPr wrap="square" lIns="45720" rIns="45720">
             <a:spAutoFit/>
           </a:bodyPr>
           <a:lstStyle/>
@@ -7312,27 +9426,45 @@
               </a:defRPr>
             </a:pPr>
             <a:r>
-              <a:rPr sz="2400" b="1">
+              <a:rPr sz="1200" b="0">
                 <a:solidFill>
-                  <a:srgbClr val="25342A"/>
+                  <a:srgbClr val="5F6F63"/>
                 </a:solidFill>
                 <a:latin typeface="Roboto"/>
               </a:rPr>
-              <a:t>What it shows · Program: Mental health first aid</a:t>
-            </a:r>
-          </a:p>
-        </p:txBody>
-      </p:sp>
-      <p:sp>
-        <p:nvSpPr>
-          <p:cNvPr id="5" name="Rectangle 4"/>
+              <a:t>Grant spending, by month · Community meals (2025-26)</a:t>
+            </a:r>
+          </a:p>
+        </p:txBody>
+      </p:sp>
+      <p:graphicFrame>
+        <p:nvGraphicFramePr>
+          <p:cNvPr id="6" name="Chart 5"/>
+          <p:cNvGraphicFramePr>
+            <a:graphicFrameLocks noGrp="1"/>
+          </p:cNvGraphicFramePr>
+          <p:nvPr/>
+        </p:nvGraphicFramePr>
+        <p:xfrm>
+          <a:off x="457200" y="1278636"/>
+          <a:ext cx="11277295" cy="3643884"/>
+        </p:xfrm>
+        <a:graphic>
+          <a:graphicData uri="http://schemas.openxmlformats.org/drawingml/2006/chart">
+            <c:chart xmlns:c="http://schemas.openxmlformats.org/drawingml/2006/chart" r:id="rId3"/>
+          </a:graphicData>
+        </a:graphic>
+      </p:graphicFrame>
+      <p:sp>
+        <p:nvSpPr>
+          <p:cNvPr id="7" name="Rectangle 6"/>
           <p:cNvSpPr/>
           <p:nvPr/>
         </p:nvSpPr>
         <p:spPr>
           <a:xfrm>
-            <a:off x="457200" y="1554480"/>
-            <a:ext cx="5501487" cy="4389120"/>
+            <a:off x="457200" y="5013960"/>
+            <a:ext cx="5501487" cy="1295400"/>
           </a:xfrm>
           <a:prstGeom prst="rect">
             <a:avLst/>
@@ -7374,14 +9506,14 @@
       </p:sp>
       <p:sp>
         <p:nvSpPr>
-          <p:cNvPr id="6" name="TextBox 5"/>
+          <p:cNvPr id="8" name="TextBox 7"/>
           <p:cNvSpPr txBox="1"/>
           <p:nvPr/>
         </p:nvSpPr>
         <p:spPr>
           <a:xfrm>
-            <a:off x="685800" y="1691640"/>
-            <a:ext cx="5044287" cy="365760"/>
+            <a:off x="594360" y="5068824"/>
+            <a:ext cx="5227167" cy="274320"/>
           </a:xfrm>
           <a:prstGeom prst="rect">
             <a:avLst/>
@@ -7389,7 +9521,7 @@
           <a:noFill/>
         </p:spPr>
         <p:txBody>
-          <a:bodyPr wrap="square">
+          <a:bodyPr wrap="square" lIns="45720" rIns="45720">
             <a:spAutoFit/>
           </a:bodyPr>
           <a:lstStyle/>
@@ -7400,7 +9532,7 @@
               </a:defRPr>
             </a:pPr>
             <a:r>
-              <a:rPr sz="1100" b="1">
+              <a:rPr sz="1000" b="1">
                 <a:solidFill>
                   <a:srgbClr val="5F6F63"/>
                 </a:solidFill>
@@ -7413,14 +9545,14 @@
       </p:sp>
       <p:sp>
         <p:nvSpPr>
-          <p:cNvPr id="7" name="TextBox 6"/>
+          <p:cNvPr id="9" name="TextBox 8"/>
           <p:cNvSpPr txBox="1"/>
           <p:nvPr/>
         </p:nvSpPr>
         <p:spPr>
           <a:xfrm>
-            <a:off x="685800" y="2103120"/>
-            <a:ext cx="5044287" cy="3749039"/>
+            <a:off x="594360" y="5343144"/>
+            <a:ext cx="5227167" cy="929640"/>
           </a:xfrm>
           <a:prstGeom prst="rect">
             <a:avLst/>
@@ -7428,7 +9560,7 @@
           <a:noFill/>
         </p:spPr>
         <p:txBody>
-          <a:bodyPr wrap="square">
+          <a:bodyPr wrap="square" lIns="45720" rIns="45720">
             <a:spAutoFit/>
           </a:bodyPr>
           <a:lstStyle/>
@@ -7439,27 +9571,27 @@
               </a:defRPr>
             </a:pPr>
             <a:r>
-              <a:rPr sz="1600" b="0">
+              <a:rPr sz="1200" b="0">
                 <a:solidFill>
                   <a:srgbClr val="25342A"/>
                 </a:solidFill>
                 <a:latin typeface="Roboto"/>
               </a:rPr>
-              <a:t>Mental health first aid cost $15,491 in full in May: $8,950 paid by the Federal health program grant, and $6,541 of shared costs no grant covers. It has spent 92.7% of its budget to date, with $101,466 left and 10 months to go.</a:t>
-            </a:r>
-          </a:p>
-        </p:txBody>
-      </p:sp>
-      <p:sp>
-        <p:nvSpPr>
-          <p:cNvPr id="8" name="Rectangle 7"/>
+              <a:t>Community meals (2025-26) cost $6,058 in full in May: $3,500 paid by the Local council community grant grant, and $2,558 of shared costs no grant covers. It has spent 97.4% of its budget to date, with $4,700 left and 1 months to go.</a:t>
+            </a:r>
+          </a:p>
+        </p:txBody>
+      </p:sp>
+      <p:sp>
+        <p:nvSpPr>
+          <p:cNvPr id="10" name="Rectangle 9"/>
           <p:cNvSpPr/>
           <p:nvPr/>
         </p:nvSpPr>
         <p:spPr>
           <a:xfrm>
-            <a:off x="6233007" y="1554480"/>
-            <a:ext cx="5501487" cy="4389120"/>
+            <a:off x="6233007" y="5013960"/>
+            <a:ext cx="5501487" cy="1295400"/>
           </a:xfrm>
           <a:prstGeom prst="rect">
             <a:avLst/>
@@ -7501,14 +9633,14 @@
       </p:sp>
       <p:sp>
         <p:nvSpPr>
-          <p:cNvPr id="9" name="TextBox 8"/>
+          <p:cNvPr id="11" name="TextBox 10"/>
           <p:cNvSpPr txBox="1"/>
           <p:nvPr/>
         </p:nvSpPr>
         <p:spPr>
           <a:xfrm>
-            <a:off x="6461607" y="1691640"/>
-            <a:ext cx="5044287" cy="365760"/>
+            <a:off x="6370167" y="5068824"/>
+            <a:ext cx="5227167" cy="274320"/>
           </a:xfrm>
           <a:prstGeom prst="rect">
             <a:avLst/>
@@ -7516,7 +9648,7 @@
           <a:noFill/>
         </p:spPr>
         <p:txBody>
-          <a:bodyPr wrap="square">
+          <a:bodyPr wrap="square" lIns="45720" rIns="45720">
             <a:spAutoFit/>
           </a:bodyPr>
           <a:lstStyle/>
@@ -7527,7 +9659,7 @@
               </a:defRPr>
             </a:pPr>
             <a:r>
-              <a:rPr sz="1100" b="1">
+              <a:rPr sz="1000" b="1">
                 <a:solidFill>
                   <a:srgbClr val="5F6F63"/>
                 </a:solidFill>
@@ -7540,14 +9672,14 @@
       </p:sp>
       <p:sp>
         <p:nvSpPr>
-          <p:cNvPr id="10" name="TextBox 9"/>
+          <p:cNvPr id="12" name="TextBox 11"/>
           <p:cNvSpPr txBox="1"/>
           <p:nvPr/>
         </p:nvSpPr>
         <p:spPr>
           <a:xfrm>
-            <a:off x="6461607" y="2103120"/>
-            <a:ext cx="5044287" cy="3749039"/>
+            <a:off x="6370167" y="5343144"/>
+            <a:ext cx="5227167" cy="929640"/>
           </a:xfrm>
           <a:prstGeom prst="rect">
             <a:avLst/>
@@ -7555,7 +9687,7 @@
           <a:noFill/>
         </p:spPr>
         <p:txBody>
-          <a:bodyPr wrap="square">
+          <a:bodyPr wrap="square" lIns="45720" rIns="45720">
             <a:spAutoFit/>
           </a:bodyPr>
           <a:lstStyle/>
@@ -7566,27 +9698,27 @@
               </a:defRPr>
             </a:pPr>
             <a:r>
-              <a:rPr sz="1600" b="0">
+              <a:rPr sz="1200" b="0">
                 <a:solidFill>
                   <a:srgbClr val="25342A"/>
                 </a:solidFill>
                 <a:latin typeface="Roboto"/>
               </a:rPr>
-              <a:t>The full cost is $15,491 a month; $6,541 of it is shared cost the grant doesn't pay for. Worth asking for as much of it as the funder allows at renewal.</a:t>
-            </a:r>
-          </a:p>
-        </p:txBody>
-      </p:sp>
-      <p:sp>
-        <p:nvSpPr>
-          <p:cNvPr id="11" name="TextBox 10"/>
+              <a:t>The full cost is $6,058 a month; $2,558 of it is shared cost the grant doesn't pay for. Worth asking for as much of it as the funder allows at renewal.</a:t>
+            </a:r>
+          </a:p>
+        </p:txBody>
+      </p:sp>
+      <p:sp>
+        <p:nvSpPr>
+          <p:cNvPr id="13" name="TextBox 12"/>
           <p:cNvSpPr txBox="1"/>
           <p:nvPr/>
         </p:nvSpPr>
         <p:spPr>
           <a:xfrm>
             <a:off x="457200" y="6492240"/>
-            <a:ext cx="3657600" cy="274320"/>
+            <a:ext cx="2926080" cy="274320"/>
           </a:xfrm>
           <a:prstGeom prst="rect">
             <a:avLst/>
@@ -7594,7 +9726,7 @@
           <a:noFill/>
         </p:spPr>
         <p:txBody>
-          <a:bodyPr wrap="square">
+          <a:bodyPr wrap="square" lIns="45720" rIns="45720">
             <a:spAutoFit/>
           </a:bodyPr>
           <a:lstStyle/>
@@ -7618,14 +9750,14 @@
       </p:sp>
       <p:sp>
         <p:nvSpPr>
-          <p:cNvPr id="12" name="TextBox 11"/>
+          <p:cNvPr id="14" name="TextBox 13"/>
           <p:cNvSpPr txBox="1"/>
           <p:nvPr/>
         </p:nvSpPr>
         <p:spPr>
           <a:xfrm>
-            <a:off x="4297680" y="6492240"/>
-            <a:ext cx="3657600" cy="274320"/>
+            <a:off x="3108960" y="6492240"/>
+            <a:ext cx="5943600" cy="274320"/>
           </a:xfrm>
           <a:prstGeom prst="rect">
             <a:avLst/>
@@ -7633,7 +9765,7 @@
           <a:noFill/>
         </p:spPr>
         <p:txBody>
-          <a:bodyPr wrap="square">
+          <a:bodyPr wrap="square" lIns="45720" rIns="45720">
             <a:spAutoFit/>
           </a:bodyPr>
           <a:lstStyle/>
@@ -7650,14 +9782,14 @@
                 </a:solidFill>
                 <a:latin typeface="Roboto"/>
               </a:rPr>
-              <a:t>Data retrieved 2pm, Tue 6 Oct 2026 · Sample data</a:t>
-            </a:r>
-          </a:p>
-        </p:txBody>
-      </p:sp>
-      <p:sp>
-        <p:nvSpPr>
-          <p:cNvPr id="13" name="TextBox 12"/>
+              <a:t>Data retrieved 2pm, Tue 6 Oct 2026 · Generated 8 Oct 2026, 9:35am · Sample data · Made with Python (python-pptx)</a:t>
+            </a:r>
+          </a:p>
+        </p:txBody>
+      </p:sp>
+      <p:sp>
+        <p:nvSpPr>
+          <p:cNvPr id="15" name="TextBox 14"/>
           <p:cNvSpPr txBox="1"/>
           <p:nvPr/>
         </p:nvSpPr>
@@ -7672,7 +9804,7 @@
           <a:noFill/>
         </p:spPr>
         <p:txBody>
-          <a:bodyPr wrap="square">
+          <a:bodyPr wrap="square" lIns="45720" rIns="45720">
             <a:spAutoFit/>
           </a:bodyPr>
           <a:lstStyle/>
@@ -7689,7 +9821,7 @@
                 </a:solidFill>
                 <a:latin typeface="Roboto"/>
               </a:rPr>
-              <a:t>Slide 7 of 11</a:t>
+              <a:t>Slide 7 of 8</a:t>
             </a:r>
           </a:p>
         </p:txBody>
@@ -7714,7 +9846,44 @@
       <p:grpSpPr/>
       <p:sp>
         <p:nvSpPr>
-          <p:cNvPr id="2" name="Rectangle 1"/>
+          <p:cNvPr id="2" name="Title 1"/>
+          <p:cNvSpPr>
+            <a:spLocks noGrp="1"/>
+          </p:cNvSpPr>
+          <p:nvPr>
+            <p:ph type="title"/>
+          </p:nvPr>
+        </p:nvSpPr>
+        <p:spPr>
+          <a:xfrm>
+            <a:off x="457200" y="384048"/>
+            <a:ext cx="11277295" cy="475488"/>
+          </a:xfrm>
+        </p:spPr>
+        <p:txBody>
+          <a:bodyPr wrap="square" lIns="45720" rIns="45720" tIns="0" bIns="0" anchor="t"/>
+          <a:lstStyle/>
+          <a:p>
+            <a:pPr algn="l">
+              <a:defRPr>
+                <a:latin typeface="Roboto"/>
+              </a:defRPr>
+            </a:pPr>
+            <a:r>
+              <a:rPr sz="2400" b="1">
+                <a:solidFill>
+                  <a:srgbClr val="25342A"/>
+                </a:solidFill>
+                <a:latin typeface="Roboto"/>
+              </a:rPr>
+              <a:t>Volunteer coordinator</a:t>
+            </a:r>
+          </a:p>
+        </p:txBody>
+      </p:sp>
+      <p:sp>
+        <p:nvSpPr>
+          <p:cNvPr id="3" name="Rectangle 2"/>
           <p:cNvSpPr/>
           <p:nvPr/>
         </p:nvSpPr>
@@ -7761,14 +9930,14 @@
       </p:sp>
       <p:sp>
         <p:nvSpPr>
-          <p:cNvPr id="3" name="TextBox 2"/>
+          <p:cNvPr id="4" name="TextBox 3"/>
           <p:cNvSpPr txBox="1"/>
           <p:nvPr/>
         </p:nvSpPr>
         <p:spPr>
           <a:xfrm>
-            <a:off x="457200" y="164592"/>
-            <a:ext cx="7315200" cy="274320"/>
+            <a:off x="457200" y="146304"/>
+            <a:ext cx="8229600" cy="256032"/>
           </a:xfrm>
           <a:prstGeom prst="rect">
             <a:avLst/>
@@ -7776,7 +9945,7 @@
           <a:noFill/>
         </p:spPr>
         <p:txBody>
-          <a:bodyPr wrap="square">
+          <a:bodyPr wrap="square" lIns="45720" rIns="45720">
             <a:spAutoFit/>
           </a:bodyPr>
           <a:lstStyle/>
@@ -7800,14 +9969,14 @@
       </p:sp>
       <p:sp>
         <p:nvSpPr>
-          <p:cNvPr id="4" name="TextBox 3"/>
+          <p:cNvPr id="5" name="TextBox 4"/>
           <p:cNvSpPr txBox="1"/>
           <p:nvPr/>
         </p:nvSpPr>
         <p:spPr>
           <a:xfrm>
-            <a:off x="457200" y="411480"/>
-            <a:ext cx="11247120" cy="548640"/>
+            <a:off x="457200" y="914400"/>
+            <a:ext cx="11277295" cy="263652"/>
           </a:xfrm>
           <a:prstGeom prst="rect">
             <a:avLst/>
@@ -7815,7 +9984,7 @@
           <a:noFill/>
         </p:spPr>
         <p:txBody>
-          <a:bodyPr wrap="square">
+          <a:bodyPr wrap="square" lIns="45720" rIns="45720">
             <a:spAutoFit/>
           </a:bodyPr>
           <a:lstStyle/>
@@ -7826,27 +9995,45 @@
               </a:defRPr>
             </a:pPr>
             <a:r>
-              <a:rPr sz="2400" b="1">
+              <a:rPr sz="1200" b="0">
                 <a:solidFill>
-                  <a:srgbClr val="25342A"/>
+                  <a:srgbClr val="5F6F63"/>
                 </a:solidFill>
                 <a:latin typeface="Roboto"/>
               </a:rPr>
-              <a:t>What it shows · Program: Digital literacy</a:t>
-            </a:r>
-          </a:p>
-        </p:txBody>
-      </p:sp>
-      <p:sp>
-        <p:nvSpPr>
-          <p:cNvPr id="5" name="Rectangle 4"/>
+              <a:t>Grant spending, by month · Volunteer coordinator</a:t>
+            </a:r>
+          </a:p>
+        </p:txBody>
+      </p:sp>
+      <p:graphicFrame>
+        <p:nvGraphicFramePr>
+          <p:cNvPr id="6" name="Chart 5"/>
+          <p:cNvGraphicFramePr>
+            <a:graphicFrameLocks noGrp="1"/>
+          </p:cNvGraphicFramePr>
+          <p:nvPr/>
+        </p:nvGraphicFramePr>
+        <p:xfrm>
+          <a:off x="457200" y="1278636"/>
+          <a:ext cx="11277295" cy="3643884"/>
+        </p:xfrm>
+        <a:graphic>
+          <a:graphicData uri="http://schemas.openxmlformats.org/drawingml/2006/chart">
+            <c:chart xmlns:c="http://schemas.openxmlformats.org/drawingml/2006/chart" r:id="rId3"/>
+          </a:graphicData>
+        </a:graphic>
+      </p:graphicFrame>
+      <p:sp>
+        <p:nvSpPr>
+          <p:cNvPr id="7" name="Rectangle 6"/>
           <p:cNvSpPr/>
           <p:nvPr/>
         </p:nvSpPr>
         <p:spPr>
           <a:xfrm>
-            <a:off x="457200" y="1554480"/>
-            <a:ext cx="5501487" cy="4389120"/>
+            <a:off x="457200" y="5013960"/>
+            <a:ext cx="5501487" cy="1295400"/>
           </a:xfrm>
           <a:prstGeom prst="rect">
             <a:avLst/>
@@ -7888,14 +10075,14 @@
       </p:sp>
       <p:sp>
         <p:nvSpPr>
-          <p:cNvPr id="6" name="TextBox 5"/>
+          <p:cNvPr id="8" name="TextBox 7"/>
           <p:cNvSpPr txBox="1"/>
           <p:nvPr/>
         </p:nvSpPr>
         <p:spPr>
           <a:xfrm>
-            <a:off x="685800" y="1691640"/>
-            <a:ext cx="5044287" cy="365760"/>
+            <a:off x="594360" y="5068824"/>
+            <a:ext cx="5227167" cy="274320"/>
           </a:xfrm>
           <a:prstGeom prst="rect">
             <a:avLst/>
@@ -7903,7 +10090,7 @@
           <a:noFill/>
         </p:spPr>
         <p:txBody>
-          <a:bodyPr wrap="square">
+          <a:bodyPr wrap="square" lIns="45720" rIns="45720">
             <a:spAutoFit/>
           </a:bodyPr>
           <a:lstStyle/>
@@ -7914,7 +10101,7 @@
               </a:defRPr>
             </a:pPr>
             <a:r>
-              <a:rPr sz="1100" b="1">
+              <a:rPr sz="1000" b="1">
                 <a:solidFill>
                   <a:srgbClr val="5F6F63"/>
                 </a:solidFill>
@@ -7927,14 +10114,14 @@
       </p:sp>
       <p:sp>
         <p:nvSpPr>
-          <p:cNvPr id="7" name="TextBox 6"/>
+          <p:cNvPr id="9" name="TextBox 8"/>
           <p:cNvSpPr txBox="1"/>
           <p:nvPr/>
         </p:nvSpPr>
         <p:spPr>
           <a:xfrm>
-            <a:off x="685800" y="2103120"/>
-            <a:ext cx="5044287" cy="3749039"/>
+            <a:off x="594360" y="5343144"/>
+            <a:ext cx="5227167" cy="929640"/>
           </a:xfrm>
           <a:prstGeom prst="rect">
             <a:avLst/>
@@ -7942,7 +10129,7 @@
           <a:noFill/>
         </p:spPr>
         <p:txBody>
-          <a:bodyPr wrap="square">
+          <a:bodyPr wrap="square" lIns="45720" rIns="45720">
             <a:spAutoFit/>
           </a:bodyPr>
           <a:lstStyle/>
@@ -7953,27 +10140,27 @@
               </a:defRPr>
             </a:pPr>
             <a:r>
-              <a:rPr sz="1600" b="0">
+              <a:rPr sz="1200" b="0">
                 <a:solidFill>
                   <a:srgbClr val="25342A"/>
                 </a:solidFill>
                 <a:latin typeface="Roboto"/>
               </a:rPr>
-              <a:t>Digital literacy cost $8,022 in full in May: $4,635 paid by the Philanthropic foundation grant, and $3,387 of shared costs no grant covers. It has spent 100.9% of its budget to date, with $49,629 left and 10 months to go.</a:t>
-            </a:r>
-          </a:p>
-        </p:txBody>
-      </p:sp>
-      <p:sp>
-        <p:nvSpPr>
-          <p:cNvPr id="8" name="Rectangle 7"/>
+              <a:t>Volunteer coordinator cost $4,585 in full in May: $2,649 paid by the State volunteering grant grant, and $1,936 of shared costs no grant covers. It has spent 101.5% of its budget to date, with $26,864 left and 9 months to go.</a:t>
+            </a:r>
+          </a:p>
+        </p:txBody>
+      </p:sp>
+      <p:sp>
+        <p:nvSpPr>
+          <p:cNvPr id="10" name="Rectangle 9"/>
           <p:cNvSpPr/>
           <p:nvPr/>
         </p:nvSpPr>
         <p:spPr>
           <a:xfrm>
-            <a:off x="6233007" y="1554480"/>
-            <a:ext cx="5501487" cy="4389120"/>
+            <a:off x="6233007" y="5013960"/>
+            <a:ext cx="5501487" cy="1295400"/>
           </a:xfrm>
           <a:prstGeom prst="rect">
             <a:avLst/>
@@ -8015,14 +10202,14 @@
       </p:sp>
       <p:sp>
         <p:nvSpPr>
-          <p:cNvPr id="9" name="TextBox 8"/>
+          <p:cNvPr id="11" name="TextBox 10"/>
           <p:cNvSpPr txBox="1"/>
           <p:nvPr/>
         </p:nvSpPr>
         <p:spPr>
           <a:xfrm>
-            <a:off x="6461607" y="1691640"/>
-            <a:ext cx="5044287" cy="365760"/>
+            <a:off x="6370167" y="5068824"/>
+            <a:ext cx="5227167" cy="274320"/>
           </a:xfrm>
           <a:prstGeom prst="rect">
             <a:avLst/>
@@ -8030,7 +10217,7 @@
           <a:noFill/>
         </p:spPr>
         <p:txBody>
-          <a:bodyPr wrap="square">
+          <a:bodyPr wrap="square" lIns="45720" rIns="45720">
             <a:spAutoFit/>
           </a:bodyPr>
           <a:lstStyle/>
@@ -8041,7 +10228,7 @@
               </a:defRPr>
             </a:pPr>
             <a:r>
-              <a:rPr sz="1100" b="1">
+              <a:rPr sz="1000" b="1">
                 <a:solidFill>
                   <a:srgbClr val="5F6F63"/>
                 </a:solidFill>
@@ -8054,14 +10241,14 @@
       </p:sp>
       <p:sp>
         <p:nvSpPr>
-          <p:cNvPr id="10" name="TextBox 9"/>
+          <p:cNvPr id="12" name="TextBox 11"/>
           <p:cNvSpPr txBox="1"/>
           <p:nvPr/>
         </p:nvSpPr>
         <p:spPr>
           <a:xfrm>
-            <a:off x="6461607" y="2103120"/>
-            <a:ext cx="5044287" cy="3749039"/>
+            <a:off x="6370167" y="5343144"/>
+            <a:ext cx="5227167" cy="929640"/>
           </a:xfrm>
           <a:prstGeom prst="rect">
             <a:avLst/>
@@ -8069,7 +10256,7 @@
           <a:noFill/>
         </p:spPr>
         <p:txBody>
-          <a:bodyPr wrap="square">
+          <a:bodyPr wrap="square" lIns="45720" rIns="45720">
             <a:spAutoFit/>
           </a:bodyPr>
           <a:lstStyle/>
@@ -8080,27 +10267,27 @@
               </a:defRPr>
             </a:pPr>
             <a:r>
-              <a:rPr sz="1600" b="0">
+              <a:rPr sz="1200" b="0">
                 <a:solidFill>
                   <a:srgbClr val="25342A"/>
                 </a:solidFill>
                 <a:latin typeface="Roboto"/>
               </a:rPr>
-              <a:t>The full cost is $8,022 a month; $3,387 of it is shared cost the grant doesn't pay for. Worth asking for as much of it as the funder allows at renewal.</a:t>
-            </a:r>
-          </a:p>
-        </p:txBody>
-      </p:sp>
-      <p:sp>
-        <p:nvSpPr>
-          <p:cNvPr id="11" name="TextBox 10"/>
+              <a:t>The full cost is $4,585 a month; $1,936 of it is shared cost the grant doesn't pay for. Worth asking for as much of it as the funder allows at renewal.</a:t>
+            </a:r>
+          </a:p>
+        </p:txBody>
+      </p:sp>
+      <p:sp>
+        <p:nvSpPr>
+          <p:cNvPr id="13" name="TextBox 12"/>
           <p:cNvSpPr txBox="1"/>
           <p:nvPr/>
         </p:nvSpPr>
         <p:spPr>
           <a:xfrm>
             <a:off x="457200" y="6492240"/>
-            <a:ext cx="3657600" cy="274320"/>
+            <a:ext cx="2926080" cy="274320"/>
           </a:xfrm>
           <a:prstGeom prst="rect">
             <a:avLst/>
@@ -8108,7 +10295,7 @@
           <a:noFill/>
         </p:spPr>
         <p:txBody>
-          <a:bodyPr wrap="square">
+          <a:bodyPr wrap="square" lIns="45720" rIns="45720">
             <a:spAutoFit/>
           </a:bodyPr>
           <a:lstStyle/>
@@ -8132,14 +10319,14 @@
       </p:sp>
       <p:sp>
         <p:nvSpPr>
-          <p:cNvPr id="12" name="TextBox 11"/>
+          <p:cNvPr id="14" name="TextBox 13"/>
           <p:cNvSpPr txBox="1"/>
           <p:nvPr/>
         </p:nvSpPr>
         <p:spPr>
           <a:xfrm>
-            <a:off x="4297680" y="6492240"/>
-            <a:ext cx="3657600" cy="274320"/>
+            <a:off x="3108960" y="6492240"/>
+            <a:ext cx="5943600" cy="274320"/>
           </a:xfrm>
           <a:prstGeom prst="rect">
             <a:avLst/>
@@ -8147,7 +10334,7 @@
           <a:noFill/>
         </p:spPr>
         <p:txBody>
-          <a:bodyPr wrap="square">
+          <a:bodyPr wrap="square" lIns="45720" rIns="45720">
             <a:spAutoFit/>
           </a:bodyPr>
           <a:lstStyle/>
@@ -8164,14 +10351,14 @@
                 </a:solidFill>
                 <a:latin typeface="Roboto"/>
               </a:rPr>
-              <a:t>Data retrieved 2pm, Tue 6 Oct 2026 · Sample data</a:t>
-            </a:r>
-          </a:p>
-        </p:txBody>
-      </p:sp>
-      <p:sp>
-        <p:nvSpPr>
-          <p:cNvPr id="13" name="TextBox 12"/>
+              <a:t>Data retrieved 2pm, Tue 6 Oct 2026 · Generated 8 Oct 2026, 9:35am · Sample data · Made with Python (python-pptx)</a:t>
+            </a:r>
+          </a:p>
+        </p:txBody>
+      </p:sp>
+      <p:sp>
+        <p:nvSpPr>
+          <p:cNvPr id="15" name="TextBox 14"/>
           <p:cNvSpPr txBox="1"/>
           <p:nvPr/>
         </p:nvSpPr>
@@ -8186,7 +10373,7 @@
           <a:noFill/>
         </p:spPr>
         <p:txBody>
-          <a:bodyPr wrap="square">
+          <a:bodyPr wrap="square" lIns="45720" rIns="45720">
             <a:spAutoFit/>
           </a:bodyPr>
           <a:lstStyle/>
@@ -8203,521 +10390,7 @@
                 </a:solidFill>
                 <a:latin typeface="Roboto"/>
               </a:rPr>
-              <a:t>Slide 8 of 11</a:t>
-            </a:r>
-          </a:p>
-        </p:txBody>
-      </p:sp>
-    </p:spTree>
-  </p:cSld>
-  <p:clrMapOvr>
-    <a:masterClrMapping/>
-  </p:clrMapOvr>
-</p:sld>
-</file>
-
-<file path=ppt/slides/slide9.xml><?xml version="1.0" encoding="utf-8"?>
-<p:sld xmlns:a="http://schemas.openxmlformats.org/drawingml/2006/main" xmlns:p="http://schemas.openxmlformats.org/presentationml/2006/main" xmlns:r="http://schemas.openxmlformats.org/officeDocument/2006/relationships">
-  <p:cSld>
-    <p:spTree>
-      <p:nvGrpSpPr>
-        <p:cNvPr id="1" name=""/>
-        <p:cNvGrpSpPr/>
-        <p:nvPr/>
-      </p:nvGrpSpPr>
-      <p:grpSpPr/>
-      <p:sp>
-        <p:nvSpPr>
-          <p:cNvPr id="2" name="Rectangle 1"/>
-          <p:cNvSpPr/>
-          <p:nvPr/>
-        </p:nvSpPr>
-        <p:spPr>
-          <a:xfrm>
-            <a:off x="0" y="0"/>
-            <a:ext cx="12191695" cy="73152"/>
-          </a:xfrm>
-          <a:prstGeom prst="rect">
-            <a:avLst/>
-          </a:prstGeom>
-          <a:solidFill>
-            <a:srgbClr val="2F7A5D"/>
-          </a:solidFill>
-          <a:ln>
-            <a:noFill/>
-          </a:ln>
-        </p:spPr>
-        <p:style>
-          <a:lnRef idx="1">
-            <a:schemeClr val="accent1"/>
-          </a:lnRef>
-          <a:fillRef idx="3">
-            <a:schemeClr val="accent1"/>
-          </a:fillRef>
-          <a:effectRef idx="2">
-            <a:schemeClr val="accent1"/>
-          </a:effectRef>
-          <a:fontRef idx="minor">
-            <a:schemeClr val="lt1"/>
-          </a:fontRef>
-        </p:style>
-        <p:txBody>
-          <a:bodyPr rtlCol="0" anchor="ctr"/>
-          <a:lstStyle/>
-          <a:p>
-            <a:pPr algn="ctr">
-              <a:defRPr>
-                <a:latin typeface="Roboto"/>
-              </a:defRPr>
-            </a:pPr>
-          </a:p>
-        </p:txBody>
-      </p:sp>
-      <p:sp>
-        <p:nvSpPr>
-          <p:cNvPr id="3" name="TextBox 2"/>
-          <p:cNvSpPr txBox="1"/>
-          <p:nvPr/>
-        </p:nvSpPr>
-        <p:spPr>
-          <a:xfrm>
-            <a:off x="457200" y="164592"/>
-            <a:ext cx="7315200" cy="274320"/>
-          </a:xfrm>
-          <a:prstGeom prst="rect">
-            <a:avLst/>
-          </a:prstGeom>
-          <a:noFill/>
-        </p:spPr>
-        <p:txBody>
-          <a:bodyPr wrap="square">
-            <a:spAutoFit/>
-          </a:bodyPr>
-          <a:lstStyle/>
-          <a:p>
-            <a:pPr>
-              <a:defRPr>
-                <a:latin typeface="Roboto"/>
-              </a:defRPr>
-            </a:pPr>
-            <a:r>
-              <a:rPr sz="1000" b="0">
-                <a:solidFill>
-                  <a:srgbClr val="5F6F63"/>
-                </a:solidFill>
-                <a:latin typeface="Roboto"/>
-              </a:rPr>
-              <a:t>Sample Community Services Ltd · What does each program really cost?</a:t>
-            </a:r>
-          </a:p>
-        </p:txBody>
-      </p:sp>
-      <p:sp>
-        <p:nvSpPr>
-          <p:cNvPr id="4" name="TextBox 3"/>
-          <p:cNvSpPr txBox="1"/>
-          <p:nvPr/>
-        </p:nvSpPr>
-        <p:spPr>
-          <a:xfrm>
-            <a:off x="457200" y="411480"/>
-            <a:ext cx="11247120" cy="548640"/>
-          </a:xfrm>
-          <a:prstGeom prst="rect">
-            <a:avLst/>
-          </a:prstGeom>
-          <a:noFill/>
-        </p:spPr>
-        <p:txBody>
-          <a:bodyPr wrap="square">
-            <a:spAutoFit/>
-          </a:bodyPr>
-          <a:lstStyle/>
-          <a:p>
-            <a:pPr>
-              <a:defRPr>
-                <a:latin typeface="Roboto"/>
-              </a:defRPr>
-            </a:pPr>
-            <a:r>
-              <a:rPr sz="2400" b="1">
-                <a:solidFill>
-                  <a:srgbClr val="25342A"/>
-                </a:solidFill>
-                <a:latin typeface="Roboto"/>
-              </a:rPr>
-              <a:t>What it shows · Program: Community meals (2025-26)</a:t>
-            </a:r>
-          </a:p>
-        </p:txBody>
-      </p:sp>
-      <p:sp>
-        <p:nvSpPr>
-          <p:cNvPr id="5" name="Rectangle 4"/>
-          <p:cNvSpPr/>
-          <p:nvPr/>
-        </p:nvSpPr>
-        <p:spPr>
-          <a:xfrm>
-            <a:off x="457200" y="1554480"/>
-            <a:ext cx="5501487" cy="4389120"/>
-          </a:xfrm>
-          <a:prstGeom prst="rect">
-            <a:avLst/>
-          </a:prstGeom>
-          <a:solidFill>
-            <a:srgbClr val="FFFFFF"/>
-          </a:solidFill>
-          <a:ln>
-            <a:solidFill>
-              <a:srgbClr val="DCE8DC"/>
-            </a:solidFill>
-          </a:ln>
-        </p:spPr>
-        <p:style>
-          <a:lnRef idx="1">
-            <a:schemeClr val="accent1"/>
-          </a:lnRef>
-          <a:fillRef idx="3">
-            <a:schemeClr val="accent1"/>
-          </a:fillRef>
-          <a:effectRef idx="2">
-            <a:schemeClr val="accent1"/>
-          </a:effectRef>
-          <a:fontRef idx="minor">
-            <a:schemeClr val="lt1"/>
-          </a:fontRef>
-        </p:style>
-        <p:txBody>
-          <a:bodyPr rtlCol="0" anchor="ctr"/>
-          <a:lstStyle/>
-          <a:p>
-            <a:pPr algn="ctr">
-              <a:defRPr>
-                <a:latin typeface="Roboto"/>
-              </a:defRPr>
-            </a:pPr>
-          </a:p>
-        </p:txBody>
-      </p:sp>
-      <p:sp>
-        <p:nvSpPr>
-          <p:cNvPr id="6" name="TextBox 5"/>
-          <p:cNvSpPr txBox="1"/>
-          <p:nvPr/>
-        </p:nvSpPr>
-        <p:spPr>
-          <a:xfrm>
-            <a:off x="685800" y="1691640"/>
-            <a:ext cx="5044287" cy="365760"/>
-          </a:xfrm>
-          <a:prstGeom prst="rect">
-            <a:avLst/>
-          </a:prstGeom>
-          <a:noFill/>
-        </p:spPr>
-        <p:txBody>
-          <a:bodyPr wrap="square">
-            <a:spAutoFit/>
-          </a:bodyPr>
-          <a:lstStyle/>
-          <a:p>
-            <a:pPr>
-              <a:defRPr>
-                <a:latin typeface="Roboto"/>
-              </a:defRPr>
-            </a:pPr>
-            <a:r>
-              <a:rPr sz="1100" b="1">
-                <a:solidFill>
-                  <a:srgbClr val="5F6F63"/>
-                </a:solidFill>
-                <a:latin typeface="Roboto"/>
-              </a:rPr>
-              <a:t>WHAT IT SHOWS</a:t>
-            </a:r>
-          </a:p>
-        </p:txBody>
-      </p:sp>
-      <p:sp>
-        <p:nvSpPr>
-          <p:cNvPr id="7" name="TextBox 6"/>
-          <p:cNvSpPr txBox="1"/>
-          <p:nvPr/>
-        </p:nvSpPr>
-        <p:spPr>
-          <a:xfrm>
-            <a:off x="685800" y="2103120"/>
-            <a:ext cx="5044287" cy="3749039"/>
-          </a:xfrm>
-          <a:prstGeom prst="rect">
-            <a:avLst/>
-          </a:prstGeom>
-          <a:noFill/>
-        </p:spPr>
-        <p:txBody>
-          <a:bodyPr wrap="square">
-            <a:spAutoFit/>
-          </a:bodyPr>
-          <a:lstStyle/>
-          <a:p>
-            <a:pPr>
-              <a:defRPr>
-                <a:latin typeface="Roboto"/>
-              </a:defRPr>
-            </a:pPr>
-            <a:r>
-              <a:rPr sz="1600" b="0">
-                <a:solidFill>
-                  <a:srgbClr val="25342A"/>
-                </a:solidFill>
-                <a:latin typeface="Roboto"/>
-              </a:rPr>
-              <a:t>Community meals (2025-26) cost $6,058 in full in May: $3,500 paid by the Local council community grant grant, and $2,558 of shared costs no grant covers. It has spent 97.4% of its budget to date, with $4,700 left and 1 months to go.</a:t>
-            </a:r>
-          </a:p>
-        </p:txBody>
-      </p:sp>
-      <p:sp>
-        <p:nvSpPr>
-          <p:cNvPr id="8" name="Rectangle 7"/>
-          <p:cNvSpPr/>
-          <p:nvPr/>
-        </p:nvSpPr>
-        <p:spPr>
-          <a:xfrm>
-            <a:off x="6233007" y="1554480"/>
-            <a:ext cx="5501487" cy="4389120"/>
-          </a:xfrm>
-          <a:prstGeom prst="rect">
-            <a:avLst/>
-          </a:prstGeom>
-          <a:solidFill>
-            <a:srgbClr val="EEF5F0"/>
-          </a:solidFill>
-          <a:ln>
-            <a:solidFill>
-              <a:srgbClr val="DCE8DC"/>
-            </a:solidFill>
-          </a:ln>
-        </p:spPr>
-        <p:style>
-          <a:lnRef idx="1">
-            <a:schemeClr val="accent1"/>
-          </a:lnRef>
-          <a:fillRef idx="3">
-            <a:schemeClr val="accent1"/>
-          </a:fillRef>
-          <a:effectRef idx="2">
-            <a:schemeClr val="accent1"/>
-          </a:effectRef>
-          <a:fontRef idx="minor">
-            <a:schemeClr val="lt1"/>
-          </a:fontRef>
-        </p:style>
-        <p:txBody>
-          <a:bodyPr rtlCol="0" anchor="ctr"/>
-          <a:lstStyle/>
-          <a:p>
-            <a:pPr algn="ctr">
-              <a:defRPr>
-                <a:latin typeface="Roboto"/>
-              </a:defRPr>
-            </a:pPr>
-          </a:p>
-        </p:txBody>
-      </p:sp>
-      <p:sp>
-        <p:nvSpPr>
-          <p:cNvPr id="9" name="TextBox 8"/>
-          <p:cNvSpPr txBox="1"/>
-          <p:nvPr/>
-        </p:nvSpPr>
-        <p:spPr>
-          <a:xfrm>
-            <a:off x="6461607" y="1691640"/>
-            <a:ext cx="5044287" cy="365760"/>
-          </a:xfrm>
-          <a:prstGeom prst="rect">
-            <a:avLst/>
-          </a:prstGeom>
-          <a:noFill/>
-        </p:spPr>
-        <p:txBody>
-          <a:bodyPr wrap="square">
-            <a:spAutoFit/>
-          </a:bodyPr>
-          <a:lstStyle/>
-          <a:p>
-            <a:pPr>
-              <a:defRPr>
-                <a:latin typeface="Roboto"/>
-              </a:defRPr>
-            </a:pPr>
-            <a:r>
-              <a:rPr sz="1100" b="1">
-                <a:solidFill>
-                  <a:srgbClr val="5F6F63"/>
-                </a:solidFill>
-                <a:latin typeface="Roboto"/>
-              </a:rPr>
-              <a:t>WHAT YOU'D DO ABOUT IT</a:t>
-            </a:r>
-          </a:p>
-        </p:txBody>
-      </p:sp>
-      <p:sp>
-        <p:nvSpPr>
-          <p:cNvPr id="10" name="TextBox 9"/>
-          <p:cNvSpPr txBox="1"/>
-          <p:nvPr/>
-        </p:nvSpPr>
-        <p:spPr>
-          <a:xfrm>
-            <a:off x="6461607" y="2103120"/>
-            <a:ext cx="5044287" cy="3749039"/>
-          </a:xfrm>
-          <a:prstGeom prst="rect">
-            <a:avLst/>
-          </a:prstGeom>
-          <a:noFill/>
-        </p:spPr>
-        <p:txBody>
-          <a:bodyPr wrap="square">
-            <a:spAutoFit/>
-          </a:bodyPr>
-          <a:lstStyle/>
-          <a:p>
-            <a:pPr>
-              <a:defRPr>
-                <a:latin typeface="Roboto"/>
-              </a:defRPr>
-            </a:pPr>
-            <a:r>
-              <a:rPr sz="1600" b="0">
-                <a:solidFill>
-                  <a:srgbClr val="25342A"/>
-                </a:solidFill>
-                <a:latin typeface="Roboto"/>
-              </a:rPr>
-              <a:t>The full cost is $6,058 a month; $2,558 of it is shared cost the grant doesn't pay for. Worth asking for as much of it as the funder allows at renewal.</a:t>
-            </a:r>
-          </a:p>
-        </p:txBody>
-      </p:sp>
-      <p:sp>
-        <p:nvSpPr>
-          <p:cNvPr id="11" name="TextBox 10"/>
-          <p:cNvSpPr txBox="1"/>
-          <p:nvPr/>
-        </p:nvSpPr>
-        <p:spPr>
-          <a:xfrm>
-            <a:off x="457200" y="6492240"/>
-            <a:ext cx="3657600" cy="274320"/>
-          </a:xfrm>
-          <a:prstGeom prst="rect">
-            <a:avLst/>
-          </a:prstGeom>
-          <a:noFill/>
-        </p:spPr>
-        <p:txBody>
-          <a:bodyPr wrap="square">
-            <a:spAutoFit/>
-          </a:bodyPr>
-          <a:lstStyle/>
-          <a:p>
-            <a:pPr>
-              <a:defRPr>
-                <a:latin typeface="Roboto"/>
-              </a:defRPr>
-            </a:pPr>
-            <a:r>
-              <a:rPr sz="900" b="0">
-                <a:solidFill>
-                  <a:srgbClr val="5F6F63"/>
-                </a:solidFill>
-                <a:latin typeface="Roboto"/>
-              </a:rPr>
-              <a:t>program-cost.pptx</a:t>
-            </a:r>
-          </a:p>
-        </p:txBody>
-      </p:sp>
-      <p:sp>
-        <p:nvSpPr>
-          <p:cNvPr id="12" name="TextBox 11"/>
-          <p:cNvSpPr txBox="1"/>
-          <p:nvPr/>
-        </p:nvSpPr>
-        <p:spPr>
-          <a:xfrm>
-            <a:off x="4297680" y="6492240"/>
-            <a:ext cx="3657600" cy="274320"/>
-          </a:xfrm>
-          <a:prstGeom prst="rect">
-            <a:avLst/>
-          </a:prstGeom>
-          <a:noFill/>
-        </p:spPr>
-        <p:txBody>
-          <a:bodyPr wrap="square">
-            <a:spAutoFit/>
-          </a:bodyPr>
-          <a:lstStyle/>
-          <a:p>
-            <a:pPr algn="ctr">
-              <a:defRPr>
-                <a:latin typeface="Roboto"/>
-              </a:defRPr>
-            </a:pPr>
-            <a:r>
-              <a:rPr sz="900" b="0">
-                <a:solidFill>
-                  <a:srgbClr val="5F6F63"/>
-                </a:solidFill>
-                <a:latin typeface="Roboto"/>
-              </a:rPr>
-              <a:t>Data retrieved 2pm, Tue 6 Oct 2026 · Sample data</a:t>
-            </a:r>
-          </a:p>
-        </p:txBody>
-      </p:sp>
-      <p:sp>
-        <p:nvSpPr>
-          <p:cNvPr id="13" name="TextBox 12"/>
-          <p:cNvSpPr txBox="1"/>
-          <p:nvPr/>
-        </p:nvSpPr>
-        <p:spPr>
-          <a:xfrm>
-            <a:off x="8503920" y="6492240"/>
-            <a:ext cx="3200400" cy="274320"/>
-          </a:xfrm>
-          <a:prstGeom prst="rect">
-            <a:avLst/>
-          </a:prstGeom>
-          <a:noFill/>
-        </p:spPr>
-        <p:txBody>
-          <a:bodyPr wrap="square">
-            <a:spAutoFit/>
-          </a:bodyPr>
-          <a:lstStyle/>
-          <a:p>
-            <a:pPr algn="r">
-              <a:defRPr>
-                <a:latin typeface="Roboto"/>
-              </a:defRPr>
-            </a:pPr>
-            <a:r>
-              <a:rPr sz="900" b="0">
-                <a:solidFill>
-                  <a:srgbClr val="5F6F63"/>
-                </a:solidFill>
-                <a:latin typeface="Roboto"/>
-              </a:rPr>
-              <a:t>Slide 9 of 11</a:t>
+              <a:t>Slide 8 of 8</a:t>
             </a:r>
           </a:p>
         </p:txBody>
@@ -8731,6 +10404,326 @@
 </file>
 
 <file path=ppt/theme/theme1.xml><?xml version="1.0" encoding="utf-8"?>
+<a:theme xmlns:a="http://schemas.openxmlformats.org/drawingml/2006/main" name="Office Theme">
+  <a:themeElements>
+    <a:clrScheme name="Office">
+      <a:dk1>
+        <a:sysClr val="windowText" lastClr="000000"/>
+      </a:dk1>
+      <a:lt1>
+        <a:sysClr val="window" lastClr="FFFFFF"/>
+      </a:lt1>
+      <a:dk2>
+        <a:srgbClr val="25342A"/>
+      </a:dk2>
+      <a:lt2>
+        <a:srgbClr val="F4F7F2"/>
+      </a:lt2>
+      <a:accent1>
+        <a:srgbClr val="2F7A5D"/>
+      </a:accent1>
+      <a:accent2>
+        <a:srgbClr val="0E9F6E"/>
+      </a:accent2>
+      <a:accent3>
+        <a:srgbClr val="7D8790"/>
+      </a:accent3>
+      <a:accent4>
+        <a:srgbClr val="8A6D3B"/>
+      </a:accent4>
+      <a:accent5>
+        <a:srgbClr val="B42318"/>
+      </a:accent5>
+      <a:accent6>
+        <a:srgbClr val="8E9CAB"/>
+      </a:accent6>
+      <a:hlink>
+        <a:srgbClr val="0000FF"/>
+      </a:hlink>
+      <a:folHlink>
+        <a:srgbClr val="800080"/>
+      </a:folHlink>
+    </a:clrScheme>
+    <a:fontScheme name="Office">
+      <a:majorFont>
+        <a:latin typeface="Roboto"/>
+        <a:ea typeface=""/>
+        <a:cs typeface=""/>
+        <a:font script="Jpan" typeface="ＭＳ Ｐゴシック"/>
+        <a:font script="Hang" typeface="맑은 고딕"/>
+        <a:font script="Hans" typeface="宋体"/>
+        <a:font script="Hant" typeface="新細明體"/>
+        <a:font script="Arab" typeface="Times New Roman"/>
+        <a:font script="Hebr" typeface="Times New Roman"/>
+        <a:font script="Thai" typeface="Angsana New"/>
+        <a:font script="Ethi" typeface="Nyala"/>
+        <a:font script="Beng" typeface="Vrinda"/>
+        <a:font script="Gujr" typeface="Shruti"/>
+        <a:font script="Khmr" typeface="MoolBoran"/>
+        <a:font script="Knda" typeface="Tunga"/>
+        <a:font script="Guru" typeface="Raavi"/>
+        <a:font script="Cans" typeface="Euphemia"/>
+        <a:font script="Cher" typeface="Plantagenet Cherokee"/>
+        <a:font script="Yiii" typeface="Microsoft Yi Baiti"/>
+        <a:font script="Tibt" typeface="Microsoft Himalaya"/>
+        <a:font script="Thaa" typeface="MV Boli"/>
+        <a:font script="Deva" typeface="Mangal"/>
+        <a:font script="Telu" typeface="Gautami"/>
+        <a:font script="Taml" typeface="Latha"/>
+        <a:font script="Syrc" typeface="Estrangelo Edessa"/>
+        <a:font script="Orya" typeface="Kalinga"/>
+        <a:font script="Mlym" typeface="Kartika"/>
+        <a:font script="Laoo" typeface="DokChampa"/>
+        <a:font script="Sinh" typeface="Iskoola Pota"/>
+        <a:font script="Mong" typeface="Mongolian Baiti"/>
+        <a:font script="Viet" typeface="Times New Roman"/>
+        <a:font script="Uigh" typeface="Microsoft Uighur"/>
+        <a:font script="Geor" typeface="Sylfaen"/>
+      </a:majorFont>
+      <a:minorFont>
+        <a:latin typeface="Roboto"/>
+        <a:ea typeface=""/>
+        <a:cs typeface=""/>
+        <a:font script="Jpan" typeface="ＭＳ Ｐゴシック"/>
+        <a:font script="Hang" typeface="맑은 고딕"/>
+        <a:font script="Hans" typeface="宋体"/>
+        <a:font script="Hant" typeface="新細明體"/>
+        <a:font script="Arab" typeface="Arial"/>
+        <a:font script="Hebr" typeface="Arial"/>
+        <a:font script="Thai" typeface="Cordia New"/>
+        <a:font script="Ethi" typeface="Nyala"/>
+        <a:font script="Beng" typeface="Vrinda"/>
+        <a:font script="Gujr" typeface="Shruti"/>
+        <a:font script="Khmr" typeface="DaunPenh"/>
+        <a:font script="Knda" typeface="Tunga"/>
+        <a:font script="Guru" typeface="Raavi"/>
+        <a:font script="Cans" typeface="Euphemia"/>
+        <a:font script="Cher" typeface="Plantagenet Cherokee"/>
+        <a:font script="Yiii" typeface="Microsoft Yi Baiti"/>
+        <a:font script="Tibt" typeface="Microsoft Himalaya"/>
+        <a:font script="Thaa" typeface="MV Boli"/>
+        <a:font script="Deva" typeface="Mangal"/>
+        <a:font script="Telu" typeface="Gautami"/>
+        <a:font script="Taml" typeface="Latha"/>
+        <a:font script="Syrc" typeface="Estrangelo Edessa"/>
+        <a:font script="Orya" typeface="Kalinga"/>
+        <a:font script="Mlym" typeface="Kartika"/>
+        <a:font script="Laoo" typeface="DokChampa"/>
+        <a:font script="Sinh" typeface="Iskoola Pota"/>
+        <a:font script="Mong" typeface="Mongolian Baiti"/>
+        <a:font script="Viet" typeface="Arial"/>
+        <a:font script="Uigh" typeface="Microsoft Uighur"/>
+        <a:font script="Geor" typeface="Sylfaen"/>
+      </a:minorFont>
+    </a:fontScheme>
+    <a:fmtScheme name="Office">
+      <a:fillStyleLst>
+        <a:solidFill>
+          <a:schemeClr val="phClr"/>
+        </a:solidFill>
+        <a:gradFill rotWithShape="1">
+          <a:gsLst>
+            <a:gs pos="0">
+              <a:schemeClr val="phClr">
+                <a:tint val="50000"/>
+                <a:satMod val="300000"/>
+              </a:schemeClr>
+            </a:gs>
+            <a:gs pos="35000">
+              <a:schemeClr val="phClr">
+                <a:tint val="37000"/>
+                <a:satMod val="300000"/>
+              </a:schemeClr>
+            </a:gs>
+            <a:gs pos="100000">
+              <a:schemeClr val="phClr">
+                <a:tint val="15000"/>
+                <a:satMod val="350000"/>
+              </a:schemeClr>
+            </a:gs>
+          </a:gsLst>
+          <a:lin ang="16200000" scaled="1"/>
+        </a:gradFill>
+        <a:gradFill rotWithShape="1">
+          <a:gsLst>
+            <a:gs pos="0">
+              <a:schemeClr val="phClr">
+                <a:tint val="100000"/>
+                <a:shade val="100000"/>
+                <a:satMod val="130000"/>
+              </a:schemeClr>
+            </a:gs>
+            <a:gs pos="100000">
+              <a:schemeClr val="phClr">
+                <a:tint val="50000"/>
+                <a:shade val="100000"/>
+                <a:satMod val="350000"/>
+              </a:schemeClr>
+            </a:gs>
+          </a:gsLst>
+          <a:lin ang="16200000" scaled="0"/>
+        </a:gradFill>
+      </a:fillStyleLst>
+      <a:lnStyleLst>
+        <a:ln w="9525" cap="flat" cmpd="sng" algn="ctr">
+          <a:solidFill>
+            <a:schemeClr val="phClr">
+              <a:shade val="95000"/>
+              <a:satMod val="105000"/>
+            </a:schemeClr>
+          </a:solidFill>
+          <a:prstDash val="solid"/>
+        </a:ln>
+        <a:ln w="25400" cap="flat" cmpd="sng" algn="ctr">
+          <a:solidFill>
+            <a:schemeClr val="phClr"/>
+          </a:solidFill>
+          <a:prstDash val="solid"/>
+        </a:ln>
+        <a:ln w="38100" cap="flat" cmpd="sng" algn="ctr">
+          <a:solidFill>
+            <a:schemeClr val="phClr"/>
+          </a:solidFill>
+          <a:prstDash val="solid"/>
+        </a:ln>
+      </a:lnStyleLst>
+      <a:effectStyleLst>
+        <a:effectStyle>
+          <a:effectLst>
+            <a:outerShdw blurRad="40000" dist="20000" dir="5400000" rotWithShape="0">
+              <a:srgbClr val="000000">
+                <a:alpha val="38000"/>
+              </a:srgbClr>
+            </a:outerShdw>
+          </a:effectLst>
+        </a:effectStyle>
+        <a:effectStyle>
+          <a:effectLst>
+            <a:outerShdw blurRad="40000" dist="23000" dir="5400000" rotWithShape="0">
+              <a:srgbClr val="000000">
+                <a:alpha val="35000"/>
+              </a:srgbClr>
+            </a:outerShdw>
+          </a:effectLst>
+        </a:effectStyle>
+        <a:effectStyle>
+          <a:effectLst>
+            <a:outerShdw blurRad="40000" dist="23000" dir="5400000" rotWithShape="0">
+              <a:srgbClr val="000000">
+                <a:alpha val="35000"/>
+              </a:srgbClr>
+            </a:outerShdw>
+          </a:effectLst>
+          <a:scene3d>
+            <a:camera prst="orthographicFront">
+              <a:rot lat="0" lon="0" rev="0"/>
+            </a:camera>
+            <a:lightRig rig="threePt" dir="t">
+              <a:rot lat="0" lon="0" rev="1200000"/>
+            </a:lightRig>
+          </a:scene3d>
+          <a:sp3d>
+            <a:bevelT w="63500" h="25400"/>
+          </a:sp3d>
+        </a:effectStyle>
+      </a:effectStyleLst>
+      <a:bgFillStyleLst>
+        <a:solidFill>
+          <a:schemeClr val="phClr"/>
+        </a:solidFill>
+        <a:gradFill rotWithShape="1">
+          <a:gsLst>
+            <a:gs pos="0">
+              <a:schemeClr val="phClr">
+                <a:tint val="40000"/>
+                <a:satMod val="350000"/>
+              </a:schemeClr>
+            </a:gs>
+            <a:gs pos="40000">
+              <a:schemeClr val="phClr">
+                <a:tint val="45000"/>
+                <a:shade val="99000"/>
+                <a:satMod val="350000"/>
+              </a:schemeClr>
+            </a:gs>
+            <a:gs pos="100000">
+              <a:schemeClr val="phClr">
+                <a:shade val="20000"/>
+                <a:satMod val="255000"/>
+              </a:schemeClr>
+            </a:gs>
+          </a:gsLst>
+          <a:path path="circle">
+            <a:fillToRect l="50000" t="-80000" r="50000" b="180000"/>
+          </a:path>
+        </a:gradFill>
+        <a:gradFill rotWithShape="1">
+          <a:gsLst>
+            <a:gs pos="0">
+              <a:schemeClr val="phClr">
+                <a:tint val="80000"/>
+                <a:satMod val="300000"/>
+              </a:schemeClr>
+            </a:gs>
+            <a:gs pos="100000">
+              <a:schemeClr val="phClr">
+                <a:shade val="30000"/>
+                <a:satMod val="200000"/>
+              </a:schemeClr>
+            </a:gs>
+          </a:gsLst>
+          <a:path path="circle">
+            <a:fillToRect l="50000" t="50000" r="50000" b="50000"/>
+          </a:path>
+        </a:gradFill>
+      </a:bgFillStyleLst>
+    </a:fmtScheme>
+  </a:themeElements>
+  <a:objectDefaults>
+    <a:spDef>
+      <a:spPr/>
+      <a:bodyPr/>
+      <a:lstStyle/>
+      <a:style>
+        <a:lnRef idx="1">
+          <a:schemeClr val="accent1"/>
+        </a:lnRef>
+        <a:fillRef idx="3">
+          <a:schemeClr val="accent1"/>
+        </a:fillRef>
+        <a:effectRef idx="2">
+          <a:schemeClr val="accent1"/>
+        </a:effectRef>
+        <a:fontRef idx="minor">
+          <a:schemeClr val="lt1"/>
+        </a:fontRef>
+      </a:style>
+    </a:spDef>
+    <a:lnDef>
+      <a:spPr/>
+      <a:bodyPr/>
+      <a:lstStyle/>
+      <a:style>
+        <a:lnRef idx="2">
+          <a:schemeClr val="accent1"/>
+        </a:lnRef>
+        <a:fillRef idx="0">
+          <a:schemeClr val="accent1"/>
+        </a:fillRef>
+        <a:effectRef idx="1">
+          <a:schemeClr val="accent1"/>
+        </a:effectRef>
+        <a:fontRef idx="minor">
+          <a:schemeClr val="tx1"/>
+        </a:fontRef>
+      </a:style>
+    </a:lnDef>
+  </a:objectDefaults>
+  <a:extraClrSchemeLst/>
+</a:theme>
+</file>
+
+<file path=ppt/theme/theme2.xml><?xml version="1.0" encoding="utf-8"?>
 <a:theme xmlns:a="http://schemas.openxmlformats.org/drawingml/2006/main" name="Office Theme">
   <a:themeElements>
     <a:clrScheme name="Office">

--- a/media/exports/reports/2026-05/program-cost.pptx
+++ b/media/exports/reports/2026-05/program-cost.pptx
@@ -2463,7 +2463,7 @@
           <a:lstStyle/>
           <a:p>
             <a:r>
-              <a:t>What does each program really cost?. Sample Community Services Ltd. Period: May 2026. Each program's full cost: what its grant pays for, plus its fair share of the costs no single grant covers (untied program costs and administration, shared by grant spending). Pick a program and every chart and note follows it.</a:t>
+              <a:t>What does each program really cost?. Sample Community Services Ltd. Period: May 2026. In short: Housing support costs $54,240 in full in May: $22,903 more than its grant spending, once its share of shared costs is added. Each program's full cost: what its grant pays for, plus its fair share of the costs no single grant covers (untied program costs and administration, shared by grant spending). Pick a program and every chart and note follows it.</a:t>
             </a:r>
           </a:p>
         </p:txBody>
@@ -6178,7 +6178,7 @@
         <p:spPr>
           <a:xfrm>
             <a:off x="457200" y="3703320"/>
-            <a:ext cx="11277295" cy="535940"/>
+            <a:ext cx="11277295" cy="980440"/>
           </a:xfrm>
           <a:prstGeom prst="rect">
             <a:avLst/>
@@ -6203,7 +6203,7 @@
                 </a:solidFill>
                 <a:latin typeface="Roboto"/>
               </a:rPr>
-              <a:t>Period: May 2026. Each program's full cost: what its grant pays for, plus its fair share of the costs no single grant covers (untied program costs and administration, shared by grant spending). Pick a program and every chart and note follows it.</a:t>
+              <a:t>Period: May 2026. In short: Housing support costs $54,240 in full in May: $22,903 more than its grant spending, once its share of shared costs is added. Each program's full cost: what its grant pays for, plus its fair share of the costs no single grant covers (untied program costs and administration, shared by grant spending). Pick a program and every chart and note follows it.</a:t>
             </a:r>
           </a:p>
         </p:txBody>
@@ -6216,7 +6216,7 @@
         </p:nvSpPr>
         <p:spPr>
           <a:xfrm>
-            <a:off x="457200" y="4330700"/>
+            <a:off x="457200" y="4775200"/>
             <a:ext cx="11277295" cy="1097280"/>
           </a:xfrm>
           <a:prstGeom prst="rect">
@@ -6368,7 +6368,7 @@
                 </a:solidFill>
                 <a:latin typeface="Roboto"/>
               </a:rPr>
-              <a:t>Data retrieved 2pm, Tue 6 Oct 2026 · Generated 8 Oct 2026, 9:35am · Sample data · Made with Python (python-pptx)</a:t>
+              <a:t>Data retrieved 2pm, Tue 6 Oct 2026 · Generated 10 Oct 2026, 9:55pm · Sample data · Made with Python (python-pptx)</a:t>
             </a:r>
           </a:p>
         </p:txBody>
@@ -6937,7 +6937,7 @@
                 </a:solidFill>
                 <a:latin typeface="Roboto"/>
               </a:rPr>
-              <a:t>Data retrieved 2pm, Tue 6 Oct 2026 · Generated 8 Oct 2026, 9:35am · Sample data · Made with Python (python-pptx)</a:t>
+              <a:t>Data retrieved 2pm, Tue 6 Oct 2026 · Generated 10 Oct 2026, 9:55pm · Sample data · Made with Python (python-pptx)</a:t>
             </a:r>
           </a:p>
         </p:txBody>
@@ -7506,7 +7506,7 @@
                 </a:solidFill>
                 <a:latin typeface="Roboto"/>
               </a:rPr>
-              <a:t>Data retrieved 2pm, Tue 6 Oct 2026 · Generated 8 Oct 2026, 9:35am · Sample data · Made with Python (python-pptx)</a:t>
+              <a:t>Data retrieved 2pm, Tue 6 Oct 2026 · Generated 10 Oct 2026, 9:55pm · Sample data · Made with Python (python-pptx)</a:t>
             </a:r>
           </a:p>
         </p:txBody>
@@ -8075,7 +8075,7 @@
                 </a:solidFill>
                 <a:latin typeface="Roboto"/>
               </a:rPr>
-              <a:t>Data retrieved 2pm, Tue 6 Oct 2026 · Generated 8 Oct 2026, 9:35am · Sample data · Made with Python (python-pptx)</a:t>
+              <a:t>Data retrieved 2pm, Tue 6 Oct 2026 · Generated 10 Oct 2026, 9:55pm · Sample data · Made with Python (python-pptx)</a:t>
             </a:r>
           </a:p>
         </p:txBody>
@@ -8644,7 +8644,7 @@
                 </a:solidFill>
                 <a:latin typeface="Roboto"/>
               </a:rPr>
-              <a:t>Data retrieved 2pm, Tue 6 Oct 2026 · Generated 8 Oct 2026, 9:35am · Sample data · Made with Python (python-pptx)</a:t>
+              <a:t>Data retrieved 2pm, Tue 6 Oct 2026 · Generated 10 Oct 2026, 9:55pm · Sample data · Made with Python (python-pptx)</a:t>
             </a:r>
           </a:p>
         </p:txBody>
@@ -9213,7 +9213,7 @@
                 </a:solidFill>
                 <a:latin typeface="Roboto"/>
               </a:rPr>
-              <a:t>Data retrieved 2pm, Tue 6 Oct 2026 · Generated 8 Oct 2026, 9:35am · Sample data · Made with Python (python-pptx)</a:t>
+              <a:t>Data retrieved 2pm, Tue 6 Oct 2026 · Generated 10 Oct 2026, 9:55pm · Sample data · Made with Python (python-pptx)</a:t>
             </a:r>
           </a:p>
         </p:txBody>
@@ -9782,7 +9782,7 @@
                 </a:solidFill>
                 <a:latin typeface="Roboto"/>
               </a:rPr>
-              <a:t>Data retrieved 2pm, Tue 6 Oct 2026 · Generated 8 Oct 2026, 9:35am · Sample data · Made with Python (python-pptx)</a:t>
+              <a:t>Data retrieved 2pm, Tue 6 Oct 2026 · Generated 10 Oct 2026, 9:55pm · Sample data · Made with Python (python-pptx)</a:t>
             </a:r>
           </a:p>
         </p:txBody>
@@ -10351,7 +10351,7 @@
                 </a:solidFill>
                 <a:latin typeface="Roboto"/>
               </a:rPr>
-              <a:t>Data retrieved 2pm, Tue 6 Oct 2026 · Generated 8 Oct 2026, 9:35am · Sample data · Made with Python (python-pptx)</a:t>
+              <a:t>Data retrieved 2pm, Tue 6 Oct 2026 · Generated 10 Oct 2026, 9:55pm · Sample data · Made with Python (python-pptx)</a:t>
             </a:r>
           </a:p>
         </p:txBody>
